--- a/docs/Cloud_Computing_Solo_Project_Presentation.pptx
+++ b/docs/Cloud_Computing_Solo_Project_Presentation.pptx
@@ -5666,7 +5666,7 @@
         <p:spPr>
           <a:xfrm>
             <a:off x="8521700" y="1981200"/>
-            <a:ext cx="2768600" cy="492443"/>
+            <a:ext cx="2768600" cy="892552"/>
           </a:xfrm>
           <a:prstGeom prst="rect">
             <a:avLst/>
@@ -5686,7 +5686,7 @@
                 </a:solidFill>
                 <a:latin typeface="Calibri" panose="020F0502020204030204" pitchFamily="34" charset="0"/>
               </a:rPr>
-              <a:t>Each line contains project, page title, request count, and transferred bytes.</a:t>
+              <a:t>Each line contains project, page title, view count, and response size. The analytics use the project, page, and view count fields.</a:t>
             </a:r>
             <a:endParaRPr lang="az-Cyrl-AZ" sz="1300">
               <a:solidFill>
@@ -6759,7 +6759,7 @@
                 </a:solidFill>
                 <a:latin typeface="Calibri" panose="020F0502020204030204" pitchFamily="34" charset="0"/>
               </a:rPr>
-              <a:t>Job 2 performs analytics: aggregates page views and bytes, ranks top projects and top pages, and writes compact result files.</a:t>
+              <a:t>Job 2 performs analytics: aggregates page views, ranks the most visited projects and pages, and writes compact result files.</a:t>
             </a:r>
           </a:p>
           <a:p>

--- a/docs/Cloud_Computing_Solo_Project_Presentation.pptx
+++ b/docs/Cloud_Computing_Solo_Project_Presentation.pptx
@@ -8,15 +8,16 @@
     <p:sldId id="256" r:id="rId2"/>
     <p:sldId id="257" r:id="rId3"/>
     <p:sldId id="258" r:id="rId4"/>
-    <p:sldId id="259" r:id="rId5"/>
-    <p:sldId id="260" r:id="rId6"/>
-    <p:sldId id="261" r:id="rId7"/>
-    <p:sldId id="262" r:id="rId8"/>
-    <p:sldId id="263" r:id="rId9"/>
-    <p:sldId id="264" r:id="rId10"/>
-    <p:sldId id="265" r:id="rId11"/>
-    <p:sldId id="266" r:id="rId12"/>
-    <p:sldId id="267" r:id="rId13"/>
+    <p:sldId id="268" r:id="rId5"/>
+    <p:sldId id="259" r:id="rId6"/>
+    <p:sldId id="260" r:id="rId7"/>
+    <p:sldId id="261" r:id="rId8"/>
+    <p:sldId id="262" r:id="rId9"/>
+    <p:sldId id="263" r:id="rId10"/>
+    <p:sldId id="264" r:id="rId11"/>
+    <p:sldId id="265" r:id="rId12"/>
+    <p:sldId id="266" r:id="rId13"/>
+    <p:sldId id="267" r:id="rId14"/>
   </p:sldIdLst>
   <p:sldSz cx="12192000" cy="6858000"/>
   <p:notesSz cx="6858000" cy="9144000"/>
@@ -272,7 +273,7 @@
           <a:p>
             <a:fld id="{35584D5C-2839-43FE-8390-D817AD290972}" type="datetimeFigureOut">
               <a:rPr lang="az-Cyrl-AZ" smtClean="0"/>
-              <a:t>04.07.2026</a:t>
+              <a:t>05.07.2026</a:t>
             </a:fld>
             <a:endParaRPr lang="az-Cyrl-AZ"/>
           </a:p>
@@ -472,7 +473,7 @@
           <a:p>
             <a:fld id="{35584D5C-2839-43FE-8390-D817AD290972}" type="datetimeFigureOut">
               <a:rPr lang="az-Cyrl-AZ" smtClean="0"/>
-              <a:t>04.07.2026</a:t>
+              <a:t>05.07.2026</a:t>
             </a:fld>
             <a:endParaRPr lang="az-Cyrl-AZ"/>
           </a:p>
@@ -682,7 +683,7 @@
           <a:p>
             <a:fld id="{35584D5C-2839-43FE-8390-D817AD290972}" type="datetimeFigureOut">
               <a:rPr lang="az-Cyrl-AZ" smtClean="0"/>
-              <a:t>04.07.2026</a:t>
+              <a:t>05.07.2026</a:t>
             </a:fld>
             <a:endParaRPr lang="az-Cyrl-AZ"/>
           </a:p>
@@ -882,7 +883,7 @@
           <a:p>
             <a:fld id="{35584D5C-2839-43FE-8390-D817AD290972}" type="datetimeFigureOut">
               <a:rPr lang="az-Cyrl-AZ" smtClean="0"/>
-              <a:t>04.07.2026</a:t>
+              <a:t>05.07.2026</a:t>
             </a:fld>
             <a:endParaRPr lang="az-Cyrl-AZ"/>
           </a:p>
@@ -1158,7 +1159,7 @@
           <a:p>
             <a:fld id="{35584D5C-2839-43FE-8390-D817AD290972}" type="datetimeFigureOut">
               <a:rPr lang="az-Cyrl-AZ" smtClean="0"/>
-              <a:t>04.07.2026</a:t>
+              <a:t>05.07.2026</a:t>
             </a:fld>
             <a:endParaRPr lang="az-Cyrl-AZ"/>
           </a:p>
@@ -1426,7 +1427,7 @@
           <a:p>
             <a:fld id="{35584D5C-2839-43FE-8390-D817AD290972}" type="datetimeFigureOut">
               <a:rPr lang="az-Cyrl-AZ" smtClean="0"/>
-              <a:t>04.07.2026</a:t>
+              <a:t>05.07.2026</a:t>
             </a:fld>
             <a:endParaRPr lang="az-Cyrl-AZ"/>
           </a:p>
@@ -1841,7 +1842,7 @@
           <a:p>
             <a:fld id="{35584D5C-2839-43FE-8390-D817AD290972}" type="datetimeFigureOut">
               <a:rPr lang="az-Cyrl-AZ" smtClean="0"/>
-              <a:t>04.07.2026</a:t>
+              <a:t>05.07.2026</a:t>
             </a:fld>
             <a:endParaRPr lang="az-Cyrl-AZ"/>
           </a:p>
@@ -1983,7 +1984,7 @@
           <a:p>
             <a:fld id="{35584D5C-2839-43FE-8390-D817AD290972}" type="datetimeFigureOut">
               <a:rPr lang="az-Cyrl-AZ" smtClean="0"/>
-              <a:t>04.07.2026</a:t>
+              <a:t>05.07.2026</a:t>
             </a:fld>
             <a:endParaRPr lang="az-Cyrl-AZ"/>
           </a:p>
@@ -2096,7 +2097,7 @@
           <a:p>
             <a:fld id="{35584D5C-2839-43FE-8390-D817AD290972}" type="datetimeFigureOut">
               <a:rPr lang="az-Cyrl-AZ" smtClean="0"/>
-              <a:t>04.07.2026</a:t>
+              <a:t>05.07.2026</a:t>
             </a:fld>
             <a:endParaRPr lang="az-Cyrl-AZ"/>
           </a:p>
@@ -2409,7 +2410,7 @@
           <a:p>
             <a:fld id="{35584D5C-2839-43FE-8390-D817AD290972}" type="datetimeFigureOut">
               <a:rPr lang="az-Cyrl-AZ" smtClean="0"/>
-              <a:t>04.07.2026</a:t>
+              <a:t>05.07.2026</a:t>
             </a:fld>
             <a:endParaRPr lang="az-Cyrl-AZ"/>
           </a:p>
@@ -2698,7 +2699,7 @@
           <a:p>
             <a:fld id="{35584D5C-2839-43FE-8390-D817AD290972}" type="datetimeFigureOut">
               <a:rPr lang="az-Cyrl-AZ" smtClean="0"/>
-              <a:t>04.07.2026</a:t>
+              <a:t>05.07.2026</a:t>
             </a:fld>
             <a:endParaRPr lang="az-Cyrl-AZ"/>
           </a:p>
@@ -2941,7 +2942,7 @@
           <a:p>
             <a:fld id="{35584D5C-2839-43FE-8390-D817AD290972}" type="datetimeFigureOut">
               <a:rPr lang="az-Cyrl-AZ" smtClean="0"/>
-              <a:t>04.07.2026</a:t>
+              <a:t>05.07.2026</a:t>
             </a:fld>
             <a:endParaRPr lang="az-Cyrl-AZ"/>
           </a:p>
@@ -3711,7 +3712,7 @@
           <p:cNvPr id="2" name="Rectangle 1">
             <a:extLst>
               <a:ext uri="{FF2B5EF4-FFF2-40B4-BE49-F238E27FC236}">
-                <a16:creationId xmlns:a16="http://schemas.microsoft.com/office/drawing/2014/main" id="{1F1774C5-F335-4D64-926D-99A1951D0DF3}"/>
+                <a16:creationId xmlns:a16="http://schemas.microsoft.com/office/drawing/2014/main" id="{1160E2D7-C6A8-4ED4-A0B1-64FED90EDEA4}"/>
               </a:ext>
             </a:extLst>
           </p:cNvPr>
@@ -3779,7 +3780,7 @@
           <p:cNvPr id="3" name="TextBox 2">
             <a:extLst>
               <a:ext uri="{FF2B5EF4-FFF2-40B4-BE49-F238E27FC236}">
-                <a16:creationId xmlns:a16="http://schemas.microsoft.com/office/drawing/2014/main" id="{6C25AEB7-EE0A-4060-AEEC-86ACE863EDAD}"/>
+                <a16:creationId xmlns:a16="http://schemas.microsoft.com/office/drawing/2014/main" id="{3B639C9F-9DA3-48E8-8D1F-2D250AE26A65}"/>
               </a:ext>
             </a:extLst>
           </p:cNvPr>
@@ -3809,7 +3810,7 @@
                 </a:solidFill>
                 <a:latin typeface="Georgia" panose="02040502050405020303" pitchFamily="18" charset="0"/>
               </a:rPr>
-              <a:t>Memory Usage by Dataset Size</a:t>
+              <a:t>Execution Time by Reducers</a:t>
             </a:r>
             <a:endParaRPr lang="az-Cyrl-AZ" sz="2300" b="1">
               <a:solidFill>
@@ -3825,7 +3826,7 @@
           <p:cNvPr id="4" name="TextBox 3">
             <a:extLst>
               <a:ext uri="{FF2B5EF4-FFF2-40B4-BE49-F238E27FC236}">
-                <a16:creationId xmlns:a16="http://schemas.microsoft.com/office/drawing/2014/main" id="{CBD5107A-1141-4F48-B722-93512BF34F2E}"/>
+                <a16:creationId xmlns:a16="http://schemas.microsoft.com/office/drawing/2014/main" id="{1F7EE90C-A3D0-4F55-852E-B2C40E972385}"/>
               </a:ext>
             </a:extLst>
           </p:cNvPr>
@@ -3855,7 +3856,7 @@
                 </a:solidFill>
                 <a:latin typeface="Calibri" panose="020F0502020204030204" pitchFamily="34" charset="0"/>
               </a:rPr>
-              <a:t>YARN allocation vs Python peak RSS</a:t>
+              <a:t>Effect of reducer count on the 4h dataset</a:t>
             </a:r>
             <a:endParaRPr lang="az-Cyrl-AZ" sz="1600">
               <a:solidFill>
@@ -3871,7 +3872,7 @@
           <p:cNvPr id="5" name="TextBox 4">
             <a:extLst>
               <a:ext uri="{FF2B5EF4-FFF2-40B4-BE49-F238E27FC236}">
-                <a16:creationId xmlns:a16="http://schemas.microsoft.com/office/drawing/2014/main" id="{24D450C4-9F76-4B58-8F3E-7D2CDEF6651B}"/>
+                <a16:creationId xmlns:a16="http://schemas.microsoft.com/office/drawing/2014/main" id="{CD8B4404-6476-496E-83C6-7C3CB722D214}"/>
               </a:ext>
             </a:extLst>
           </p:cNvPr>
@@ -3917,7 +3918,7 @@
           <p:cNvPr id="7" name="Picture 6">
             <a:extLst>
               <a:ext uri="{FF2B5EF4-FFF2-40B4-BE49-F238E27FC236}">
-                <a16:creationId xmlns:a16="http://schemas.microsoft.com/office/drawing/2014/main" id="{83C2570D-29FB-44EB-B2CA-FC118C5EDDC6}"/>
+                <a16:creationId xmlns:a16="http://schemas.microsoft.com/office/drawing/2014/main" id="{96A9BEDC-3C03-4E4F-9913-80D0724C0539}"/>
               </a:ext>
             </a:extLst>
           </p:cNvPr>
@@ -3940,8 +3941,8 @@
         </p:blipFill>
         <p:spPr>
           <a:xfrm>
-            <a:off x="1270000" y="1092200"/>
-            <a:ext cx="9652000" cy="4754889"/>
+            <a:off x="1524000" y="1168400"/>
+            <a:ext cx="9144000" cy="4572009"/>
           </a:xfrm>
           <a:prstGeom prst="rect">
             <a:avLst/>
@@ -3953,7 +3954,7 @@
           <p:cNvPr id="8" name="TextBox 7">
             <a:extLst>
               <a:ext uri="{FF2B5EF4-FFF2-40B4-BE49-F238E27FC236}">
-                <a16:creationId xmlns:a16="http://schemas.microsoft.com/office/drawing/2014/main" id="{9B58C7AA-37B8-4F9F-96CE-01D54B1B0256}"/>
+                <a16:creationId xmlns:a16="http://schemas.microsoft.com/office/drawing/2014/main" id="{1E318364-BD5F-4DAD-8977-A603CC1AFDE2}"/>
               </a:ext>
             </a:extLst>
           </p:cNvPr>
@@ -3962,8 +3963,8 @@
         </p:nvSpPr>
         <p:spPr>
           <a:xfrm>
-            <a:off x="787400" y="5969000"/>
-            <a:ext cx="10617200" cy="492443"/>
+            <a:off x="914400" y="5969000"/>
+            <a:ext cx="10414000" cy="523220"/>
           </a:xfrm>
           <a:prstGeom prst="rect">
             <a:avLst/>
@@ -3977,15 +3978,15 @@
           <a:lstStyle/>
           <a:p>
             <a:r>
-              <a:rPr lang="en-US" sz="1300">
+              <a:rPr lang="en-US" sz="1400">
                 <a:solidFill>
                   <a:srgbClr val="333333"/>
                 </a:solidFill>
                 <a:latin typeface="Calibri" panose="020F0502020204030204" pitchFamily="34" charset="0"/>
               </a:rPr>
-              <a:t>The two memory metrics are not identical: Hadoop reports average allocated YARN memory, while the sequential baseline reports peak process memory. The trend still shows that the Python baseline grows strongly with dataset size.</a:t>
-            </a:r>
-            <a:endParaRPr lang="az-Cyrl-AZ" sz="1300">
+              <a:t>The one-reducer run is the fastest in this pseudo-distributed environment. Additional reducers introduce scheduling and shuffle overhead without enough physical parallelism to compensate.</a:t>
+            </a:r>
+            <a:endParaRPr lang="az-Cyrl-AZ" sz="1400">
               <a:solidFill>
                 <a:srgbClr val="333333"/>
               </a:solidFill>
@@ -3997,7 +3998,7 @@
     </p:spTree>
     <p:extLst>
       <p:ext uri="{BB962C8B-B14F-4D97-AF65-F5344CB8AC3E}">
-        <p14:creationId xmlns:p14="http://schemas.microsoft.com/office/powerpoint/2010/main" val="4018470643"/>
+        <p14:creationId xmlns:p14="http://schemas.microsoft.com/office/powerpoint/2010/main" val="518487562"/>
       </p:ext>
     </p:extLst>
   </p:cSld>
@@ -4029,7 +4030,7 @@
           <p:cNvPr id="2" name="Rectangle 1">
             <a:extLst>
               <a:ext uri="{FF2B5EF4-FFF2-40B4-BE49-F238E27FC236}">
-                <a16:creationId xmlns:a16="http://schemas.microsoft.com/office/drawing/2014/main" id="{0E65490E-2106-4F9F-9E38-B165B46734B1}"/>
+                <a16:creationId xmlns:a16="http://schemas.microsoft.com/office/drawing/2014/main" id="{1F1774C5-F335-4D64-926D-99A1951D0DF3}"/>
               </a:ext>
             </a:extLst>
           </p:cNvPr>
@@ -4097,6 +4098,324 @@
           <p:cNvPr id="3" name="TextBox 2">
             <a:extLst>
               <a:ext uri="{FF2B5EF4-FFF2-40B4-BE49-F238E27FC236}">
+                <a16:creationId xmlns:a16="http://schemas.microsoft.com/office/drawing/2014/main" id="{6C25AEB7-EE0A-4060-AEEC-86ACE863EDAD}"/>
+              </a:ext>
+            </a:extLst>
+          </p:cNvPr>
+          <p:cNvSpPr txBox="1"/>
+          <p:nvPr/>
+        </p:nvSpPr>
+        <p:spPr>
+          <a:xfrm>
+            <a:off x="482600" y="177800"/>
+            <a:ext cx="9652000" cy="446276"/>
+          </a:xfrm>
+          <a:prstGeom prst="rect">
+            <a:avLst/>
+          </a:prstGeom>
+          <a:noFill/>
+        </p:spPr>
+        <p:txBody>
+          <a:bodyPr vert="horz" rtlCol="0">
+            <a:spAutoFit/>
+          </a:bodyPr>
+          <a:lstStyle/>
+          <a:p>
+            <a:r>
+              <a:rPr lang="en-US" sz="2300" b="1">
+                <a:solidFill>
+                  <a:srgbClr val="FFFFFF"/>
+                </a:solidFill>
+                <a:latin typeface="Georgia" panose="02040502050405020303" pitchFamily="18" charset="0"/>
+              </a:rPr>
+              <a:t>Memory Usage by Dataset Size</a:t>
+            </a:r>
+            <a:endParaRPr lang="az-Cyrl-AZ" sz="2300" b="1">
+              <a:solidFill>
+                <a:srgbClr val="FFFFFF"/>
+              </a:solidFill>
+              <a:latin typeface="Georgia" panose="02040502050405020303" pitchFamily="18" charset="0"/>
+            </a:endParaRPr>
+          </a:p>
+        </p:txBody>
+      </p:sp>
+      <p:sp>
+        <p:nvSpPr>
+          <p:cNvPr id="4" name="TextBox 3">
+            <a:extLst>
+              <a:ext uri="{FF2B5EF4-FFF2-40B4-BE49-F238E27FC236}">
+                <a16:creationId xmlns:a16="http://schemas.microsoft.com/office/drawing/2014/main" id="{CBD5107A-1141-4F48-B722-93512BF34F2E}"/>
+              </a:ext>
+            </a:extLst>
+          </p:cNvPr>
+          <p:cNvSpPr txBox="1"/>
+          <p:nvPr/>
+        </p:nvSpPr>
+        <p:spPr>
+          <a:xfrm>
+            <a:off x="482600" y="838200"/>
+            <a:ext cx="10668000" cy="338554"/>
+          </a:xfrm>
+          <a:prstGeom prst="rect">
+            <a:avLst/>
+          </a:prstGeom>
+          <a:noFill/>
+        </p:spPr>
+        <p:txBody>
+          <a:bodyPr vert="horz" rtlCol="0">
+            <a:spAutoFit/>
+          </a:bodyPr>
+          <a:lstStyle/>
+          <a:p>
+            <a:r>
+              <a:rPr lang="en-US" sz="1600">
+                <a:solidFill>
+                  <a:srgbClr val="525252"/>
+                </a:solidFill>
+                <a:latin typeface="Calibri" panose="020F0502020204030204" pitchFamily="34" charset="0"/>
+              </a:rPr>
+              <a:t>YARN allocation vs Python peak RSS</a:t>
+            </a:r>
+            <a:endParaRPr lang="az-Cyrl-AZ" sz="1600">
+              <a:solidFill>
+                <a:srgbClr val="525252"/>
+              </a:solidFill>
+              <a:latin typeface="Calibri" panose="020F0502020204030204" pitchFamily="34" charset="0"/>
+            </a:endParaRPr>
+          </a:p>
+        </p:txBody>
+      </p:sp>
+      <p:sp>
+        <p:nvSpPr>
+          <p:cNvPr id="5" name="TextBox 4">
+            <a:extLst>
+              <a:ext uri="{FF2B5EF4-FFF2-40B4-BE49-F238E27FC236}">
+                <a16:creationId xmlns:a16="http://schemas.microsoft.com/office/drawing/2014/main" id="{24D450C4-9F76-4B58-8F3E-7D2CDEF6651B}"/>
+              </a:ext>
+            </a:extLst>
+          </p:cNvPr>
+          <p:cNvSpPr txBox="1"/>
+          <p:nvPr/>
+        </p:nvSpPr>
+        <p:spPr>
+          <a:xfrm>
+            <a:off x="482600" y="6477000"/>
+            <a:ext cx="10922000" cy="230832"/>
+          </a:xfrm>
+          <a:prstGeom prst="rect">
+            <a:avLst/>
+          </a:prstGeom>
+          <a:noFill/>
+        </p:spPr>
+        <p:txBody>
+          <a:bodyPr vert="horz" rtlCol="0">
+            <a:spAutoFit/>
+          </a:bodyPr>
+          <a:lstStyle/>
+          <a:p>
+            <a:r>
+              <a:rPr lang="en-US" sz="900">
+                <a:solidFill>
+                  <a:srgbClr val="808080"/>
+                </a:solidFill>
+                <a:latin typeface="Calibri" panose="020F0502020204030204" pitchFamily="34" charset="0"/>
+              </a:rPr>
+              <a:t>Cloud Computing - Wikimedia Pageview Analytics</a:t>
+            </a:r>
+            <a:endParaRPr lang="az-Cyrl-AZ" sz="900">
+              <a:solidFill>
+                <a:srgbClr val="808080"/>
+              </a:solidFill>
+              <a:latin typeface="Calibri" panose="020F0502020204030204" pitchFamily="34" charset="0"/>
+            </a:endParaRPr>
+          </a:p>
+        </p:txBody>
+      </p:sp>
+      <p:pic>
+        <p:nvPicPr>
+          <p:cNvPr id="7" name="Picture 6">
+            <a:extLst>
+              <a:ext uri="{FF2B5EF4-FFF2-40B4-BE49-F238E27FC236}">
+                <a16:creationId xmlns:a16="http://schemas.microsoft.com/office/drawing/2014/main" id="{83C2570D-29FB-44EB-B2CA-FC118C5EDDC6}"/>
+              </a:ext>
+            </a:extLst>
+          </p:cNvPr>
+          <p:cNvPicPr>
+            <a:picLocks/>
+          </p:cNvPicPr>
+          <p:nvPr/>
+        </p:nvPicPr>
+        <p:blipFill>
+          <a:blip r:embed="rId2">
+            <a:extLst>
+              <a:ext uri="{28A0092B-C50C-407E-A947-70E740481C1C}">
+                <a14:useLocalDpi xmlns:a14="http://schemas.microsoft.com/office/drawing/2010/main" val="0"/>
+              </a:ext>
+            </a:extLst>
+          </a:blip>
+          <a:stretch>
+            <a:fillRect/>
+          </a:stretch>
+        </p:blipFill>
+        <p:spPr>
+          <a:xfrm>
+            <a:off x="1270000" y="1092200"/>
+            <a:ext cx="9652000" cy="4754889"/>
+          </a:xfrm>
+          <a:prstGeom prst="rect">
+            <a:avLst/>
+          </a:prstGeom>
+        </p:spPr>
+      </p:pic>
+      <p:sp>
+        <p:nvSpPr>
+          <p:cNvPr id="8" name="TextBox 7">
+            <a:extLst>
+              <a:ext uri="{FF2B5EF4-FFF2-40B4-BE49-F238E27FC236}">
+                <a16:creationId xmlns:a16="http://schemas.microsoft.com/office/drawing/2014/main" id="{9B58C7AA-37B8-4F9F-96CE-01D54B1B0256}"/>
+              </a:ext>
+            </a:extLst>
+          </p:cNvPr>
+          <p:cNvSpPr txBox="1"/>
+          <p:nvPr/>
+        </p:nvSpPr>
+        <p:spPr>
+          <a:xfrm>
+            <a:off x="787400" y="5969000"/>
+            <a:ext cx="10617200" cy="492443"/>
+          </a:xfrm>
+          <a:prstGeom prst="rect">
+            <a:avLst/>
+          </a:prstGeom>
+          <a:noFill/>
+        </p:spPr>
+        <p:txBody>
+          <a:bodyPr vert="horz" rtlCol="0">
+            <a:spAutoFit/>
+          </a:bodyPr>
+          <a:lstStyle/>
+          <a:p>
+            <a:r>
+              <a:rPr lang="en-US" sz="1300">
+                <a:solidFill>
+                  <a:srgbClr val="333333"/>
+                </a:solidFill>
+                <a:latin typeface="Calibri" panose="020F0502020204030204" pitchFamily="34" charset="0"/>
+              </a:rPr>
+              <a:t>The two memory metrics are not identical: Hadoop reports average allocated YARN memory, while the sequential baseline reports peak process memory. The trend still shows that the Python baseline grows strongly with dataset size.</a:t>
+            </a:r>
+            <a:endParaRPr lang="az-Cyrl-AZ" sz="1300">
+              <a:solidFill>
+                <a:srgbClr val="333333"/>
+              </a:solidFill>
+              <a:latin typeface="Calibri" panose="020F0502020204030204" pitchFamily="34" charset="0"/>
+            </a:endParaRPr>
+          </a:p>
+        </p:txBody>
+      </p:sp>
+    </p:spTree>
+    <p:extLst>
+      <p:ext uri="{BB962C8B-B14F-4D97-AF65-F5344CB8AC3E}">
+        <p14:creationId xmlns:p14="http://schemas.microsoft.com/office/powerpoint/2010/main" val="4018470643"/>
+      </p:ext>
+    </p:extLst>
+  </p:cSld>
+  <p:clrMapOvr>
+    <a:masterClrMapping/>
+  </p:clrMapOvr>
+</p:sld>
+</file>
+
+<file path=ppt/slides/slide12.xml><?xml version="1.0" encoding="utf-8"?>
+<p:sld xmlns:a="http://schemas.openxmlformats.org/drawingml/2006/main" xmlns:r="http://schemas.openxmlformats.org/officeDocument/2006/relationships" xmlns:p="http://schemas.openxmlformats.org/presentationml/2006/main">
+  <p:cSld>
+    <p:spTree>
+      <p:nvGrpSpPr>
+        <p:cNvPr id="1" name=""/>
+        <p:cNvGrpSpPr/>
+        <p:nvPr/>
+      </p:nvGrpSpPr>
+      <p:grpSpPr>
+        <a:xfrm>
+          <a:off x="0" y="0"/>
+          <a:ext cx="0" cy="0"/>
+          <a:chOff x="0" y="0"/>
+          <a:chExt cx="0" cy="0"/>
+        </a:xfrm>
+      </p:grpSpPr>
+      <p:sp>
+        <p:nvSpPr>
+          <p:cNvPr id="2" name="Rectangle 1">
+            <a:extLst>
+              <a:ext uri="{FF2B5EF4-FFF2-40B4-BE49-F238E27FC236}">
+                <a16:creationId xmlns:a16="http://schemas.microsoft.com/office/drawing/2014/main" id="{0E65490E-2106-4F9F-9E38-B165B46734B1}"/>
+              </a:ext>
+            </a:extLst>
+          </p:cNvPr>
+          <p:cNvSpPr/>
+          <p:nvPr/>
+        </p:nvSpPr>
+        <p:spPr>
+          <a:xfrm>
+            <a:off x="0" y="0"/>
+            <a:ext cx="12192000" cy="685800"/>
+          </a:xfrm>
+          <a:prstGeom prst="rect">
+            <a:avLst/>
+          </a:prstGeom>
+          <a:solidFill>
+            <a:srgbClr val="4EED0B"/>
+          </a:solidFill>
+          <a:ln w="12700" cap="flat" cmpd="sng" algn="ctr">
+            <a:noFill/>
+            <a:prstDash val="solid"/>
+            <a:miter lim="800000"/>
+          </a:ln>
+          <a:effectLst/>
+          <a:extLst>
+            <a:ext uri="{91240B29-F687-4F45-9708-019B960494DF}">
+              <a14:hiddenLine xmlns:a14="http://schemas.microsoft.com/office/drawing/2010/main" w="12700" cap="flat" cmpd="sng" algn="ctr">
+                <a:solidFill>
+                  <a:schemeClr val="accent1">
+                    <a:shade val="50000"/>
+                  </a:schemeClr>
+                </a:solidFill>
+                <a:prstDash val="solid"/>
+                <a:miter lim="800000"/>
+              </a14:hiddenLine>
+            </a:ext>
+          </a:extLst>
+        </p:spPr>
+        <p:style>
+          <a:lnRef idx="2">
+            <a:schemeClr val="accent1">
+              <a:shade val="50000"/>
+            </a:schemeClr>
+          </a:lnRef>
+          <a:fillRef idx="1">
+            <a:schemeClr val="accent1"/>
+          </a:fillRef>
+          <a:effectRef idx="0">
+            <a:schemeClr val="accent1"/>
+          </a:effectRef>
+          <a:fontRef idx="minor">
+            <a:schemeClr val="lt1"/>
+          </a:fontRef>
+        </p:style>
+        <p:txBody>
+          <a:bodyPr rtlCol="0" anchor="ctr"/>
+          <a:lstStyle/>
+          <a:p>
+            <a:pPr algn="ctr"/>
+            <a:endParaRPr lang="az-Cyrl-AZ"/>
+          </a:p>
+        </p:txBody>
+      </p:sp>
+      <p:sp>
+        <p:nvSpPr>
+          <p:cNvPr id="3" name="TextBox 2">
+            <a:extLst>
+              <a:ext uri="{FF2B5EF4-FFF2-40B4-BE49-F238E27FC236}">
                 <a16:creationId xmlns:a16="http://schemas.microsoft.com/office/drawing/2014/main" id="{E7E3F984-5BC7-4030-9E25-375D05519304}"/>
               </a:ext>
             </a:extLst>
@@ -4350,7 +4669,7 @@
 </p:sld>
 </file>
 
-<file path=ppt/slides/slide12.xml><?xml version="1.0" encoding="utf-8"?>
+<file path=ppt/slides/slide13.xml><?xml version="1.0" encoding="utf-8"?>
 <p:sld xmlns:a="http://schemas.openxmlformats.org/drawingml/2006/main" xmlns:r="http://schemas.openxmlformats.org/officeDocument/2006/relationships" xmlns:p="http://schemas.openxmlformats.org/presentationml/2006/main">
   <p:cSld>
     <p:spTree>
@@ -5778,7 +6097,7 @@
           <p:cNvPr id="2" name="Rectangle 1">
             <a:extLst>
               <a:ext uri="{FF2B5EF4-FFF2-40B4-BE49-F238E27FC236}">
-                <a16:creationId xmlns:a16="http://schemas.microsoft.com/office/drawing/2014/main" id="{3E538F13-4F22-4B2F-97E1-D187E038B049}"/>
+                <a16:creationId xmlns:a16="http://schemas.microsoft.com/office/drawing/2014/main" id="{FA407D04-7987-4D15-84AC-EEBB8D02BB74}"/>
               </a:ext>
             </a:extLst>
           </p:cNvPr>
@@ -5846,7 +6165,7 @@
           <p:cNvPr id="3" name="TextBox 2">
             <a:extLst>
               <a:ext uri="{FF2B5EF4-FFF2-40B4-BE49-F238E27FC236}">
-                <a16:creationId xmlns:a16="http://schemas.microsoft.com/office/drawing/2014/main" id="{72FDCF7A-DB6B-44CD-B030-E209BDA9F1E2}"/>
+                <a16:creationId xmlns:a16="http://schemas.microsoft.com/office/drawing/2014/main" id="{AD6BBD7D-40FE-481B-B69F-5B9C66AC3256}"/>
               </a:ext>
             </a:extLst>
           </p:cNvPr>
@@ -5876,7 +6195,7 @@
                 </a:solidFill>
                 <a:latin typeface="Georgia" panose="02040502050405020303" pitchFamily="18" charset="0"/>
               </a:rPr>
-              <a:t>System Architecture</a:t>
+              <a:t>Dataset Size</a:t>
             </a:r>
             <a:endParaRPr lang="az-Cyrl-AZ" sz="2300" b="1">
               <a:solidFill>
@@ -5892,7 +6211,7 @@
           <p:cNvPr id="4" name="TextBox 3">
             <a:extLst>
               <a:ext uri="{FF2B5EF4-FFF2-40B4-BE49-F238E27FC236}">
-                <a16:creationId xmlns:a16="http://schemas.microsoft.com/office/drawing/2014/main" id="{CEBF0BD3-4620-40A3-A403-D42B89CD85B6}"/>
+                <a16:creationId xmlns:a16="http://schemas.microsoft.com/office/drawing/2014/main" id="{2D35A9FB-E6C8-4E6A-B44A-A12C4AE3BE51}"/>
               </a:ext>
             </a:extLst>
           </p:cNvPr>
@@ -5902,7 +6221,7 @@
         <p:spPr>
           <a:xfrm>
             <a:off x="482600" y="838200"/>
-            <a:ext cx="10668000" cy="338554"/>
+            <a:ext cx="10795000" cy="338554"/>
           </a:xfrm>
           <a:prstGeom prst="rect">
             <a:avLst/>
@@ -5922,7 +6241,7 @@
                 </a:solidFill>
                 <a:latin typeface="Calibri" panose="020F0502020204030204" pitchFamily="34" charset="0"/>
               </a:rPr>
-              <a:t>Single-student pseudo-distributed Hadoop environment</a:t>
+              <a:t>Compressed storage size vs logical text processed by Hadoop</a:t>
             </a:r>
             <a:endParaRPr lang="az-Cyrl-AZ" sz="1600">
               <a:solidFill>
@@ -5933,12 +6252,622 @@
           </a:p>
         </p:txBody>
       </p:sp>
-      <p:sp>
-        <p:nvSpPr>
-          <p:cNvPr id="5" name="TextBox 4">
-            <a:extLst>
-              <a:ext uri="{FF2B5EF4-FFF2-40B4-BE49-F238E27FC236}">
-                <a16:creationId xmlns:a16="http://schemas.microsoft.com/office/drawing/2014/main" id="{EA532589-3912-4A27-90A6-F946D2E9E7CB}"/>
+      <p:graphicFrame>
+        <p:nvGraphicFramePr>
+          <p:cNvPr id="5" name="Table 4">
+            <a:extLst>
+              <a:ext uri="{FF2B5EF4-FFF2-40B4-BE49-F238E27FC236}">
+                <a16:creationId xmlns:a16="http://schemas.microsoft.com/office/drawing/2014/main" id="{955EA40B-35D9-45A3-A1FF-C020D8984F6A}"/>
+              </a:ext>
+            </a:extLst>
+          </p:cNvPr>
+          <p:cNvGraphicFramePr>
+            <a:graphicFrameLocks noGrp="1"/>
+          </p:cNvGraphicFramePr>
+          <p:nvPr>
+            <p:extLst>
+              <p:ext uri="{D42A27DB-BD31-4B8C-83A1-F6EECF244321}">
+                <p14:modId xmlns:p14="http://schemas.microsoft.com/office/powerpoint/2010/main" val="3028418743"/>
+              </p:ext>
+            </p:extLst>
+          </p:nvPr>
+        </p:nvGraphicFramePr>
+        <p:xfrm>
+          <a:off x="762000" y="1524000"/>
+          <a:ext cx="10668000" cy="2667000"/>
+        </p:xfrm>
+        <a:graphic>
+          <a:graphicData uri="http://schemas.openxmlformats.org/drawingml/2006/table">
+            <a:tbl>
+              <a:tblPr firstRow="1" bandRow="1">
+                <a:tableStyleId>{5C22544A-7EE6-4342-B048-85BDC9FD1C3A}</a:tableStyleId>
+              </a:tblPr>
+              <a:tblGrid>
+                <a:gridCol w="2133600">
+                  <a:extLst>
+                    <a:ext uri="{9D8B030D-6E8A-4147-A177-3AD203B41FA5}">
+                      <a16:colId xmlns:a16="http://schemas.microsoft.com/office/drawing/2014/main" val="3542559096"/>
+                    </a:ext>
+                  </a:extLst>
+                </a:gridCol>
+                <a:gridCol w="2133600">
+                  <a:extLst>
+                    <a:ext uri="{9D8B030D-6E8A-4147-A177-3AD203B41FA5}">
+                      <a16:colId xmlns:a16="http://schemas.microsoft.com/office/drawing/2014/main" val="424846365"/>
+                    </a:ext>
+                  </a:extLst>
+                </a:gridCol>
+                <a:gridCol w="2133600">
+                  <a:extLst>
+                    <a:ext uri="{9D8B030D-6E8A-4147-A177-3AD203B41FA5}">
+                      <a16:colId xmlns:a16="http://schemas.microsoft.com/office/drawing/2014/main" val="2827477289"/>
+                    </a:ext>
+                  </a:extLst>
+                </a:gridCol>
+                <a:gridCol w="2133600">
+                  <a:extLst>
+                    <a:ext uri="{9D8B030D-6E8A-4147-A177-3AD203B41FA5}">
+                      <a16:colId xmlns:a16="http://schemas.microsoft.com/office/drawing/2014/main" val="4042913416"/>
+                    </a:ext>
+                  </a:extLst>
+                </a:gridCol>
+                <a:gridCol w="2133600">
+                  <a:extLst>
+                    <a:ext uri="{9D8B030D-6E8A-4147-A177-3AD203B41FA5}">
+                      <a16:colId xmlns:a16="http://schemas.microsoft.com/office/drawing/2014/main" val="1275781823"/>
+                    </a:ext>
+                  </a:extLst>
+                </a:gridCol>
+              </a:tblGrid>
+              <a:tr h="533400">
+                <a:tc>
+                  <a:txBody>
+                    <a:bodyPr/>
+                    <a:lstStyle/>
+                    <a:p>
+                      <a:r>
+                        <a:rPr lang="en-US" sz="1300" b="1">
+                          <a:latin typeface="Calibri" panose="020F0502020204030204" pitchFamily="34" charset="0"/>
+                        </a:rPr>
+                        <a:t>Subset</a:t>
+                      </a:r>
+                      <a:endParaRPr lang="az-Cyrl-AZ" sz="1300" b="1">
+                        <a:latin typeface="Calibri" panose="020F0502020204030204" pitchFamily="34" charset="0"/>
+                      </a:endParaRPr>
+                    </a:p>
+                  </a:txBody>
+                  <a:tcPr>
+                    <a:solidFill>
+                      <a:srgbClr val="E4E4E4"/>
+                    </a:solidFill>
+                  </a:tcPr>
+                </a:tc>
+                <a:tc>
+                  <a:txBody>
+                    <a:bodyPr/>
+                    <a:lstStyle/>
+                    <a:p>
+                      <a:r>
+                        <a:rPr lang="en-US" sz="1300" b="1">
+                          <a:latin typeface="Calibri" panose="020F0502020204030204" pitchFamily="34" charset="0"/>
+                        </a:rPr>
+                        <a:t>Files</a:t>
+                      </a:r>
+                      <a:endParaRPr lang="az-Cyrl-AZ" sz="1300" b="1">
+                        <a:latin typeface="Calibri" panose="020F0502020204030204" pitchFamily="34" charset="0"/>
+                      </a:endParaRPr>
+                    </a:p>
+                  </a:txBody>
+                  <a:tcPr>
+                    <a:solidFill>
+                      <a:srgbClr val="E4E4E4"/>
+                    </a:solidFill>
+                  </a:tcPr>
+                </a:tc>
+                <a:tc>
+                  <a:txBody>
+                    <a:bodyPr/>
+                    <a:lstStyle/>
+                    <a:p>
+                      <a:r>
+                        <a:rPr lang="en-US" sz="1300" b="1">
+                          <a:latin typeface="Calibri" panose="020F0502020204030204" pitchFamily="34" charset="0"/>
+                        </a:rPr>
+                        <a:t>Compressed</a:t>
+                      </a:r>
+                      <a:endParaRPr lang="az-Cyrl-AZ" sz="1300" b="1">
+                        <a:latin typeface="Calibri" panose="020F0502020204030204" pitchFamily="34" charset="0"/>
+                      </a:endParaRPr>
+                    </a:p>
+                  </a:txBody>
+                  <a:tcPr>
+                    <a:solidFill>
+                      <a:srgbClr val="E4E4E4"/>
+                    </a:solidFill>
+                  </a:tcPr>
+                </a:tc>
+                <a:tc>
+                  <a:txBody>
+                    <a:bodyPr/>
+                    <a:lstStyle/>
+                    <a:p>
+                      <a:r>
+                        <a:rPr lang="en-US" sz="1300" b="1">
+                          <a:latin typeface="Calibri" panose="020F0502020204030204" pitchFamily="34" charset="0"/>
+                        </a:rPr>
+                        <a:t>Decompressed</a:t>
+                      </a:r>
+                      <a:endParaRPr lang="az-Cyrl-AZ" sz="1300" b="1">
+                        <a:latin typeface="Calibri" panose="020F0502020204030204" pitchFamily="34" charset="0"/>
+                      </a:endParaRPr>
+                    </a:p>
+                  </a:txBody>
+                  <a:tcPr>
+                    <a:solidFill>
+                      <a:srgbClr val="E4E4E4"/>
+                    </a:solidFill>
+                  </a:tcPr>
+                </a:tc>
+                <a:tc>
+                  <a:txBody>
+                    <a:bodyPr/>
+                    <a:lstStyle/>
+                    <a:p>
+                      <a:r>
+                        <a:rPr lang="en-US" sz="1300" b="1">
+                          <a:latin typeface="Calibri" panose="020F0502020204030204" pitchFamily="34" charset="0"/>
+                        </a:rPr>
+                        <a:t>HDFS with repl.</a:t>
+                      </a:r>
+                      <a:endParaRPr lang="az-Cyrl-AZ" sz="1300" b="1">
+                        <a:latin typeface="Calibri" panose="020F0502020204030204" pitchFamily="34" charset="0"/>
+                      </a:endParaRPr>
+                    </a:p>
+                  </a:txBody>
+                  <a:tcPr>
+                    <a:solidFill>
+                      <a:srgbClr val="E4E4E4"/>
+                    </a:solidFill>
+                  </a:tcPr>
+                </a:tc>
+                <a:extLst>
+                  <a:ext uri="{0D108BD9-81ED-4DB2-BD59-A6C34878D82A}">
+                    <a16:rowId xmlns:a16="http://schemas.microsoft.com/office/drawing/2014/main" val="4061520799"/>
+                  </a:ext>
+                </a:extLst>
+              </a:tr>
+              <a:tr h="533400">
+                <a:tc>
+                  <a:txBody>
+                    <a:bodyPr/>
+                    <a:lstStyle/>
+                    <a:p>
+                      <a:r>
+                        <a:rPr lang="en-US" sz="1200">
+                          <a:latin typeface="Calibri" panose="020F0502020204030204" pitchFamily="34" charset="0"/>
+                        </a:rPr>
+                        <a:t>1h</a:t>
+                      </a:r>
+                      <a:endParaRPr lang="az-Cyrl-AZ" sz="1200">
+                        <a:latin typeface="Calibri" panose="020F0502020204030204" pitchFamily="34" charset="0"/>
+                      </a:endParaRPr>
+                    </a:p>
+                  </a:txBody>
+                  <a:tcPr/>
+                </a:tc>
+                <a:tc>
+                  <a:txBody>
+                    <a:bodyPr/>
+                    <a:lstStyle/>
+                    <a:p>
+                      <a:r>
+                        <a:rPr lang="az-Cyrl-AZ" sz="1200">
+                          <a:latin typeface="Calibri" panose="020F0502020204030204" pitchFamily="34" charset="0"/>
+                        </a:rPr>
+                        <a:t>1</a:t>
+                      </a:r>
+                    </a:p>
+                  </a:txBody>
+                  <a:tcPr/>
+                </a:tc>
+                <a:tc>
+                  <a:txBody>
+                    <a:bodyPr/>
+                    <a:lstStyle/>
+                    <a:p>
+                      <a:r>
+                        <a:rPr lang="en-US" sz="1200">
+                          <a:latin typeface="Calibri" panose="020F0502020204030204" pitchFamily="34" charset="0"/>
+                        </a:rPr>
+                        <a:t>51.7 MiB</a:t>
+                      </a:r>
+                      <a:endParaRPr lang="az-Cyrl-AZ" sz="1200">
+                        <a:latin typeface="Calibri" panose="020F0502020204030204" pitchFamily="34" charset="0"/>
+                      </a:endParaRPr>
+                    </a:p>
+                  </a:txBody>
+                  <a:tcPr/>
+                </a:tc>
+                <a:tc>
+                  <a:txBody>
+                    <a:bodyPr/>
+                    <a:lstStyle/>
+                    <a:p>
+                      <a:r>
+                        <a:rPr lang="en-US" sz="1200">
+                          <a:latin typeface="Calibri" panose="020F0502020204030204" pitchFamily="34" charset="0"/>
+                        </a:rPr>
+                        <a:t>185.6 MiB</a:t>
+                      </a:r>
+                      <a:endParaRPr lang="az-Cyrl-AZ" sz="1200">
+                        <a:latin typeface="Calibri" panose="020F0502020204030204" pitchFamily="34" charset="0"/>
+                      </a:endParaRPr>
+                    </a:p>
+                  </a:txBody>
+                  <a:tcPr/>
+                </a:tc>
+                <a:tc>
+                  <a:txBody>
+                    <a:bodyPr/>
+                    <a:lstStyle/>
+                    <a:p>
+                      <a:r>
+                        <a:rPr lang="en-US" sz="1200">
+                          <a:latin typeface="Calibri" panose="020F0502020204030204" pitchFamily="34" charset="0"/>
+                        </a:rPr>
+                        <a:t>103.5 MiB</a:t>
+                      </a:r>
+                      <a:endParaRPr lang="az-Cyrl-AZ" sz="1200">
+                        <a:latin typeface="Calibri" panose="020F0502020204030204" pitchFamily="34" charset="0"/>
+                      </a:endParaRPr>
+                    </a:p>
+                  </a:txBody>
+                  <a:tcPr/>
+                </a:tc>
+                <a:extLst>
+                  <a:ext uri="{0D108BD9-81ED-4DB2-BD59-A6C34878D82A}">
+                    <a16:rowId xmlns:a16="http://schemas.microsoft.com/office/drawing/2014/main" val="2596008393"/>
+                  </a:ext>
+                </a:extLst>
+              </a:tr>
+              <a:tr h="533400">
+                <a:tc>
+                  <a:txBody>
+                    <a:bodyPr/>
+                    <a:lstStyle/>
+                    <a:p>
+                      <a:r>
+                        <a:rPr lang="en-US" sz="1200">
+                          <a:latin typeface="Calibri" panose="020F0502020204030204" pitchFamily="34" charset="0"/>
+                        </a:rPr>
+                        <a:t>4h</a:t>
+                      </a:r>
+                      <a:endParaRPr lang="az-Cyrl-AZ" sz="1200">
+                        <a:latin typeface="Calibri" panose="020F0502020204030204" pitchFamily="34" charset="0"/>
+                      </a:endParaRPr>
+                    </a:p>
+                  </a:txBody>
+                  <a:tcPr/>
+                </a:tc>
+                <a:tc>
+                  <a:txBody>
+                    <a:bodyPr/>
+                    <a:lstStyle/>
+                    <a:p>
+                      <a:r>
+                        <a:rPr lang="az-Cyrl-AZ" sz="1200">
+                          <a:latin typeface="Calibri" panose="020F0502020204030204" pitchFamily="34" charset="0"/>
+                        </a:rPr>
+                        <a:t>4</a:t>
+                      </a:r>
+                    </a:p>
+                  </a:txBody>
+                  <a:tcPr/>
+                </a:tc>
+                <a:tc>
+                  <a:txBody>
+                    <a:bodyPr/>
+                    <a:lstStyle/>
+                    <a:p>
+                      <a:r>
+                        <a:rPr lang="en-US" sz="1200">
+                          <a:latin typeface="Calibri" panose="020F0502020204030204" pitchFamily="34" charset="0"/>
+                        </a:rPr>
+                        <a:t>199.9 MiB</a:t>
+                      </a:r>
+                      <a:endParaRPr lang="az-Cyrl-AZ" sz="1200">
+                        <a:latin typeface="Calibri" panose="020F0502020204030204" pitchFamily="34" charset="0"/>
+                      </a:endParaRPr>
+                    </a:p>
+                  </a:txBody>
+                  <a:tcPr/>
+                </a:tc>
+                <a:tc>
+                  <a:txBody>
+                    <a:bodyPr/>
+                    <a:lstStyle/>
+                    <a:p>
+                      <a:r>
+                        <a:rPr lang="en-US" sz="1200">
+                          <a:latin typeface="Calibri" panose="020F0502020204030204" pitchFamily="34" charset="0"/>
+                        </a:rPr>
+                        <a:t>723.2 MiB</a:t>
+                      </a:r>
+                      <a:endParaRPr lang="az-Cyrl-AZ" sz="1200">
+                        <a:latin typeface="Calibri" panose="020F0502020204030204" pitchFamily="34" charset="0"/>
+                      </a:endParaRPr>
+                    </a:p>
+                  </a:txBody>
+                  <a:tcPr/>
+                </a:tc>
+                <a:tc>
+                  <a:txBody>
+                    <a:bodyPr/>
+                    <a:lstStyle/>
+                    <a:p>
+                      <a:r>
+                        <a:rPr lang="en-US" sz="1200">
+                          <a:latin typeface="Calibri" panose="020F0502020204030204" pitchFamily="34" charset="0"/>
+                        </a:rPr>
+                        <a:t>399.8 MiB</a:t>
+                      </a:r>
+                      <a:endParaRPr lang="az-Cyrl-AZ" sz="1200">
+                        <a:latin typeface="Calibri" panose="020F0502020204030204" pitchFamily="34" charset="0"/>
+                      </a:endParaRPr>
+                    </a:p>
+                  </a:txBody>
+                  <a:tcPr/>
+                </a:tc>
+                <a:extLst>
+                  <a:ext uri="{0D108BD9-81ED-4DB2-BD59-A6C34878D82A}">
+                    <a16:rowId xmlns:a16="http://schemas.microsoft.com/office/drawing/2014/main" val="4156420048"/>
+                  </a:ext>
+                </a:extLst>
+              </a:tr>
+              <a:tr h="533400">
+                <a:tc>
+                  <a:txBody>
+                    <a:bodyPr/>
+                    <a:lstStyle/>
+                    <a:p>
+                      <a:r>
+                        <a:rPr lang="en-US" sz="1200">
+                          <a:latin typeface="Calibri" panose="020F0502020204030204" pitchFamily="34" charset="0"/>
+                        </a:rPr>
+                        <a:t>8h</a:t>
+                      </a:r>
+                      <a:endParaRPr lang="az-Cyrl-AZ" sz="1200">
+                        <a:latin typeface="Calibri" panose="020F0502020204030204" pitchFamily="34" charset="0"/>
+                      </a:endParaRPr>
+                    </a:p>
+                  </a:txBody>
+                  <a:tcPr/>
+                </a:tc>
+                <a:tc>
+                  <a:txBody>
+                    <a:bodyPr/>
+                    <a:lstStyle/>
+                    <a:p>
+                      <a:r>
+                        <a:rPr lang="az-Cyrl-AZ" sz="1200">
+                          <a:latin typeface="Calibri" panose="020F0502020204030204" pitchFamily="34" charset="0"/>
+                        </a:rPr>
+                        <a:t>8</a:t>
+                      </a:r>
+                    </a:p>
+                  </a:txBody>
+                  <a:tcPr/>
+                </a:tc>
+                <a:tc>
+                  <a:txBody>
+                    <a:bodyPr/>
+                    <a:lstStyle/>
+                    <a:p>
+                      <a:r>
+                        <a:rPr lang="en-US" sz="1200">
+                          <a:latin typeface="Calibri" panose="020F0502020204030204" pitchFamily="34" charset="0"/>
+                        </a:rPr>
+                        <a:t>400.6 MiB</a:t>
+                      </a:r>
+                      <a:endParaRPr lang="az-Cyrl-AZ" sz="1200">
+                        <a:latin typeface="Calibri" panose="020F0502020204030204" pitchFamily="34" charset="0"/>
+                      </a:endParaRPr>
+                    </a:p>
+                  </a:txBody>
+                  <a:tcPr/>
+                </a:tc>
+                <a:tc>
+                  <a:txBody>
+                    <a:bodyPr/>
+                    <a:lstStyle/>
+                    <a:p>
+                      <a:r>
+                        <a:rPr lang="en-US" sz="1200">
+                          <a:latin typeface="Calibri" panose="020F0502020204030204" pitchFamily="34" charset="0"/>
+                        </a:rPr>
+                        <a:t>1.42 GiB</a:t>
+                      </a:r>
+                      <a:endParaRPr lang="az-Cyrl-AZ" sz="1200">
+                        <a:latin typeface="Calibri" panose="020F0502020204030204" pitchFamily="34" charset="0"/>
+                      </a:endParaRPr>
+                    </a:p>
+                  </a:txBody>
+                  <a:tcPr/>
+                </a:tc>
+                <a:tc>
+                  <a:txBody>
+                    <a:bodyPr/>
+                    <a:lstStyle/>
+                    <a:p>
+                      <a:r>
+                        <a:rPr lang="en-US" sz="1200">
+                          <a:latin typeface="Calibri" panose="020F0502020204030204" pitchFamily="34" charset="0"/>
+                        </a:rPr>
+                        <a:t>801.3 MiB</a:t>
+                      </a:r>
+                      <a:endParaRPr lang="az-Cyrl-AZ" sz="1200">
+                        <a:latin typeface="Calibri" panose="020F0502020204030204" pitchFamily="34" charset="0"/>
+                      </a:endParaRPr>
+                    </a:p>
+                  </a:txBody>
+                  <a:tcPr/>
+                </a:tc>
+                <a:extLst>
+                  <a:ext uri="{0D108BD9-81ED-4DB2-BD59-A6C34878D82A}">
+                    <a16:rowId xmlns:a16="http://schemas.microsoft.com/office/drawing/2014/main" val="877955274"/>
+                  </a:ext>
+                </a:extLst>
+              </a:tr>
+              <a:tr h="533400">
+                <a:tc>
+                  <a:txBody>
+                    <a:bodyPr/>
+                    <a:lstStyle/>
+                    <a:p>
+                      <a:r>
+                        <a:rPr lang="en-US" sz="1200">
+                          <a:latin typeface="Calibri" panose="020F0502020204030204" pitchFamily="34" charset="0"/>
+                        </a:rPr>
+                        <a:t>16h</a:t>
+                      </a:r>
+                      <a:endParaRPr lang="az-Cyrl-AZ" sz="1200">
+                        <a:latin typeface="Calibri" panose="020F0502020204030204" pitchFamily="34" charset="0"/>
+                      </a:endParaRPr>
+                    </a:p>
+                  </a:txBody>
+                  <a:tcPr/>
+                </a:tc>
+                <a:tc>
+                  <a:txBody>
+                    <a:bodyPr/>
+                    <a:lstStyle/>
+                    <a:p>
+                      <a:r>
+                        <a:rPr lang="az-Cyrl-AZ" sz="1200">
+                          <a:latin typeface="Calibri" panose="020F0502020204030204" pitchFamily="34" charset="0"/>
+                        </a:rPr>
+                        <a:t>16</a:t>
+                      </a:r>
+                    </a:p>
+                  </a:txBody>
+                  <a:tcPr/>
+                </a:tc>
+                <a:tc>
+                  <a:txBody>
+                    <a:bodyPr/>
+                    <a:lstStyle/>
+                    <a:p>
+                      <a:r>
+                        <a:rPr lang="en-US" sz="1200">
+                          <a:latin typeface="Calibri" panose="020F0502020204030204" pitchFamily="34" charset="0"/>
+                        </a:rPr>
+                        <a:t>845.4 MiB</a:t>
+                      </a:r>
+                      <a:endParaRPr lang="az-Cyrl-AZ" sz="1200">
+                        <a:latin typeface="Calibri" panose="020F0502020204030204" pitchFamily="34" charset="0"/>
+                      </a:endParaRPr>
+                    </a:p>
+                  </a:txBody>
+                  <a:tcPr/>
+                </a:tc>
+                <a:tc>
+                  <a:txBody>
+                    <a:bodyPr/>
+                    <a:lstStyle/>
+                    <a:p>
+                      <a:r>
+                        <a:rPr lang="en-US" sz="1200">
+                          <a:latin typeface="Calibri" panose="020F0502020204030204" pitchFamily="34" charset="0"/>
+                        </a:rPr>
+                        <a:t>2.97 GiB</a:t>
+                      </a:r>
+                      <a:endParaRPr lang="az-Cyrl-AZ" sz="1200">
+                        <a:latin typeface="Calibri" panose="020F0502020204030204" pitchFamily="34" charset="0"/>
+                      </a:endParaRPr>
+                    </a:p>
+                  </a:txBody>
+                  <a:tcPr/>
+                </a:tc>
+                <a:tc>
+                  <a:txBody>
+                    <a:bodyPr/>
+                    <a:lstStyle/>
+                    <a:p>
+                      <a:r>
+                        <a:rPr lang="en-US" sz="1200">
+                          <a:latin typeface="Calibri" panose="020F0502020204030204" pitchFamily="34" charset="0"/>
+                        </a:rPr>
+                        <a:t>1.7 GiB</a:t>
+                      </a:r>
+                      <a:endParaRPr lang="az-Cyrl-AZ" sz="1200">
+                        <a:latin typeface="Calibri" panose="020F0502020204030204" pitchFamily="34" charset="0"/>
+                      </a:endParaRPr>
+                    </a:p>
+                  </a:txBody>
+                  <a:tcPr/>
+                </a:tc>
+                <a:extLst>
+                  <a:ext uri="{0D108BD9-81ED-4DB2-BD59-A6C34878D82A}">
+                    <a16:rowId xmlns:a16="http://schemas.microsoft.com/office/drawing/2014/main" val="2464195952"/>
+                  </a:ext>
+                </a:extLst>
+              </a:tr>
+            </a:tbl>
+          </a:graphicData>
+        </a:graphic>
+      </p:graphicFrame>
+      <p:sp>
+        <p:nvSpPr>
+          <p:cNvPr id="6" name="TextBox 5">
+            <a:extLst>
+              <a:ext uri="{FF2B5EF4-FFF2-40B4-BE49-F238E27FC236}">
+                <a16:creationId xmlns:a16="http://schemas.microsoft.com/office/drawing/2014/main" id="{79398968-0C9C-42AA-AC21-8A0A834E0571}"/>
+              </a:ext>
+            </a:extLst>
+          </p:cNvPr>
+          <p:cNvSpPr txBox="1"/>
+          <p:nvPr/>
+        </p:nvSpPr>
+        <p:spPr>
+          <a:xfrm>
+            <a:off x="889000" y="4572000"/>
+            <a:ext cx="10414000" cy="784830"/>
+          </a:xfrm>
+          <a:prstGeom prst="rect">
+            <a:avLst/>
+          </a:prstGeom>
+          <a:noFill/>
+        </p:spPr>
+        <p:txBody>
+          <a:bodyPr vert="horz" rtlCol="0">
+            <a:spAutoFit/>
+          </a:bodyPr>
+          <a:lstStyle/>
+          <a:p>
+            <a:r>
+              <a:rPr lang="en-US" sz="1500">
+                <a:solidFill>
+                  <a:srgbClr val="333333"/>
+                </a:solidFill>
+                <a:latin typeface="Calibri" panose="020F0502020204030204" pitchFamily="34" charset="0"/>
+              </a:rPr>
+              <a:t>The input files are stored as gzip-compressed Wikimedia hourly dumps. Hadoop stores the compressed files in HDFS, but during MapReduce execution it reads the decompressed text records. The HDFS physical usage is higher because the cluster uses replication factor 2.</a:t>
+            </a:r>
+            <a:endParaRPr lang="az-Cyrl-AZ" sz="1500">
+              <a:solidFill>
+                <a:srgbClr val="333333"/>
+              </a:solidFill>
+              <a:latin typeface="Calibri" panose="020F0502020204030204" pitchFamily="34" charset="0"/>
+            </a:endParaRPr>
+          </a:p>
+        </p:txBody>
+      </p:sp>
+      <p:sp>
+        <p:nvSpPr>
+          <p:cNvPr id="7" name="TextBox 6">
+            <a:extLst>
+              <a:ext uri="{FF2B5EF4-FFF2-40B4-BE49-F238E27FC236}">
+                <a16:creationId xmlns:a16="http://schemas.microsoft.com/office/drawing/2014/main" id="{C04A0ED2-1D64-4B86-9C5E-157877B1D833}"/>
               </a:ext>
             </a:extLst>
           </p:cNvPr>
@@ -5979,494 +6908,10 @@
           </a:p>
         </p:txBody>
       </p:sp>
-      <p:sp>
-        <p:nvSpPr>
-          <p:cNvPr id="6" name="Rectangle 5">
-            <a:extLst>
-              <a:ext uri="{FF2B5EF4-FFF2-40B4-BE49-F238E27FC236}">
-                <a16:creationId xmlns:a16="http://schemas.microsoft.com/office/drawing/2014/main" id="{1C8FE879-0BAD-4F3E-839B-371B4CAA8722}"/>
-              </a:ext>
-            </a:extLst>
-          </p:cNvPr>
-          <p:cNvSpPr/>
-          <p:nvPr/>
-        </p:nvSpPr>
-        <p:spPr>
-          <a:xfrm>
-            <a:off x="762000" y="1460500"/>
-            <a:ext cx="2984500" cy="3175000"/>
-          </a:xfrm>
-          <a:prstGeom prst="rect">
-            <a:avLst/>
-          </a:prstGeom>
-          <a:solidFill>
-            <a:srgbClr val="F1F1F1"/>
-          </a:solidFill>
-          <a:ln w="12700">
-            <a:solidFill>
-              <a:srgbClr val="CCCCCC"/>
-            </a:solidFill>
-          </a:ln>
-        </p:spPr>
-        <p:style>
-          <a:lnRef idx="2">
-            <a:schemeClr val="accent1">
-              <a:shade val="50000"/>
-            </a:schemeClr>
-          </a:lnRef>
-          <a:fillRef idx="1">
-            <a:schemeClr val="accent1"/>
-          </a:fillRef>
-          <a:effectRef idx="0">
-            <a:schemeClr val="accent1"/>
-          </a:effectRef>
-          <a:fontRef idx="minor">
-            <a:schemeClr val="lt1"/>
-          </a:fontRef>
-        </p:style>
-        <p:txBody>
-          <a:bodyPr rtlCol="0" anchor="ctr"/>
-          <a:lstStyle/>
-          <a:p>
-            <a:pPr algn="ctr"/>
-            <a:endParaRPr lang="az-Cyrl-AZ"/>
-          </a:p>
-        </p:txBody>
-      </p:sp>
-      <p:sp>
-        <p:nvSpPr>
-          <p:cNvPr id="7" name="TextBox 6">
-            <a:extLst>
-              <a:ext uri="{FF2B5EF4-FFF2-40B4-BE49-F238E27FC236}">
-                <a16:creationId xmlns:a16="http://schemas.microsoft.com/office/drawing/2014/main" id="{E497E3B2-B9CA-435B-85D5-02D14942E011}"/>
-              </a:ext>
-            </a:extLst>
-          </p:cNvPr>
-          <p:cNvSpPr txBox="1"/>
-          <p:nvPr/>
-        </p:nvSpPr>
-        <p:spPr>
-          <a:xfrm>
-            <a:off x="965200" y="1638300"/>
-            <a:ext cx="2578100" cy="338554"/>
-          </a:xfrm>
-          <a:prstGeom prst="rect">
-            <a:avLst/>
-          </a:prstGeom>
-          <a:noFill/>
-        </p:spPr>
-        <p:txBody>
-          <a:bodyPr vert="horz" rtlCol="0">
-            <a:spAutoFit/>
-          </a:bodyPr>
-          <a:lstStyle/>
-          <a:p>
-            <a:r>
-              <a:rPr lang="en-US" sz="1600" b="1">
-                <a:solidFill>
-                  <a:srgbClr val="4EED0B"/>
-                </a:solidFill>
-                <a:latin typeface="Calibri" panose="020F0502020204030204" pitchFamily="34" charset="0"/>
-              </a:rPr>
-              <a:t>Storage Layer</a:t>
-            </a:r>
-            <a:endParaRPr lang="az-Cyrl-AZ" sz="1600" b="1">
-              <a:solidFill>
-                <a:srgbClr val="4EED0B"/>
-              </a:solidFill>
-              <a:latin typeface="Calibri" panose="020F0502020204030204" pitchFamily="34" charset="0"/>
-            </a:endParaRPr>
-          </a:p>
-        </p:txBody>
-      </p:sp>
-      <p:sp>
-        <p:nvSpPr>
-          <p:cNvPr id="8" name="TextBox 7">
-            <a:extLst>
-              <a:ext uri="{FF2B5EF4-FFF2-40B4-BE49-F238E27FC236}">
-                <a16:creationId xmlns:a16="http://schemas.microsoft.com/office/drawing/2014/main" id="{2E32D24C-91E0-4ABD-8738-2E8BDB1A9C9D}"/>
-              </a:ext>
-            </a:extLst>
-          </p:cNvPr>
-          <p:cNvSpPr txBox="1"/>
-          <p:nvPr/>
-        </p:nvSpPr>
-        <p:spPr>
-          <a:xfrm>
-            <a:off x="965200" y="2019300"/>
-            <a:ext cx="2578100" cy="892552"/>
-          </a:xfrm>
-          <a:prstGeom prst="rect">
-            <a:avLst/>
-          </a:prstGeom>
-          <a:noFill/>
-        </p:spPr>
-        <p:txBody>
-          <a:bodyPr vert="horz" rtlCol="0">
-            <a:spAutoFit/>
-          </a:bodyPr>
-          <a:lstStyle/>
-          <a:p>
-            <a:r>
-              <a:rPr lang="en-US" sz="1300">
-                <a:solidFill>
-                  <a:srgbClr val="333333"/>
-                </a:solidFill>
-                <a:latin typeface="Calibri" panose="020F0502020204030204" pitchFamily="34" charset="0"/>
-              </a:rPr>
-              <a:t>Input files are stored in HDFS under /user/hadoop/single_project/input. Intermediate and final outputs are also written to HDFS.</a:t>
-            </a:r>
-            <a:endParaRPr lang="az-Cyrl-AZ" sz="1300">
-              <a:solidFill>
-                <a:srgbClr val="333333"/>
-              </a:solidFill>
-              <a:latin typeface="Calibri" panose="020F0502020204030204" pitchFamily="34" charset="0"/>
-            </a:endParaRPr>
-          </a:p>
-        </p:txBody>
-      </p:sp>
-      <p:sp>
-        <p:nvSpPr>
-          <p:cNvPr id="9" name="Rectangle 8">
-            <a:extLst>
-              <a:ext uri="{FF2B5EF4-FFF2-40B4-BE49-F238E27FC236}">
-                <a16:creationId xmlns:a16="http://schemas.microsoft.com/office/drawing/2014/main" id="{F2697ED3-B1F1-4E9F-814E-7E2AA9BF7B9A}"/>
-              </a:ext>
-            </a:extLst>
-          </p:cNvPr>
-          <p:cNvSpPr/>
-          <p:nvPr/>
-        </p:nvSpPr>
-        <p:spPr>
-          <a:xfrm>
-            <a:off x="4635500" y="1460500"/>
-            <a:ext cx="2984500" cy="3175000"/>
-          </a:xfrm>
-          <a:prstGeom prst="rect">
-            <a:avLst/>
-          </a:prstGeom>
-          <a:solidFill>
-            <a:srgbClr val="F1F1F1"/>
-          </a:solidFill>
-          <a:ln w="12700">
-            <a:solidFill>
-              <a:srgbClr val="CCCCCC"/>
-            </a:solidFill>
-          </a:ln>
-        </p:spPr>
-        <p:style>
-          <a:lnRef idx="2">
-            <a:schemeClr val="accent1">
-              <a:shade val="50000"/>
-            </a:schemeClr>
-          </a:lnRef>
-          <a:fillRef idx="1">
-            <a:schemeClr val="accent1"/>
-          </a:fillRef>
-          <a:effectRef idx="0">
-            <a:schemeClr val="accent1"/>
-          </a:effectRef>
-          <a:fontRef idx="minor">
-            <a:schemeClr val="lt1"/>
-          </a:fontRef>
-        </p:style>
-        <p:txBody>
-          <a:bodyPr rtlCol="0" anchor="ctr"/>
-          <a:lstStyle/>
-          <a:p>
-            <a:pPr algn="ctr"/>
-            <a:endParaRPr lang="az-Cyrl-AZ"/>
-          </a:p>
-        </p:txBody>
-      </p:sp>
-      <p:sp>
-        <p:nvSpPr>
-          <p:cNvPr id="10" name="TextBox 9">
-            <a:extLst>
-              <a:ext uri="{FF2B5EF4-FFF2-40B4-BE49-F238E27FC236}">
-                <a16:creationId xmlns:a16="http://schemas.microsoft.com/office/drawing/2014/main" id="{FCCF6B51-84E9-4332-8B67-F4599042EFFC}"/>
-              </a:ext>
-            </a:extLst>
-          </p:cNvPr>
-          <p:cNvSpPr txBox="1"/>
-          <p:nvPr/>
-        </p:nvSpPr>
-        <p:spPr>
-          <a:xfrm>
-            <a:off x="4838700" y="1638300"/>
-            <a:ext cx="2578100" cy="338554"/>
-          </a:xfrm>
-          <a:prstGeom prst="rect">
-            <a:avLst/>
-          </a:prstGeom>
-          <a:noFill/>
-        </p:spPr>
-        <p:txBody>
-          <a:bodyPr vert="horz" rtlCol="0">
-            <a:spAutoFit/>
-          </a:bodyPr>
-          <a:lstStyle/>
-          <a:p>
-            <a:r>
-              <a:rPr lang="en-US" sz="1600" b="1">
-                <a:solidFill>
-                  <a:srgbClr val="4EED0B"/>
-                </a:solidFill>
-                <a:latin typeface="Calibri" panose="020F0502020204030204" pitchFamily="34" charset="0"/>
-              </a:rPr>
-              <a:t>Processing Layer</a:t>
-            </a:r>
-            <a:endParaRPr lang="az-Cyrl-AZ" sz="1600" b="1">
-              <a:solidFill>
-                <a:srgbClr val="4EED0B"/>
-              </a:solidFill>
-              <a:latin typeface="Calibri" panose="020F0502020204030204" pitchFamily="34" charset="0"/>
-            </a:endParaRPr>
-          </a:p>
-        </p:txBody>
-      </p:sp>
-      <p:sp>
-        <p:nvSpPr>
-          <p:cNvPr id="11" name="TextBox 10">
-            <a:extLst>
-              <a:ext uri="{FF2B5EF4-FFF2-40B4-BE49-F238E27FC236}">
-                <a16:creationId xmlns:a16="http://schemas.microsoft.com/office/drawing/2014/main" id="{DA32CB71-F311-47CF-B860-48CA1973F891}"/>
-              </a:ext>
-            </a:extLst>
-          </p:cNvPr>
-          <p:cNvSpPr txBox="1"/>
-          <p:nvPr/>
-        </p:nvSpPr>
-        <p:spPr>
-          <a:xfrm>
-            <a:off x="4838700" y="2019300"/>
-            <a:ext cx="2578100" cy="692497"/>
-          </a:xfrm>
-          <a:prstGeom prst="rect">
-            <a:avLst/>
-          </a:prstGeom>
-          <a:noFill/>
-        </p:spPr>
-        <p:txBody>
-          <a:bodyPr vert="horz" rtlCol="0">
-            <a:spAutoFit/>
-          </a:bodyPr>
-          <a:lstStyle/>
-          <a:p>
-            <a:r>
-              <a:rPr lang="en-US" sz="1300">
-                <a:solidFill>
-                  <a:srgbClr val="333333"/>
-                </a:solidFill>
-                <a:latin typeface="Calibri" panose="020F0502020204030204" pitchFamily="34" charset="0"/>
-              </a:rPr>
-              <a:t>YARN runs the Hadoop MapReduce jobs. The Java application is executed as a packaged JAR.</a:t>
-            </a:r>
-            <a:endParaRPr lang="az-Cyrl-AZ" sz="1300">
-              <a:solidFill>
-                <a:srgbClr val="333333"/>
-              </a:solidFill>
-              <a:latin typeface="Calibri" panose="020F0502020204030204" pitchFamily="34" charset="0"/>
-            </a:endParaRPr>
-          </a:p>
-        </p:txBody>
-      </p:sp>
-      <p:sp>
-        <p:nvSpPr>
-          <p:cNvPr id="12" name="Rectangle 11">
-            <a:extLst>
-              <a:ext uri="{FF2B5EF4-FFF2-40B4-BE49-F238E27FC236}">
-                <a16:creationId xmlns:a16="http://schemas.microsoft.com/office/drawing/2014/main" id="{B0ECEC08-F88E-4A07-BCF2-31FD0D3731AE}"/>
-              </a:ext>
-            </a:extLst>
-          </p:cNvPr>
-          <p:cNvSpPr/>
-          <p:nvPr/>
-        </p:nvSpPr>
-        <p:spPr>
-          <a:xfrm>
-            <a:off x="8509000" y="1460500"/>
-            <a:ext cx="2984500" cy="3175000"/>
-          </a:xfrm>
-          <a:prstGeom prst="rect">
-            <a:avLst/>
-          </a:prstGeom>
-          <a:solidFill>
-            <a:srgbClr val="F1F1F1"/>
-          </a:solidFill>
-          <a:ln w="12700">
-            <a:solidFill>
-              <a:srgbClr val="CCCCCC"/>
-            </a:solidFill>
-          </a:ln>
-        </p:spPr>
-        <p:style>
-          <a:lnRef idx="2">
-            <a:schemeClr val="accent1">
-              <a:shade val="50000"/>
-            </a:schemeClr>
-          </a:lnRef>
-          <a:fillRef idx="1">
-            <a:schemeClr val="accent1"/>
-          </a:fillRef>
-          <a:effectRef idx="0">
-            <a:schemeClr val="accent1"/>
-          </a:effectRef>
-          <a:fontRef idx="minor">
-            <a:schemeClr val="lt1"/>
-          </a:fontRef>
-        </p:style>
-        <p:txBody>
-          <a:bodyPr rtlCol="0" anchor="ctr"/>
-          <a:lstStyle/>
-          <a:p>
-            <a:pPr algn="ctr"/>
-            <a:endParaRPr lang="az-Cyrl-AZ"/>
-          </a:p>
-        </p:txBody>
-      </p:sp>
-      <p:sp>
-        <p:nvSpPr>
-          <p:cNvPr id="13" name="TextBox 12">
-            <a:extLst>
-              <a:ext uri="{FF2B5EF4-FFF2-40B4-BE49-F238E27FC236}">
-                <a16:creationId xmlns:a16="http://schemas.microsoft.com/office/drawing/2014/main" id="{DC6E2BD9-5C74-4EB9-84A1-AAD45F65782D}"/>
-              </a:ext>
-            </a:extLst>
-          </p:cNvPr>
-          <p:cNvSpPr txBox="1"/>
-          <p:nvPr/>
-        </p:nvSpPr>
-        <p:spPr>
-          <a:xfrm>
-            <a:off x="8712200" y="1638300"/>
-            <a:ext cx="2578100" cy="338554"/>
-          </a:xfrm>
-          <a:prstGeom prst="rect">
-            <a:avLst/>
-          </a:prstGeom>
-          <a:noFill/>
-        </p:spPr>
-        <p:txBody>
-          <a:bodyPr vert="horz" rtlCol="0">
-            <a:spAutoFit/>
-          </a:bodyPr>
-          <a:lstStyle/>
-          <a:p>
-            <a:r>
-              <a:rPr lang="en-US" sz="1600" b="1">
-                <a:solidFill>
-                  <a:srgbClr val="4EED0B"/>
-                </a:solidFill>
-                <a:latin typeface="Calibri" panose="020F0502020204030204" pitchFamily="34" charset="0"/>
-              </a:rPr>
-              <a:t>Baseline Layer</a:t>
-            </a:r>
-            <a:endParaRPr lang="az-Cyrl-AZ" sz="1600" b="1">
-              <a:solidFill>
-                <a:srgbClr val="4EED0B"/>
-              </a:solidFill>
-              <a:latin typeface="Calibri" panose="020F0502020204030204" pitchFamily="34" charset="0"/>
-            </a:endParaRPr>
-          </a:p>
-        </p:txBody>
-      </p:sp>
-      <p:sp>
-        <p:nvSpPr>
-          <p:cNvPr id="14" name="TextBox 13">
-            <a:extLst>
-              <a:ext uri="{FF2B5EF4-FFF2-40B4-BE49-F238E27FC236}">
-                <a16:creationId xmlns:a16="http://schemas.microsoft.com/office/drawing/2014/main" id="{243D81EB-B47A-49E8-ADF5-A49BADF19F86}"/>
-              </a:ext>
-            </a:extLst>
-          </p:cNvPr>
-          <p:cNvSpPr txBox="1"/>
-          <p:nvPr/>
-        </p:nvSpPr>
-        <p:spPr>
-          <a:xfrm>
-            <a:off x="8712200" y="2019300"/>
-            <a:ext cx="2578100" cy="692497"/>
-          </a:xfrm>
-          <a:prstGeom prst="rect">
-            <a:avLst/>
-          </a:prstGeom>
-          <a:noFill/>
-        </p:spPr>
-        <p:txBody>
-          <a:bodyPr vert="horz" rtlCol="0">
-            <a:spAutoFit/>
-          </a:bodyPr>
-          <a:lstStyle/>
-          <a:p>
-            <a:r>
-              <a:rPr lang="en-US" sz="1300">
-                <a:solidFill>
-                  <a:srgbClr val="333333"/>
-                </a:solidFill>
-                <a:latin typeface="Calibri" panose="020F0502020204030204" pitchFamily="34" charset="0"/>
-              </a:rPr>
-              <a:t>The Python sequential script processes the same local data without parallel execution.</a:t>
-            </a:r>
-            <a:endParaRPr lang="az-Cyrl-AZ" sz="1300">
-              <a:solidFill>
-                <a:srgbClr val="333333"/>
-              </a:solidFill>
-              <a:latin typeface="Calibri" panose="020F0502020204030204" pitchFamily="34" charset="0"/>
-            </a:endParaRPr>
-          </a:p>
-        </p:txBody>
-      </p:sp>
-      <p:sp>
-        <p:nvSpPr>
-          <p:cNvPr id="15" name="TextBox 14">
-            <a:extLst>
-              <a:ext uri="{FF2B5EF4-FFF2-40B4-BE49-F238E27FC236}">
-                <a16:creationId xmlns:a16="http://schemas.microsoft.com/office/drawing/2014/main" id="{D49DBE43-783A-4290-8282-6D18B0AF8490}"/>
-              </a:ext>
-            </a:extLst>
-          </p:cNvPr>
-          <p:cNvSpPr txBox="1"/>
-          <p:nvPr/>
-        </p:nvSpPr>
-        <p:spPr>
-          <a:xfrm>
-            <a:off x="889000" y="5080000"/>
-            <a:ext cx="10414000" cy="338554"/>
-          </a:xfrm>
-          <a:prstGeom prst="rect">
-            <a:avLst/>
-          </a:prstGeom>
-          <a:noFill/>
-        </p:spPr>
-        <p:txBody>
-          <a:bodyPr vert="horz" rtlCol="0">
-            <a:spAutoFit/>
-          </a:bodyPr>
-          <a:lstStyle/>
-          <a:p>
-            <a:r>
-              <a:rPr lang="en-US" sz="1600">
-                <a:solidFill>
-                  <a:srgbClr val="333333"/>
-                </a:solidFill>
-                <a:latin typeface="Calibri" panose="020F0502020204030204" pitchFamily="34" charset="0"/>
-              </a:rPr>
-              <a:t>This setup keeps the comparison controlled: same dataset, same analytics logic, but different execution models.</a:t>
-            </a:r>
-            <a:endParaRPr lang="az-Cyrl-AZ" sz="1600">
-              <a:solidFill>
-                <a:srgbClr val="333333"/>
-              </a:solidFill>
-              <a:latin typeface="Calibri" panose="020F0502020204030204" pitchFamily="34" charset="0"/>
-            </a:endParaRPr>
-          </a:p>
-        </p:txBody>
-      </p:sp>
     </p:spTree>
     <p:extLst>
       <p:ext uri="{BB962C8B-B14F-4D97-AF65-F5344CB8AC3E}">
-        <p14:creationId xmlns:p14="http://schemas.microsoft.com/office/powerpoint/2010/main" val="4227495598"/>
+        <p14:creationId xmlns:p14="http://schemas.microsoft.com/office/powerpoint/2010/main" val="509902243"/>
       </p:ext>
     </p:extLst>
   </p:cSld>
@@ -6498,7 +6943,7 @@
           <p:cNvPr id="2" name="Rectangle 1">
             <a:extLst>
               <a:ext uri="{FF2B5EF4-FFF2-40B4-BE49-F238E27FC236}">
-                <a16:creationId xmlns:a16="http://schemas.microsoft.com/office/drawing/2014/main" id="{43C71D7E-94FC-4EEE-88E6-C7803F640900}"/>
+                <a16:creationId xmlns:a16="http://schemas.microsoft.com/office/drawing/2014/main" id="{3E538F13-4F22-4B2F-97E1-D187E038B049}"/>
               </a:ext>
             </a:extLst>
           </p:cNvPr>
@@ -6566,7 +7011,7 @@
           <p:cNvPr id="3" name="TextBox 2">
             <a:extLst>
               <a:ext uri="{FF2B5EF4-FFF2-40B4-BE49-F238E27FC236}">
-                <a16:creationId xmlns:a16="http://schemas.microsoft.com/office/drawing/2014/main" id="{3B1116F8-356C-447A-8D2C-32BEAAFA4993}"/>
+                <a16:creationId xmlns:a16="http://schemas.microsoft.com/office/drawing/2014/main" id="{72FDCF7A-DB6B-44CD-B030-E209BDA9F1E2}"/>
               </a:ext>
             </a:extLst>
           </p:cNvPr>
@@ -6596,7 +7041,7 @@
                 </a:solidFill>
                 <a:latin typeface="Georgia" panose="02040502050405020303" pitchFamily="18" charset="0"/>
               </a:rPr>
-              <a:t>Analytics Workflow</a:t>
+              <a:t>System Architecture</a:t>
             </a:r>
             <a:endParaRPr lang="az-Cyrl-AZ" sz="2300" b="1">
               <a:solidFill>
@@ -6612,7 +7057,7 @@
           <p:cNvPr id="4" name="TextBox 3">
             <a:extLst>
               <a:ext uri="{FF2B5EF4-FFF2-40B4-BE49-F238E27FC236}">
-                <a16:creationId xmlns:a16="http://schemas.microsoft.com/office/drawing/2014/main" id="{4F41A457-BBFC-4888-9A98-5DFC36D037DD}"/>
+                <a16:creationId xmlns:a16="http://schemas.microsoft.com/office/drawing/2014/main" id="{CEBF0BD3-4620-40A3-A403-D42B89CD85B6}"/>
               </a:ext>
             </a:extLst>
           </p:cNvPr>
@@ -6642,7 +7087,7 @@
                 </a:solidFill>
                 <a:latin typeface="Calibri" panose="020F0502020204030204" pitchFamily="34" charset="0"/>
               </a:rPr>
-              <a:t>Two non-iterative MapReduce jobs in cascade</a:t>
+              <a:t>Single-student pseudo-distributed Hadoop environment</a:t>
             </a:r>
             <a:endParaRPr lang="az-Cyrl-AZ" sz="1600">
               <a:solidFill>
@@ -6658,7 +7103,7 @@
           <p:cNvPr id="5" name="TextBox 4">
             <a:extLst>
               <a:ext uri="{FF2B5EF4-FFF2-40B4-BE49-F238E27FC236}">
-                <a16:creationId xmlns:a16="http://schemas.microsoft.com/office/drawing/2014/main" id="{F84CBF6C-D280-4111-A852-F89ADFD4352F}"/>
+                <a16:creationId xmlns:a16="http://schemas.microsoft.com/office/drawing/2014/main" id="{EA532589-3912-4A27-90A6-F946D2E9E7CB}"/>
               </a:ext>
             </a:extLst>
           </p:cNvPr>
@@ -6701,10 +7146,64 @@
       </p:sp>
       <p:sp>
         <p:nvSpPr>
-          <p:cNvPr id="6" name="TextBox 5">
-            <a:extLst>
-              <a:ext uri="{FF2B5EF4-FFF2-40B4-BE49-F238E27FC236}">
-                <a16:creationId xmlns:a16="http://schemas.microsoft.com/office/drawing/2014/main" id="{35B3FA8B-FD6D-479D-B95C-DA1BB3638153}"/>
+          <p:cNvPr id="6" name="Rectangle 5">
+            <a:extLst>
+              <a:ext uri="{FF2B5EF4-FFF2-40B4-BE49-F238E27FC236}">
+                <a16:creationId xmlns:a16="http://schemas.microsoft.com/office/drawing/2014/main" id="{1C8FE879-0BAD-4F3E-839B-371B4CAA8722}"/>
+              </a:ext>
+            </a:extLst>
+          </p:cNvPr>
+          <p:cNvSpPr/>
+          <p:nvPr/>
+        </p:nvSpPr>
+        <p:spPr>
+          <a:xfrm>
+            <a:off x="762000" y="1460500"/>
+            <a:ext cx="2984500" cy="3175000"/>
+          </a:xfrm>
+          <a:prstGeom prst="rect">
+            <a:avLst/>
+          </a:prstGeom>
+          <a:solidFill>
+            <a:srgbClr val="F1F1F1"/>
+          </a:solidFill>
+          <a:ln w="12700">
+            <a:solidFill>
+              <a:srgbClr val="CCCCCC"/>
+            </a:solidFill>
+          </a:ln>
+        </p:spPr>
+        <p:style>
+          <a:lnRef idx="2">
+            <a:schemeClr val="accent1">
+              <a:shade val="50000"/>
+            </a:schemeClr>
+          </a:lnRef>
+          <a:fillRef idx="1">
+            <a:schemeClr val="accent1"/>
+          </a:fillRef>
+          <a:effectRef idx="0">
+            <a:schemeClr val="accent1"/>
+          </a:effectRef>
+          <a:fontRef idx="minor">
+            <a:schemeClr val="lt1"/>
+          </a:fontRef>
+        </p:style>
+        <p:txBody>
+          <a:bodyPr rtlCol="0" anchor="ctr"/>
+          <a:lstStyle/>
+          <a:p>
+            <a:pPr algn="ctr"/>
+            <a:endParaRPr lang="az-Cyrl-AZ"/>
+          </a:p>
+        </p:txBody>
+      </p:sp>
+      <p:sp>
+        <p:nvSpPr>
+          <p:cNvPr id="7" name="TextBox 6">
+            <a:extLst>
+              <a:ext uri="{FF2B5EF4-FFF2-40B4-BE49-F238E27FC236}">
+                <a16:creationId xmlns:a16="http://schemas.microsoft.com/office/drawing/2014/main" id="{E497E3B2-B9CA-435B-85D5-02D14942E011}"/>
               </a:ext>
             </a:extLst>
           </p:cNvPr>
@@ -6713,8 +7212,8 @@
         </p:nvSpPr>
         <p:spPr>
           <a:xfrm>
-            <a:off x="736600" y="1587500"/>
-            <a:ext cx="10541000" cy="2339102"/>
+            <a:off x="965200" y="1638300"/>
+            <a:ext cx="2578100" cy="338554"/>
           </a:xfrm>
           <a:prstGeom prst="rect">
             <a:avLst/>
@@ -6727,89 +7226,412 @@
           </a:bodyPr>
           <a:lstStyle/>
           <a:p>
-            <a:pPr marL="342900" indent="-342900">
-              <a:spcAft>
-                <a:spcPts val="800"/>
-              </a:spcAft>
-              <a:buFont typeface="+mj-lt"/>
-              <a:buChar char="•"/>
-            </a:pPr>
-            <a:r>
-              <a:rPr lang="en-US">
-                <a:solidFill>
-                  <a:srgbClr val="222222"/>
+            <a:r>
+              <a:rPr lang="en-US" sz="1600" b="1">
+                <a:solidFill>
+                  <a:srgbClr val="4EED0B"/>
                 </a:solidFill>
                 <a:latin typeface="Calibri" panose="020F0502020204030204" pitchFamily="34" charset="0"/>
               </a:rPr>
-              <a:t>Job 1 performs ETL: parses pageview lines, filters invalid records, normalizes project/page data, and emits structured records.</a:t>
-            </a:r>
-          </a:p>
-          <a:p>
-            <a:pPr marL="342900" indent="-342900">
-              <a:spcAft>
-                <a:spcPts val="800"/>
-              </a:spcAft>
-              <a:buFont typeface="+mj-lt"/>
-              <a:buChar char="•"/>
-            </a:pPr>
-            <a:r>
-              <a:rPr lang="en-US">
-                <a:solidFill>
-                  <a:srgbClr val="222222"/>
-                </a:solidFill>
-                <a:latin typeface="Calibri" panose="020F0502020204030204" pitchFamily="34" charset="0"/>
-              </a:rPr>
-              <a:t>Job 2 performs analytics: aggregates page views, ranks the most visited projects and pages, and writes compact result files.</a:t>
-            </a:r>
-          </a:p>
-          <a:p>
-            <a:pPr marL="342900" indent="-342900">
-              <a:spcAft>
-                <a:spcPts val="800"/>
-              </a:spcAft>
-              <a:buFont typeface="+mj-lt"/>
-              <a:buChar char="•"/>
-            </a:pPr>
-            <a:r>
-              <a:rPr lang="en-US">
-                <a:solidFill>
-                  <a:srgbClr val="222222"/>
-                </a:solidFill>
-                <a:latin typeface="Calibri" panose="020F0502020204030204" pitchFamily="34" charset="0"/>
-              </a:rPr>
-              <a:t>The output keeps the top 10 pages and top 10 projects to make the results easy to inspect and compare.</a:t>
-            </a:r>
-          </a:p>
-          <a:p>
-            <a:pPr marL="342900" indent="-342900">
-              <a:spcAft>
-                <a:spcPts val="800"/>
-              </a:spcAft>
-              <a:buFont typeface="+mj-lt"/>
-              <a:buChar char="•"/>
-            </a:pPr>
-            <a:r>
-              <a:rPr lang="en-US">
-                <a:solidFill>
-                  <a:srgbClr val="222222"/>
-                </a:solidFill>
-                <a:latin typeface="Calibri" panose="020F0502020204030204" pitchFamily="34" charset="0"/>
-              </a:rPr>
-              <a:t>The sequential baseline implements the same analytics in Python for correctness and performance comparison.</a:t>
-            </a:r>
-            <a:endParaRPr lang="az-Cyrl-AZ">
+              <a:t>Storage Layer</a:t>
+            </a:r>
+            <a:endParaRPr lang="az-Cyrl-AZ" sz="1600" b="1">
               <a:solidFill>
-                <a:srgbClr val="222222"/>
+                <a:srgbClr val="4EED0B"/>
               </a:solidFill>
               <a:latin typeface="Calibri" panose="020F0502020204030204" pitchFamily="34" charset="0"/>
             </a:endParaRPr>
           </a:p>
         </p:txBody>
       </p:sp>
+      <p:sp>
+        <p:nvSpPr>
+          <p:cNvPr id="8" name="TextBox 7">
+            <a:extLst>
+              <a:ext uri="{FF2B5EF4-FFF2-40B4-BE49-F238E27FC236}">
+                <a16:creationId xmlns:a16="http://schemas.microsoft.com/office/drawing/2014/main" id="{2E32D24C-91E0-4ABD-8738-2E8BDB1A9C9D}"/>
+              </a:ext>
+            </a:extLst>
+          </p:cNvPr>
+          <p:cNvSpPr txBox="1"/>
+          <p:nvPr/>
+        </p:nvSpPr>
+        <p:spPr>
+          <a:xfrm>
+            <a:off x="965200" y="2019300"/>
+            <a:ext cx="2578100" cy="892552"/>
+          </a:xfrm>
+          <a:prstGeom prst="rect">
+            <a:avLst/>
+          </a:prstGeom>
+          <a:noFill/>
+        </p:spPr>
+        <p:txBody>
+          <a:bodyPr vert="horz" rtlCol="0">
+            <a:spAutoFit/>
+          </a:bodyPr>
+          <a:lstStyle/>
+          <a:p>
+            <a:r>
+              <a:rPr lang="en-US" sz="1300">
+                <a:solidFill>
+                  <a:srgbClr val="333333"/>
+                </a:solidFill>
+                <a:latin typeface="Calibri" panose="020F0502020204030204" pitchFamily="34" charset="0"/>
+              </a:rPr>
+              <a:t>Input files are stored in HDFS under /user/hadoop/single_project/input. Intermediate and final outputs are also written to HDFS.</a:t>
+            </a:r>
+            <a:endParaRPr lang="az-Cyrl-AZ" sz="1300">
+              <a:solidFill>
+                <a:srgbClr val="333333"/>
+              </a:solidFill>
+              <a:latin typeface="Calibri" panose="020F0502020204030204" pitchFamily="34" charset="0"/>
+            </a:endParaRPr>
+          </a:p>
+        </p:txBody>
+      </p:sp>
+      <p:sp>
+        <p:nvSpPr>
+          <p:cNvPr id="9" name="Rectangle 8">
+            <a:extLst>
+              <a:ext uri="{FF2B5EF4-FFF2-40B4-BE49-F238E27FC236}">
+                <a16:creationId xmlns:a16="http://schemas.microsoft.com/office/drawing/2014/main" id="{F2697ED3-B1F1-4E9F-814E-7E2AA9BF7B9A}"/>
+              </a:ext>
+            </a:extLst>
+          </p:cNvPr>
+          <p:cNvSpPr/>
+          <p:nvPr/>
+        </p:nvSpPr>
+        <p:spPr>
+          <a:xfrm>
+            <a:off x="4635500" y="1460500"/>
+            <a:ext cx="2984500" cy="3175000"/>
+          </a:xfrm>
+          <a:prstGeom prst="rect">
+            <a:avLst/>
+          </a:prstGeom>
+          <a:solidFill>
+            <a:srgbClr val="F1F1F1"/>
+          </a:solidFill>
+          <a:ln w="12700">
+            <a:solidFill>
+              <a:srgbClr val="CCCCCC"/>
+            </a:solidFill>
+          </a:ln>
+        </p:spPr>
+        <p:style>
+          <a:lnRef idx="2">
+            <a:schemeClr val="accent1">
+              <a:shade val="50000"/>
+            </a:schemeClr>
+          </a:lnRef>
+          <a:fillRef idx="1">
+            <a:schemeClr val="accent1"/>
+          </a:fillRef>
+          <a:effectRef idx="0">
+            <a:schemeClr val="accent1"/>
+          </a:effectRef>
+          <a:fontRef idx="minor">
+            <a:schemeClr val="lt1"/>
+          </a:fontRef>
+        </p:style>
+        <p:txBody>
+          <a:bodyPr rtlCol="0" anchor="ctr"/>
+          <a:lstStyle/>
+          <a:p>
+            <a:pPr algn="ctr"/>
+            <a:endParaRPr lang="az-Cyrl-AZ"/>
+          </a:p>
+        </p:txBody>
+      </p:sp>
+      <p:sp>
+        <p:nvSpPr>
+          <p:cNvPr id="10" name="TextBox 9">
+            <a:extLst>
+              <a:ext uri="{FF2B5EF4-FFF2-40B4-BE49-F238E27FC236}">
+                <a16:creationId xmlns:a16="http://schemas.microsoft.com/office/drawing/2014/main" id="{FCCF6B51-84E9-4332-8B67-F4599042EFFC}"/>
+              </a:ext>
+            </a:extLst>
+          </p:cNvPr>
+          <p:cNvSpPr txBox="1"/>
+          <p:nvPr/>
+        </p:nvSpPr>
+        <p:spPr>
+          <a:xfrm>
+            <a:off x="4838700" y="1638300"/>
+            <a:ext cx="2578100" cy="338554"/>
+          </a:xfrm>
+          <a:prstGeom prst="rect">
+            <a:avLst/>
+          </a:prstGeom>
+          <a:noFill/>
+        </p:spPr>
+        <p:txBody>
+          <a:bodyPr vert="horz" rtlCol="0">
+            <a:spAutoFit/>
+          </a:bodyPr>
+          <a:lstStyle/>
+          <a:p>
+            <a:r>
+              <a:rPr lang="en-US" sz="1600" b="1">
+                <a:solidFill>
+                  <a:srgbClr val="4EED0B"/>
+                </a:solidFill>
+                <a:latin typeface="Calibri" panose="020F0502020204030204" pitchFamily="34" charset="0"/>
+              </a:rPr>
+              <a:t>Processing Layer</a:t>
+            </a:r>
+            <a:endParaRPr lang="az-Cyrl-AZ" sz="1600" b="1">
+              <a:solidFill>
+                <a:srgbClr val="4EED0B"/>
+              </a:solidFill>
+              <a:latin typeface="Calibri" panose="020F0502020204030204" pitchFamily="34" charset="0"/>
+            </a:endParaRPr>
+          </a:p>
+        </p:txBody>
+      </p:sp>
+      <p:sp>
+        <p:nvSpPr>
+          <p:cNvPr id="11" name="TextBox 10">
+            <a:extLst>
+              <a:ext uri="{FF2B5EF4-FFF2-40B4-BE49-F238E27FC236}">
+                <a16:creationId xmlns:a16="http://schemas.microsoft.com/office/drawing/2014/main" id="{DA32CB71-F311-47CF-B860-48CA1973F891}"/>
+              </a:ext>
+            </a:extLst>
+          </p:cNvPr>
+          <p:cNvSpPr txBox="1"/>
+          <p:nvPr/>
+        </p:nvSpPr>
+        <p:spPr>
+          <a:xfrm>
+            <a:off x="4838700" y="2019300"/>
+            <a:ext cx="2578100" cy="692497"/>
+          </a:xfrm>
+          <a:prstGeom prst="rect">
+            <a:avLst/>
+          </a:prstGeom>
+          <a:noFill/>
+        </p:spPr>
+        <p:txBody>
+          <a:bodyPr vert="horz" rtlCol="0">
+            <a:spAutoFit/>
+          </a:bodyPr>
+          <a:lstStyle/>
+          <a:p>
+            <a:r>
+              <a:rPr lang="en-US" sz="1300">
+                <a:solidFill>
+                  <a:srgbClr val="333333"/>
+                </a:solidFill>
+                <a:latin typeface="Calibri" panose="020F0502020204030204" pitchFamily="34" charset="0"/>
+              </a:rPr>
+              <a:t>YARN runs the Hadoop MapReduce jobs. The Java application is executed as a packaged JAR.</a:t>
+            </a:r>
+            <a:endParaRPr lang="az-Cyrl-AZ" sz="1300">
+              <a:solidFill>
+                <a:srgbClr val="333333"/>
+              </a:solidFill>
+              <a:latin typeface="Calibri" panose="020F0502020204030204" pitchFamily="34" charset="0"/>
+            </a:endParaRPr>
+          </a:p>
+        </p:txBody>
+      </p:sp>
+      <p:sp>
+        <p:nvSpPr>
+          <p:cNvPr id="12" name="Rectangle 11">
+            <a:extLst>
+              <a:ext uri="{FF2B5EF4-FFF2-40B4-BE49-F238E27FC236}">
+                <a16:creationId xmlns:a16="http://schemas.microsoft.com/office/drawing/2014/main" id="{B0ECEC08-F88E-4A07-BCF2-31FD0D3731AE}"/>
+              </a:ext>
+            </a:extLst>
+          </p:cNvPr>
+          <p:cNvSpPr/>
+          <p:nvPr/>
+        </p:nvSpPr>
+        <p:spPr>
+          <a:xfrm>
+            <a:off x="8509000" y="1460500"/>
+            <a:ext cx="2984500" cy="3175000"/>
+          </a:xfrm>
+          <a:prstGeom prst="rect">
+            <a:avLst/>
+          </a:prstGeom>
+          <a:solidFill>
+            <a:srgbClr val="F1F1F1"/>
+          </a:solidFill>
+          <a:ln w="12700">
+            <a:solidFill>
+              <a:srgbClr val="CCCCCC"/>
+            </a:solidFill>
+          </a:ln>
+        </p:spPr>
+        <p:style>
+          <a:lnRef idx="2">
+            <a:schemeClr val="accent1">
+              <a:shade val="50000"/>
+            </a:schemeClr>
+          </a:lnRef>
+          <a:fillRef idx="1">
+            <a:schemeClr val="accent1"/>
+          </a:fillRef>
+          <a:effectRef idx="0">
+            <a:schemeClr val="accent1"/>
+          </a:effectRef>
+          <a:fontRef idx="minor">
+            <a:schemeClr val="lt1"/>
+          </a:fontRef>
+        </p:style>
+        <p:txBody>
+          <a:bodyPr rtlCol="0" anchor="ctr"/>
+          <a:lstStyle/>
+          <a:p>
+            <a:pPr algn="ctr"/>
+            <a:endParaRPr lang="az-Cyrl-AZ"/>
+          </a:p>
+        </p:txBody>
+      </p:sp>
+      <p:sp>
+        <p:nvSpPr>
+          <p:cNvPr id="13" name="TextBox 12">
+            <a:extLst>
+              <a:ext uri="{FF2B5EF4-FFF2-40B4-BE49-F238E27FC236}">
+                <a16:creationId xmlns:a16="http://schemas.microsoft.com/office/drawing/2014/main" id="{DC6E2BD9-5C74-4EB9-84A1-AAD45F65782D}"/>
+              </a:ext>
+            </a:extLst>
+          </p:cNvPr>
+          <p:cNvSpPr txBox="1"/>
+          <p:nvPr/>
+        </p:nvSpPr>
+        <p:spPr>
+          <a:xfrm>
+            <a:off x="8712200" y="1638300"/>
+            <a:ext cx="2578100" cy="338554"/>
+          </a:xfrm>
+          <a:prstGeom prst="rect">
+            <a:avLst/>
+          </a:prstGeom>
+          <a:noFill/>
+        </p:spPr>
+        <p:txBody>
+          <a:bodyPr vert="horz" rtlCol="0">
+            <a:spAutoFit/>
+          </a:bodyPr>
+          <a:lstStyle/>
+          <a:p>
+            <a:r>
+              <a:rPr lang="en-US" sz="1600" b="1">
+                <a:solidFill>
+                  <a:srgbClr val="4EED0B"/>
+                </a:solidFill>
+                <a:latin typeface="Calibri" panose="020F0502020204030204" pitchFamily="34" charset="0"/>
+              </a:rPr>
+              <a:t>Baseline Layer</a:t>
+            </a:r>
+            <a:endParaRPr lang="az-Cyrl-AZ" sz="1600" b="1">
+              <a:solidFill>
+                <a:srgbClr val="4EED0B"/>
+              </a:solidFill>
+              <a:latin typeface="Calibri" panose="020F0502020204030204" pitchFamily="34" charset="0"/>
+            </a:endParaRPr>
+          </a:p>
+        </p:txBody>
+      </p:sp>
+      <p:sp>
+        <p:nvSpPr>
+          <p:cNvPr id="14" name="TextBox 13">
+            <a:extLst>
+              <a:ext uri="{FF2B5EF4-FFF2-40B4-BE49-F238E27FC236}">
+                <a16:creationId xmlns:a16="http://schemas.microsoft.com/office/drawing/2014/main" id="{243D81EB-B47A-49E8-ADF5-A49BADF19F86}"/>
+              </a:ext>
+            </a:extLst>
+          </p:cNvPr>
+          <p:cNvSpPr txBox="1"/>
+          <p:nvPr/>
+        </p:nvSpPr>
+        <p:spPr>
+          <a:xfrm>
+            <a:off x="8712200" y="2019300"/>
+            <a:ext cx="2578100" cy="692497"/>
+          </a:xfrm>
+          <a:prstGeom prst="rect">
+            <a:avLst/>
+          </a:prstGeom>
+          <a:noFill/>
+        </p:spPr>
+        <p:txBody>
+          <a:bodyPr vert="horz" rtlCol="0">
+            <a:spAutoFit/>
+          </a:bodyPr>
+          <a:lstStyle/>
+          <a:p>
+            <a:r>
+              <a:rPr lang="en-US" sz="1300">
+                <a:solidFill>
+                  <a:srgbClr val="333333"/>
+                </a:solidFill>
+                <a:latin typeface="Calibri" panose="020F0502020204030204" pitchFamily="34" charset="0"/>
+              </a:rPr>
+              <a:t>The Python sequential script processes the same local data without parallel execution.</a:t>
+            </a:r>
+            <a:endParaRPr lang="az-Cyrl-AZ" sz="1300">
+              <a:solidFill>
+                <a:srgbClr val="333333"/>
+              </a:solidFill>
+              <a:latin typeface="Calibri" panose="020F0502020204030204" pitchFamily="34" charset="0"/>
+            </a:endParaRPr>
+          </a:p>
+        </p:txBody>
+      </p:sp>
+      <p:sp>
+        <p:nvSpPr>
+          <p:cNvPr id="15" name="TextBox 14">
+            <a:extLst>
+              <a:ext uri="{FF2B5EF4-FFF2-40B4-BE49-F238E27FC236}">
+                <a16:creationId xmlns:a16="http://schemas.microsoft.com/office/drawing/2014/main" id="{D49DBE43-783A-4290-8282-6D18B0AF8490}"/>
+              </a:ext>
+            </a:extLst>
+          </p:cNvPr>
+          <p:cNvSpPr txBox="1"/>
+          <p:nvPr/>
+        </p:nvSpPr>
+        <p:spPr>
+          <a:xfrm>
+            <a:off x="889000" y="5080000"/>
+            <a:ext cx="10414000" cy="338554"/>
+          </a:xfrm>
+          <a:prstGeom prst="rect">
+            <a:avLst/>
+          </a:prstGeom>
+          <a:noFill/>
+        </p:spPr>
+        <p:txBody>
+          <a:bodyPr vert="horz" rtlCol="0">
+            <a:spAutoFit/>
+          </a:bodyPr>
+          <a:lstStyle/>
+          <a:p>
+            <a:r>
+              <a:rPr lang="en-US" sz="1600">
+                <a:solidFill>
+                  <a:srgbClr val="333333"/>
+                </a:solidFill>
+                <a:latin typeface="Calibri" panose="020F0502020204030204" pitchFamily="34" charset="0"/>
+              </a:rPr>
+              <a:t>This setup keeps the comparison controlled: same dataset, same analytics logic, but different execution models.</a:t>
+            </a:r>
+            <a:endParaRPr lang="az-Cyrl-AZ" sz="1600">
+              <a:solidFill>
+                <a:srgbClr val="333333"/>
+              </a:solidFill>
+              <a:latin typeface="Calibri" panose="020F0502020204030204" pitchFamily="34" charset="0"/>
+            </a:endParaRPr>
+          </a:p>
+        </p:txBody>
+      </p:sp>
     </p:spTree>
     <p:extLst>
       <p:ext uri="{BB962C8B-B14F-4D97-AF65-F5344CB8AC3E}">
-        <p14:creationId xmlns:p14="http://schemas.microsoft.com/office/powerpoint/2010/main" val="1164307013"/>
+        <p14:creationId xmlns:p14="http://schemas.microsoft.com/office/powerpoint/2010/main" val="4227495598"/>
       </p:ext>
     </p:extLst>
   </p:cSld>
@@ -6841,7 +7663,7 @@
           <p:cNvPr id="2" name="Rectangle 1">
             <a:extLst>
               <a:ext uri="{FF2B5EF4-FFF2-40B4-BE49-F238E27FC236}">
-                <a16:creationId xmlns:a16="http://schemas.microsoft.com/office/drawing/2014/main" id="{ED85236A-2578-4758-B492-4B3A6482F10C}"/>
+                <a16:creationId xmlns:a16="http://schemas.microsoft.com/office/drawing/2014/main" id="{43C71D7E-94FC-4EEE-88E6-C7803F640900}"/>
               </a:ext>
             </a:extLst>
           </p:cNvPr>
@@ -6909,7 +7731,7 @@
           <p:cNvPr id="3" name="TextBox 2">
             <a:extLst>
               <a:ext uri="{FF2B5EF4-FFF2-40B4-BE49-F238E27FC236}">
-                <a16:creationId xmlns:a16="http://schemas.microsoft.com/office/drawing/2014/main" id="{B07A36AF-61EC-4A5C-8833-224478E0F0D4}"/>
+                <a16:creationId xmlns:a16="http://schemas.microsoft.com/office/drawing/2014/main" id="{3B1116F8-356C-447A-8D2C-32BEAAFA4993}"/>
               </a:ext>
             </a:extLst>
           </p:cNvPr>
@@ -6939,7 +7761,7 @@
                 </a:solidFill>
                 <a:latin typeface="Georgia" panose="02040502050405020303" pitchFamily="18" charset="0"/>
               </a:rPr>
-              <a:t>Hadoop Implementation</a:t>
+              <a:t>Analytics Workflow</a:t>
             </a:r>
             <a:endParaRPr lang="az-Cyrl-AZ" sz="2300" b="1">
               <a:solidFill>
@@ -6955,7 +7777,7 @@
           <p:cNvPr id="4" name="TextBox 3">
             <a:extLst>
               <a:ext uri="{FF2B5EF4-FFF2-40B4-BE49-F238E27FC236}">
-                <a16:creationId xmlns:a16="http://schemas.microsoft.com/office/drawing/2014/main" id="{F693278D-7089-4947-B6B6-58E1B6B2C32B}"/>
+                <a16:creationId xmlns:a16="http://schemas.microsoft.com/office/drawing/2014/main" id="{4F41A457-BBFC-4888-9A98-5DFC36D037DD}"/>
               </a:ext>
             </a:extLst>
           </p:cNvPr>
@@ -6985,7 +7807,7 @@
                 </a:solidFill>
                 <a:latin typeface="Calibri" panose="020F0502020204030204" pitchFamily="34" charset="0"/>
               </a:rPr>
-              <a:t>Main design choices</a:t>
+              <a:t>Two non-iterative MapReduce jobs in cascade</a:t>
             </a:r>
             <a:endParaRPr lang="az-Cyrl-AZ" sz="1600">
               <a:solidFill>
@@ -7001,7 +7823,7 @@
           <p:cNvPr id="5" name="TextBox 4">
             <a:extLst>
               <a:ext uri="{FF2B5EF4-FFF2-40B4-BE49-F238E27FC236}">
-                <a16:creationId xmlns:a16="http://schemas.microsoft.com/office/drawing/2014/main" id="{A88D9D2A-8709-41B3-9841-C1A404D00E2B}"/>
+                <a16:creationId xmlns:a16="http://schemas.microsoft.com/office/drawing/2014/main" id="{F84CBF6C-D280-4111-A852-F89ADFD4352F}"/>
               </a:ext>
             </a:extLst>
           </p:cNvPr>
@@ -7047,7 +7869,7 @@
           <p:cNvPr id="6" name="TextBox 5">
             <a:extLst>
               <a:ext uri="{FF2B5EF4-FFF2-40B4-BE49-F238E27FC236}">
-                <a16:creationId xmlns:a16="http://schemas.microsoft.com/office/drawing/2014/main" id="{E66B25C3-F02B-4F2A-834B-5F5B30783F4D}"/>
+                <a16:creationId xmlns:a16="http://schemas.microsoft.com/office/drawing/2014/main" id="{35B3FA8B-FD6D-479D-B95C-DA1BB3638153}"/>
               </a:ext>
             </a:extLst>
           </p:cNvPr>
@@ -7056,8 +7878,8 @@
         </p:nvSpPr>
         <p:spPr>
           <a:xfrm>
-            <a:off x="736600" y="1498600"/>
-            <a:ext cx="10541000" cy="1887696"/>
+            <a:off x="736600" y="1587500"/>
+            <a:ext cx="10541000" cy="2339102"/>
           </a:xfrm>
           <a:prstGeom prst="rect">
             <a:avLst/>
@@ -7084,7 +7906,7 @@
                 </a:solidFill>
                 <a:latin typeface="Calibri" panose="020F0502020204030204" pitchFamily="34" charset="0"/>
               </a:rPr>
-              <a:t>Implemented in Java inside WikimediaPageviewAnalytics.java.</a:t>
+              <a:t>Job 1 performs ETL: parses pageview lines, filters invalid records, normalizes project/page data, and emits structured records.</a:t>
             </a:r>
           </a:p>
           <a:p>
@@ -7102,7 +7924,7 @@
                 </a:solidFill>
                 <a:latin typeface="Calibri" panose="020F0502020204030204" pitchFamily="34" charset="0"/>
               </a:rPr>
-              <a:t>Uses a custom Writable object to pass structured pageview records between stages.</a:t>
+              <a:t>Job 2 performs analytics: aggregates page views, ranks the most visited projects and pages, and writes compact result files.</a:t>
             </a:r>
           </a:p>
           <a:p>
@@ -7120,7 +7942,7 @@
                 </a:solidFill>
                 <a:latin typeface="Calibri" panose="020F0502020204030204" pitchFamily="34" charset="0"/>
               </a:rPr>
-              <a:t>Uses in-mapper combining to reduce repeated local emissions before shuffle.</a:t>
+              <a:t>The output keeps the top 10 pages and top 10 projects to make the results easy to inspect and compare.</a:t>
             </a:r>
           </a:p>
           <a:p>
@@ -7138,25 +7960,7 @@
                 </a:solidFill>
                 <a:latin typeface="Calibri" panose="020F0502020204030204" pitchFamily="34" charset="0"/>
               </a:rPr>
-              <a:t>Uses setup() and cleanup() methods to initialize local state and emit final aggregated values.</a:t>
-            </a:r>
-          </a:p>
-          <a:p>
-            <a:pPr marL="342900" indent="-342900">
-              <a:spcAft>
-                <a:spcPts val="800"/>
-              </a:spcAft>
-              <a:buFont typeface="+mj-lt"/>
-              <a:buChar char="•"/>
-            </a:pPr>
-            <a:r>
-              <a:rPr lang="en-US">
-                <a:solidFill>
-                  <a:srgbClr val="222222"/>
-                </a:solidFill>
-                <a:latin typeface="Calibri" panose="020F0502020204030204" pitchFamily="34" charset="0"/>
-              </a:rPr>
-              <a:t>Uses a custom partitioner so related keys are distributed consistently across reducers.</a:t>
+              <a:t>The sequential baseline implements the same analytics in Python for correctness and performance comparison.</a:t>
             </a:r>
             <a:endParaRPr lang="az-Cyrl-AZ">
               <a:solidFill>
@@ -7170,7 +7974,7 @@
     </p:spTree>
     <p:extLst>
       <p:ext uri="{BB962C8B-B14F-4D97-AF65-F5344CB8AC3E}">
-        <p14:creationId xmlns:p14="http://schemas.microsoft.com/office/powerpoint/2010/main" val="3139004198"/>
+        <p14:creationId xmlns:p14="http://schemas.microsoft.com/office/powerpoint/2010/main" val="1164307013"/>
       </p:ext>
     </p:extLst>
   </p:cSld>
@@ -7202,7 +8006,7 @@
           <p:cNvPr id="2" name="Rectangle 1">
             <a:extLst>
               <a:ext uri="{FF2B5EF4-FFF2-40B4-BE49-F238E27FC236}">
-                <a16:creationId xmlns:a16="http://schemas.microsoft.com/office/drawing/2014/main" id="{BC94E2BE-77A9-410D-824B-4F785659DA1D}"/>
+                <a16:creationId xmlns:a16="http://schemas.microsoft.com/office/drawing/2014/main" id="{ED85236A-2578-4758-B492-4B3A6482F10C}"/>
               </a:ext>
             </a:extLst>
           </p:cNvPr>
@@ -7270,7 +8074,7 @@
           <p:cNvPr id="3" name="TextBox 2">
             <a:extLst>
               <a:ext uri="{FF2B5EF4-FFF2-40B4-BE49-F238E27FC236}">
-                <a16:creationId xmlns:a16="http://schemas.microsoft.com/office/drawing/2014/main" id="{B031A51D-E180-4B27-A180-E16C2E96B77F}"/>
+                <a16:creationId xmlns:a16="http://schemas.microsoft.com/office/drawing/2014/main" id="{B07A36AF-61EC-4A5C-8833-224478E0F0D4}"/>
               </a:ext>
             </a:extLst>
           </p:cNvPr>
@@ -7300,7 +8104,7 @@
                 </a:solidFill>
                 <a:latin typeface="Georgia" panose="02040502050405020303" pitchFamily="18" charset="0"/>
               </a:rPr>
-              <a:t>Experimental Configuration</a:t>
+              <a:t>Hadoop Implementation</a:t>
             </a:r>
             <a:endParaRPr lang="az-Cyrl-AZ" sz="2300" b="1">
               <a:solidFill>
@@ -7316,7 +8120,7 @@
           <p:cNvPr id="4" name="TextBox 3">
             <a:extLst>
               <a:ext uri="{FF2B5EF4-FFF2-40B4-BE49-F238E27FC236}">
-                <a16:creationId xmlns:a16="http://schemas.microsoft.com/office/drawing/2014/main" id="{2CA656F8-89AB-4073-A21C-7E5CA2B9B224}"/>
+                <a16:creationId xmlns:a16="http://schemas.microsoft.com/office/drawing/2014/main" id="{F693278D-7089-4947-B6B6-58E1B6B2C32B}"/>
               </a:ext>
             </a:extLst>
           </p:cNvPr>
@@ -7346,7 +8150,7 @@
                 </a:solidFill>
                 <a:latin typeface="Calibri" panose="020F0502020204030204" pitchFamily="34" charset="0"/>
               </a:rPr>
-              <a:t>Controlled parameters used in the benchmarks</a:t>
+              <a:t>Main design choices</a:t>
             </a:r>
             <a:endParaRPr lang="az-Cyrl-AZ" sz="1600">
               <a:solidFill>
@@ -7362,7 +8166,7 @@
           <p:cNvPr id="5" name="TextBox 4">
             <a:extLst>
               <a:ext uri="{FF2B5EF4-FFF2-40B4-BE49-F238E27FC236}">
-                <a16:creationId xmlns:a16="http://schemas.microsoft.com/office/drawing/2014/main" id="{4FE58D1A-D6F4-4B55-898E-3752149124CE}"/>
+                <a16:creationId xmlns:a16="http://schemas.microsoft.com/office/drawing/2014/main" id="{A88D9D2A-8709-41B3-9841-C1A404D00E2B}"/>
               </a:ext>
             </a:extLst>
           </p:cNvPr>
@@ -7405,64 +8209,10 @@
       </p:sp>
       <p:sp>
         <p:nvSpPr>
-          <p:cNvPr id="6" name="Rectangle 5">
-            <a:extLst>
-              <a:ext uri="{FF2B5EF4-FFF2-40B4-BE49-F238E27FC236}">
-                <a16:creationId xmlns:a16="http://schemas.microsoft.com/office/drawing/2014/main" id="{80B211F3-FA7C-416E-B4AF-B465C127825D}"/>
-              </a:ext>
-            </a:extLst>
-          </p:cNvPr>
-          <p:cNvSpPr/>
-          <p:nvPr/>
-        </p:nvSpPr>
-        <p:spPr>
-          <a:xfrm>
-            <a:off x="698500" y="1422400"/>
-            <a:ext cx="3302000" cy="3111500"/>
-          </a:xfrm>
-          <a:prstGeom prst="rect">
-            <a:avLst/>
-          </a:prstGeom>
-          <a:solidFill>
-            <a:srgbClr val="F1F1F1"/>
-          </a:solidFill>
-          <a:ln w="12700">
-            <a:solidFill>
-              <a:srgbClr val="CCCCCC"/>
-            </a:solidFill>
-          </a:ln>
-        </p:spPr>
-        <p:style>
-          <a:lnRef idx="2">
-            <a:schemeClr val="accent1">
-              <a:shade val="50000"/>
-            </a:schemeClr>
-          </a:lnRef>
-          <a:fillRef idx="1">
-            <a:schemeClr val="accent1"/>
-          </a:fillRef>
-          <a:effectRef idx="0">
-            <a:schemeClr val="accent1"/>
-          </a:effectRef>
-          <a:fontRef idx="minor">
-            <a:schemeClr val="lt1"/>
-          </a:fontRef>
-        </p:style>
-        <p:txBody>
-          <a:bodyPr rtlCol="0" anchor="ctr"/>
-          <a:lstStyle/>
-          <a:p>
-            <a:pPr algn="ctr"/>
-            <a:endParaRPr lang="az-Cyrl-AZ"/>
-          </a:p>
-        </p:txBody>
-      </p:sp>
-      <p:sp>
-        <p:nvSpPr>
-          <p:cNvPr id="7" name="TextBox 6">
-            <a:extLst>
-              <a:ext uri="{FF2B5EF4-FFF2-40B4-BE49-F238E27FC236}">
-                <a16:creationId xmlns:a16="http://schemas.microsoft.com/office/drawing/2014/main" id="{18EF7A2D-C88B-49DB-8AEE-6EA8A6AABE33}"/>
+          <p:cNvPr id="6" name="TextBox 5">
+            <a:extLst>
+              <a:ext uri="{FF2B5EF4-FFF2-40B4-BE49-F238E27FC236}">
+                <a16:creationId xmlns:a16="http://schemas.microsoft.com/office/drawing/2014/main" id="{E66B25C3-F02B-4F2A-834B-5F5B30783F4D}"/>
               </a:ext>
             </a:extLst>
           </p:cNvPr>
@@ -7471,8 +8221,8 @@
         </p:nvSpPr>
         <p:spPr>
           <a:xfrm>
-            <a:off x="901700" y="1600200"/>
-            <a:ext cx="2895600" cy="338554"/>
+            <a:off x="736600" y="1498600"/>
+            <a:ext cx="10541000" cy="1887696"/>
           </a:xfrm>
           <a:prstGeom prst="rect">
             <a:avLst/>
@@ -7485,418 +8235,107 @@
           </a:bodyPr>
           <a:lstStyle/>
           <a:p>
-            <a:r>
-              <a:rPr lang="en-US" sz="1600" b="1">
-                <a:solidFill>
-                  <a:srgbClr val="4EED0B"/>
+            <a:pPr marL="342900" indent="-342900">
+              <a:spcAft>
+                <a:spcPts val="800"/>
+              </a:spcAft>
+              <a:buFont typeface="+mj-lt"/>
+              <a:buChar char="•"/>
+            </a:pPr>
+            <a:r>
+              <a:rPr lang="en-US">
+                <a:solidFill>
+                  <a:srgbClr val="222222"/>
                 </a:solidFill>
                 <a:latin typeface="Calibri" panose="020F0502020204030204" pitchFamily="34" charset="0"/>
               </a:rPr>
-              <a:t>Dataset Size Benchmark</a:t>
-            </a:r>
-            <a:endParaRPr lang="az-Cyrl-AZ" sz="1600" b="1">
+              <a:t>Implemented in Java inside WikimediaPageviewAnalytics.java.</a:t>
+            </a:r>
+          </a:p>
+          <a:p>
+            <a:pPr marL="342900" indent="-342900">
+              <a:spcAft>
+                <a:spcPts val="800"/>
+              </a:spcAft>
+              <a:buFont typeface="+mj-lt"/>
+              <a:buChar char="•"/>
+            </a:pPr>
+            <a:r>
+              <a:rPr lang="en-US">
+                <a:solidFill>
+                  <a:srgbClr val="222222"/>
+                </a:solidFill>
+                <a:latin typeface="Calibri" panose="020F0502020204030204" pitchFamily="34" charset="0"/>
+              </a:rPr>
+              <a:t>Uses a custom Writable object to pass structured pageview records between stages.</a:t>
+            </a:r>
+          </a:p>
+          <a:p>
+            <a:pPr marL="342900" indent="-342900">
+              <a:spcAft>
+                <a:spcPts val="800"/>
+              </a:spcAft>
+              <a:buFont typeface="+mj-lt"/>
+              <a:buChar char="•"/>
+            </a:pPr>
+            <a:r>
+              <a:rPr lang="en-US">
+                <a:solidFill>
+                  <a:srgbClr val="222222"/>
+                </a:solidFill>
+                <a:latin typeface="Calibri" panose="020F0502020204030204" pitchFamily="34" charset="0"/>
+              </a:rPr>
+              <a:t>Uses in-mapper combining to reduce repeated local emissions before shuffle.</a:t>
+            </a:r>
+          </a:p>
+          <a:p>
+            <a:pPr marL="342900" indent="-342900">
+              <a:spcAft>
+                <a:spcPts val="800"/>
+              </a:spcAft>
+              <a:buFont typeface="+mj-lt"/>
+              <a:buChar char="•"/>
+            </a:pPr>
+            <a:r>
+              <a:rPr lang="en-US">
+                <a:solidFill>
+                  <a:srgbClr val="222222"/>
+                </a:solidFill>
+                <a:latin typeface="Calibri" panose="020F0502020204030204" pitchFamily="34" charset="0"/>
+              </a:rPr>
+              <a:t>Uses setup() and cleanup() methods to initialize local state and emit final aggregated values.</a:t>
+            </a:r>
+          </a:p>
+          <a:p>
+            <a:pPr marL="342900" indent="-342900">
+              <a:spcAft>
+                <a:spcPts val="800"/>
+              </a:spcAft>
+              <a:buFont typeface="+mj-lt"/>
+              <a:buChar char="•"/>
+            </a:pPr>
+            <a:r>
+              <a:rPr lang="en-US">
+                <a:solidFill>
+                  <a:srgbClr val="222222"/>
+                </a:solidFill>
+                <a:latin typeface="Calibri" panose="020F0502020204030204" pitchFamily="34" charset="0"/>
+              </a:rPr>
+              <a:t>Uses a custom partitioner so related keys are distributed consistently across reducers.</a:t>
+            </a:r>
+            <a:endParaRPr lang="az-Cyrl-AZ">
               <a:solidFill>
-                <a:srgbClr val="4EED0B"/>
+                <a:srgbClr val="222222"/>
               </a:solidFill>
               <a:latin typeface="Calibri" panose="020F0502020204030204" pitchFamily="34" charset="0"/>
             </a:endParaRPr>
           </a:p>
         </p:txBody>
       </p:sp>
-      <p:sp>
-        <p:nvSpPr>
-          <p:cNvPr id="8" name="TextBox 7">
-            <a:extLst>
-              <a:ext uri="{FF2B5EF4-FFF2-40B4-BE49-F238E27FC236}">
-                <a16:creationId xmlns:a16="http://schemas.microsoft.com/office/drawing/2014/main" id="{2F7AEA37-80C3-41C9-AC85-C02726162298}"/>
-              </a:ext>
-            </a:extLst>
-          </p:cNvPr>
-          <p:cNvSpPr txBox="1"/>
-          <p:nvPr/>
-        </p:nvSpPr>
-        <p:spPr>
-          <a:xfrm>
-            <a:off x="901700" y="1981200"/>
-            <a:ext cx="2895600" cy="692497"/>
-          </a:xfrm>
-          <a:prstGeom prst="rect">
-            <a:avLst/>
-          </a:prstGeom>
-          <a:noFill/>
-        </p:spPr>
-        <p:txBody>
-          <a:bodyPr vert="horz" rtlCol="0">
-            <a:spAutoFit/>
-          </a:bodyPr>
-          <a:lstStyle/>
-          <a:p>
-            <a:r>
-              <a:rPr lang="pt-BR" sz="1300">
-                <a:solidFill>
-                  <a:srgbClr val="333333"/>
-                </a:solidFill>
-                <a:latin typeface="Calibri" panose="020F0502020204030204" pitchFamily="34" charset="0"/>
-              </a:rPr>
-              <a:t>1h, 4h, 8h
-Hadoop: 4 reducers
-Sequential: same data</a:t>
-            </a:r>
-            <a:endParaRPr lang="az-Cyrl-AZ" sz="1300">
-              <a:solidFill>
-                <a:srgbClr val="333333"/>
-              </a:solidFill>
-              <a:latin typeface="Calibri" panose="020F0502020204030204" pitchFamily="34" charset="0"/>
-            </a:endParaRPr>
-          </a:p>
-        </p:txBody>
-      </p:sp>
-      <p:sp>
-        <p:nvSpPr>
-          <p:cNvPr id="9" name="Rectangle 8">
-            <a:extLst>
-              <a:ext uri="{FF2B5EF4-FFF2-40B4-BE49-F238E27FC236}">
-                <a16:creationId xmlns:a16="http://schemas.microsoft.com/office/drawing/2014/main" id="{36A9FE4F-7FB2-4D10-AE97-481879C84126}"/>
-              </a:ext>
-            </a:extLst>
-          </p:cNvPr>
-          <p:cNvSpPr/>
-          <p:nvPr/>
-        </p:nvSpPr>
-        <p:spPr>
-          <a:xfrm>
-            <a:off x="4445000" y="1422400"/>
-            <a:ext cx="3302000" cy="3111500"/>
-          </a:xfrm>
-          <a:prstGeom prst="rect">
-            <a:avLst/>
-          </a:prstGeom>
-          <a:solidFill>
-            <a:srgbClr val="F1F1F1"/>
-          </a:solidFill>
-          <a:ln w="12700">
-            <a:solidFill>
-              <a:srgbClr val="CCCCCC"/>
-            </a:solidFill>
-          </a:ln>
-        </p:spPr>
-        <p:style>
-          <a:lnRef idx="2">
-            <a:schemeClr val="accent1">
-              <a:shade val="50000"/>
-            </a:schemeClr>
-          </a:lnRef>
-          <a:fillRef idx="1">
-            <a:schemeClr val="accent1"/>
-          </a:fillRef>
-          <a:effectRef idx="0">
-            <a:schemeClr val="accent1"/>
-          </a:effectRef>
-          <a:fontRef idx="minor">
-            <a:schemeClr val="lt1"/>
-          </a:fontRef>
-        </p:style>
-        <p:txBody>
-          <a:bodyPr rtlCol="0" anchor="ctr"/>
-          <a:lstStyle/>
-          <a:p>
-            <a:pPr algn="ctr"/>
-            <a:endParaRPr lang="az-Cyrl-AZ"/>
-          </a:p>
-        </p:txBody>
-      </p:sp>
-      <p:sp>
-        <p:nvSpPr>
-          <p:cNvPr id="10" name="TextBox 9">
-            <a:extLst>
-              <a:ext uri="{FF2B5EF4-FFF2-40B4-BE49-F238E27FC236}">
-                <a16:creationId xmlns:a16="http://schemas.microsoft.com/office/drawing/2014/main" id="{22D2DDD7-D7D6-4CDC-BEE2-3AD989DC42D1}"/>
-              </a:ext>
-            </a:extLst>
-          </p:cNvPr>
-          <p:cNvSpPr txBox="1"/>
-          <p:nvPr/>
-        </p:nvSpPr>
-        <p:spPr>
-          <a:xfrm>
-            <a:off x="4648200" y="1600200"/>
-            <a:ext cx="2895600" cy="338554"/>
-          </a:xfrm>
-          <a:prstGeom prst="rect">
-            <a:avLst/>
-          </a:prstGeom>
-          <a:noFill/>
-        </p:spPr>
-        <p:txBody>
-          <a:bodyPr vert="horz" rtlCol="0">
-            <a:spAutoFit/>
-          </a:bodyPr>
-          <a:lstStyle/>
-          <a:p>
-            <a:r>
-              <a:rPr lang="en-US" sz="1600" b="1">
-                <a:solidFill>
-                  <a:srgbClr val="4EED0B"/>
-                </a:solidFill>
-                <a:latin typeface="Calibri" panose="020F0502020204030204" pitchFamily="34" charset="0"/>
-              </a:rPr>
-              <a:t>Reducer Benchmark</a:t>
-            </a:r>
-            <a:endParaRPr lang="az-Cyrl-AZ" sz="1600" b="1">
-              <a:solidFill>
-                <a:srgbClr val="4EED0B"/>
-              </a:solidFill>
-              <a:latin typeface="Calibri" panose="020F0502020204030204" pitchFamily="34" charset="0"/>
-            </a:endParaRPr>
-          </a:p>
-        </p:txBody>
-      </p:sp>
-      <p:sp>
-        <p:nvSpPr>
-          <p:cNvPr id="11" name="TextBox 10">
-            <a:extLst>
-              <a:ext uri="{FF2B5EF4-FFF2-40B4-BE49-F238E27FC236}">
-                <a16:creationId xmlns:a16="http://schemas.microsoft.com/office/drawing/2014/main" id="{ED8B99B2-A3B5-42AE-AC3F-F023212A176C}"/>
-              </a:ext>
-            </a:extLst>
-          </p:cNvPr>
-          <p:cNvSpPr txBox="1"/>
-          <p:nvPr/>
-        </p:nvSpPr>
-        <p:spPr>
-          <a:xfrm>
-            <a:off x="4648200" y="1981200"/>
-            <a:ext cx="2895600" cy="692497"/>
-          </a:xfrm>
-          <a:prstGeom prst="rect">
-            <a:avLst/>
-          </a:prstGeom>
-          <a:noFill/>
-        </p:spPr>
-        <p:txBody>
-          <a:bodyPr vert="horz" rtlCol="0">
-            <a:spAutoFit/>
-          </a:bodyPr>
-          <a:lstStyle/>
-          <a:p>
-            <a:r>
-              <a:rPr lang="en-US" sz="1300">
-                <a:solidFill>
-                  <a:srgbClr val="333333"/>
-                </a:solidFill>
-                <a:latin typeface="Calibri" panose="020F0502020204030204" pitchFamily="34" charset="0"/>
-              </a:rPr>
-              <a:t>4h dataset
-Reducers: 1, 2, 4, 8
-Hadoop only</a:t>
-            </a:r>
-            <a:endParaRPr lang="az-Cyrl-AZ" sz="1300">
-              <a:solidFill>
-                <a:srgbClr val="333333"/>
-              </a:solidFill>
-              <a:latin typeface="Calibri" panose="020F0502020204030204" pitchFamily="34" charset="0"/>
-            </a:endParaRPr>
-          </a:p>
-        </p:txBody>
-      </p:sp>
-      <p:sp>
-        <p:nvSpPr>
-          <p:cNvPr id="12" name="Rectangle 11">
-            <a:extLst>
-              <a:ext uri="{FF2B5EF4-FFF2-40B4-BE49-F238E27FC236}">
-                <a16:creationId xmlns:a16="http://schemas.microsoft.com/office/drawing/2014/main" id="{A835687E-BD0C-4B38-B412-CE11EAE7462B}"/>
-              </a:ext>
-            </a:extLst>
-          </p:cNvPr>
-          <p:cNvSpPr/>
-          <p:nvPr/>
-        </p:nvSpPr>
-        <p:spPr>
-          <a:xfrm>
-            <a:off x="8191500" y="1422400"/>
-            <a:ext cx="3302000" cy="3111500"/>
-          </a:xfrm>
-          <a:prstGeom prst="rect">
-            <a:avLst/>
-          </a:prstGeom>
-          <a:solidFill>
-            <a:srgbClr val="F1F1F1"/>
-          </a:solidFill>
-          <a:ln w="12700">
-            <a:solidFill>
-              <a:srgbClr val="CCCCCC"/>
-            </a:solidFill>
-          </a:ln>
-        </p:spPr>
-        <p:style>
-          <a:lnRef idx="2">
-            <a:schemeClr val="accent1">
-              <a:shade val="50000"/>
-            </a:schemeClr>
-          </a:lnRef>
-          <a:fillRef idx="1">
-            <a:schemeClr val="accent1"/>
-          </a:fillRef>
-          <a:effectRef idx="0">
-            <a:schemeClr val="accent1"/>
-          </a:effectRef>
-          <a:fontRef idx="minor">
-            <a:schemeClr val="lt1"/>
-          </a:fontRef>
-        </p:style>
-        <p:txBody>
-          <a:bodyPr rtlCol="0" anchor="ctr"/>
-          <a:lstStyle/>
-          <a:p>
-            <a:pPr algn="ctr"/>
-            <a:endParaRPr lang="az-Cyrl-AZ"/>
-          </a:p>
-        </p:txBody>
-      </p:sp>
-      <p:sp>
-        <p:nvSpPr>
-          <p:cNvPr id="13" name="TextBox 12">
-            <a:extLst>
-              <a:ext uri="{FF2B5EF4-FFF2-40B4-BE49-F238E27FC236}">
-                <a16:creationId xmlns:a16="http://schemas.microsoft.com/office/drawing/2014/main" id="{84010540-B7F7-444B-944B-48BBF201BC41}"/>
-              </a:ext>
-            </a:extLst>
-          </p:cNvPr>
-          <p:cNvSpPr txBox="1"/>
-          <p:nvPr/>
-        </p:nvSpPr>
-        <p:spPr>
-          <a:xfrm>
-            <a:off x="8394700" y="1600200"/>
-            <a:ext cx="2895600" cy="338554"/>
-          </a:xfrm>
-          <a:prstGeom prst="rect">
-            <a:avLst/>
-          </a:prstGeom>
-          <a:noFill/>
-        </p:spPr>
-        <p:txBody>
-          <a:bodyPr vert="horz" rtlCol="0">
-            <a:spAutoFit/>
-          </a:bodyPr>
-          <a:lstStyle/>
-          <a:p>
-            <a:r>
-              <a:rPr lang="en-US" sz="1600" b="1">
-                <a:solidFill>
-                  <a:srgbClr val="4EED0B"/>
-                </a:solidFill>
-                <a:latin typeface="Calibri" panose="020F0502020204030204" pitchFamily="34" charset="0"/>
-              </a:rPr>
-              <a:t>Memory Benchmark</a:t>
-            </a:r>
-            <a:endParaRPr lang="az-Cyrl-AZ" sz="1600" b="1">
-              <a:solidFill>
-                <a:srgbClr val="4EED0B"/>
-              </a:solidFill>
-              <a:latin typeface="Calibri" panose="020F0502020204030204" pitchFamily="34" charset="0"/>
-            </a:endParaRPr>
-          </a:p>
-        </p:txBody>
-      </p:sp>
-      <p:sp>
-        <p:nvSpPr>
-          <p:cNvPr id="14" name="TextBox 13">
-            <a:extLst>
-              <a:ext uri="{FF2B5EF4-FFF2-40B4-BE49-F238E27FC236}">
-                <a16:creationId xmlns:a16="http://schemas.microsoft.com/office/drawing/2014/main" id="{41602DD7-9ACD-4571-A224-0782DD38A987}"/>
-              </a:ext>
-            </a:extLst>
-          </p:cNvPr>
-          <p:cNvSpPr txBox="1"/>
-          <p:nvPr/>
-        </p:nvSpPr>
-        <p:spPr>
-          <a:xfrm>
-            <a:off x="8394700" y="1981200"/>
-            <a:ext cx="2895600" cy="692497"/>
-          </a:xfrm>
-          <a:prstGeom prst="rect">
-            <a:avLst/>
-          </a:prstGeom>
-          <a:noFill/>
-        </p:spPr>
-        <p:txBody>
-          <a:bodyPr vert="horz" rtlCol="0">
-            <a:spAutoFit/>
-          </a:bodyPr>
-          <a:lstStyle/>
-          <a:p>
-            <a:r>
-              <a:rPr lang="en-US" sz="1300">
-                <a:solidFill>
-                  <a:srgbClr val="333333"/>
-                </a:solidFill>
-                <a:latin typeface="Calibri" panose="020F0502020204030204" pitchFamily="34" charset="0"/>
-              </a:rPr>
-              <a:t>1h, 4h, 8h
-Hadoop: average YARN allocated MB
-Sequential: peak RSS MB</a:t>
-            </a:r>
-            <a:endParaRPr lang="az-Cyrl-AZ" sz="1300">
-              <a:solidFill>
-                <a:srgbClr val="333333"/>
-              </a:solidFill>
-              <a:latin typeface="Calibri" panose="020F0502020204030204" pitchFamily="34" charset="0"/>
-            </a:endParaRPr>
-          </a:p>
-        </p:txBody>
-      </p:sp>
-      <p:sp>
-        <p:nvSpPr>
-          <p:cNvPr id="15" name="TextBox 14">
-            <a:extLst>
-              <a:ext uri="{FF2B5EF4-FFF2-40B4-BE49-F238E27FC236}">
-                <a16:creationId xmlns:a16="http://schemas.microsoft.com/office/drawing/2014/main" id="{4D0B38ED-F9BC-4329-B895-4F2F5C8E5729}"/>
-              </a:ext>
-            </a:extLst>
-          </p:cNvPr>
-          <p:cNvSpPr txBox="1"/>
-          <p:nvPr/>
-        </p:nvSpPr>
-        <p:spPr>
-          <a:xfrm>
-            <a:off x="914400" y="4953000"/>
-            <a:ext cx="10414000" cy="338554"/>
-          </a:xfrm>
-          <a:prstGeom prst="rect">
-            <a:avLst/>
-          </a:prstGeom>
-          <a:noFill/>
-        </p:spPr>
-        <p:txBody>
-          <a:bodyPr vert="horz" rtlCol="0">
-            <a:spAutoFit/>
-          </a:bodyPr>
-          <a:lstStyle/>
-          <a:p>
-            <a:r>
-              <a:rPr lang="en-US" sz="1600">
-                <a:solidFill>
-                  <a:srgbClr val="333333"/>
-                </a:solidFill>
-                <a:latin typeface="Calibri" panose="020F0502020204030204" pitchFamily="34" charset="0"/>
-              </a:rPr>
-              <a:t>All benchmarks were designed as separate scripts so each experiment can be run and interpreted independently.</a:t>
-            </a:r>
-            <a:endParaRPr lang="az-Cyrl-AZ" sz="1600">
-              <a:solidFill>
-                <a:srgbClr val="333333"/>
-              </a:solidFill>
-              <a:latin typeface="Calibri" panose="020F0502020204030204" pitchFamily="34" charset="0"/>
-            </a:endParaRPr>
-          </a:p>
-        </p:txBody>
-      </p:sp>
     </p:spTree>
     <p:extLst>
       <p:ext uri="{BB962C8B-B14F-4D97-AF65-F5344CB8AC3E}">
-        <p14:creationId xmlns:p14="http://schemas.microsoft.com/office/powerpoint/2010/main" val="1489195471"/>
+        <p14:creationId xmlns:p14="http://schemas.microsoft.com/office/powerpoint/2010/main" val="3139004198"/>
       </p:ext>
     </p:extLst>
   </p:cSld>
@@ -7928,7 +8367,7 @@
           <p:cNvPr id="2" name="Rectangle 1">
             <a:extLst>
               <a:ext uri="{FF2B5EF4-FFF2-40B4-BE49-F238E27FC236}">
-                <a16:creationId xmlns:a16="http://schemas.microsoft.com/office/drawing/2014/main" id="{EB0A8493-E5A9-40DA-A72D-5CCC76773511}"/>
+                <a16:creationId xmlns:a16="http://schemas.microsoft.com/office/drawing/2014/main" id="{BC94E2BE-77A9-410D-824B-4F785659DA1D}"/>
               </a:ext>
             </a:extLst>
           </p:cNvPr>
@@ -7996,7 +8435,7 @@
           <p:cNvPr id="3" name="TextBox 2">
             <a:extLst>
               <a:ext uri="{FF2B5EF4-FFF2-40B4-BE49-F238E27FC236}">
-                <a16:creationId xmlns:a16="http://schemas.microsoft.com/office/drawing/2014/main" id="{D4B23D93-455A-4A3C-B31C-C0A695EDF760}"/>
+                <a16:creationId xmlns:a16="http://schemas.microsoft.com/office/drawing/2014/main" id="{B031A51D-E180-4B27-A180-E16C2E96B77F}"/>
               </a:ext>
             </a:extLst>
           </p:cNvPr>
@@ -8026,7 +8465,7 @@
                 </a:solidFill>
                 <a:latin typeface="Georgia" panose="02040502050405020303" pitchFamily="18" charset="0"/>
               </a:rPr>
-              <a:t>Execution Time by Dataset Size</a:t>
+              <a:t>Experimental Configuration</a:t>
             </a:r>
             <a:endParaRPr lang="az-Cyrl-AZ" sz="2300" b="1">
               <a:solidFill>
@@ -8042,7 +8481,7 @@
           <p:cNvPr id="4" name="TextBox 3">
             <a:extLst>
               <a:ext uri="{FF2B5EF4-FFF2-40B4-BE49-F238E27FC236}">
-                <a16:creationId xmlns:a16="http://schemas.microsoft.com/office/drawing/2014/main" id="{C98DB742-405B-46D4-BC86-84DEBE4759F8}"/>
+                <a16:creationId xmlns:a16="http://schemas.microsoft.com/office/drawing/2014/main" id="{2CA656F8-89AB-4073-A21C-7E5CA2B9B224}"/>
               </a:ext>
             </a:extLst>
           </p:cNvPr>
@@ -8072,7 +8511,7 @@
                 </a:solidFill>
                 <a:latin typeface="Calibri" panose="020F0502020204030204" pitchFamily="34" charset="0"/>
               </a:rPr>
-              <a:t>Hadoop with 4 reducers vs Python sequential baseline</a:t>
+              <a:t>Controlled parameters used in the benchmarks</a:t>
             </a:r>
             <a:endParaRPr lang="az-Cyrl-AZ" sz="1600">
               <a:solidFill>
@@ -8088,7 +8527,7 @@
           <p:cNvPr id="5" name="TextBox 4">
             <a:extLst>
               <a:ext uri="{FF2B5EF4-FFF2-40B4-BE49-F238E27FC236}">
-                <a16:creationId xmlns:a16="http://schemas.microsoft.com/office/drawing/2014/main" id="{C56A2312-5998-40E1-B49D-8A7276F1E977}"/>
+                <a16:creationId xmlns:a16="http://schemas.microsoft.com/office/drawing/2014/main" id="{4FE58D1A-D6F4-4B55-898E-3752149124CE}"/>
               </a:ext>
             </a:extLst>
           </p:cNvPr>
@@ -8129,48 +8568,66 @@
           </a:p>
         </p:txBody>
       </p:sp>
-      <p:pic>
-        <p:nvPicPr>
-          <p:cNvPr id="7" name="Picture 6">
-            <a:extLst>
-              <a:ext uri="{FF2B5EF4-FFF2-40B4-BE49-F238E27FC236}">
-                <a16:creationId xmlns:a16="http://schemas.microsoft.com/office/drawing/2014/main" id="{1B105F7F-AE79-4709-B17C-92ED512D17EB}"/>
-              </a:ext>
-            </a:extLst>
-          </p:cNvPr>
-          <p:cNvPicPr>
-            <a:picLocks/>
-          </p:cNvPicPr>
+      <p:sp>
+        <p:nvSpPr>
+          <p:cNvPr id="6" name="Rectangle 5">
+            <a:extLst>
+              <a:ext uri="{FF2B5EF4-FFF2-40B4-BE49-F238E27FC236}">
+                <a16:creationId xmlns:a16="http://schemas.microsoft.com/office/drawing/2014/main" id="{80B211F3-FA7C-416E-B4AF-B465C127825D}"/>
+              </a:ext>
+            </a:extLst>
+          </p:cNvPr>
+          <p:cNvSpPr/>
           <p:nvPr/>
-        </p:nvPicPr>
-        <p:blipFill>
-          <a:blip r:embed="rId2">
-            <a:extLst>
-              <a:ext uri="{28A0092B-C50C-407E-A947-70E740481C1C}">
-                <a14:useLocalDpi xmlns:a14="http://schemas.microsoft.com/office/drawing/2010/main" val="0"/>
-              </a:ext>
-            </a:extLst>
-          </a:blip>
-          <a:stretch>
-            <a:fillRect/>
-          </a:stretch>
-        </p:blipFill>
-        <p:spPr>
-          <a:xfrm>
-            <a:off x="1270000" y="1092200"/>
-            <a:ext cx="9652000" cy="4953000"/>
-          </a:xfrm>
-          <a:prstGeom prst="rect">
-            <a:avLst/>
-          </a:prstGeom>
-        </p:spPr>
-      </p:pic>
-      <p:sp>
-        <p:nvSpPr>
-          <p:cNvPr id="8" name="TextBox 7">
-            <a:extLst>
-              <a:ext uri="{FF2B5EF4-FFF2-40B4-BE49-F238E27FC236}">
-                <a16:creationId xmlns:a16="http://schemas.microsoft.com/office/drawing/2014/main" id="{EF212B7A-47B9-4B09-BC99-674FFF30C52E}"/>
+        </p:nvSpPr>
+        <p:spPr>
+          <a:xfrm>
+            <a:off x="698500" y="1422400"/>
+            <a:ext cx="3302000" cy="3111500"/>
+          </a:xfrm>
+          <a:prstGeom prst="rect">
+            <a:avLst/>
+          </a:prstGeom>
+          <a:solidFill>
+            <a:srgbClr val="F1F1F1"/>
+          </a:solidFill>
+          <a:ln w="12700">
+            <a:solidFill>
+              <a:srgbClr val="CCCCCC"/>
+            </a:solidFill>
+          </a:ln>
+        </p:spPr>
+        <p:style>
+          <a:lnRef idx="2">
+            <a:schemeClr val="accent1">
+              <a:shade val="50000"/>
+            </a:schemeClr>
+          </a:lnRef>
+          <a:fillRef idx="1">
+            <a:schemeClr val="accent1"/>
+          </a:fillRef>
+          <a:effectRef idx="0">
+            <a:schemeClr val="accent1"/>
+          </a:effectRef>
+          <a:fontRef idx="minor">
+            <a:schemeClr val="lt1"/>
+          </a:fontRef>
+        </p:style>
+        <p:txBody>
+          <a:bodyPr rtlCol="0" anchor="ctr"/>
+          <a:lstStyle/>
+          <a:p>
+            <a:pPr algn="ctr"/>
+            <a:endParaRPr lang="az-Cyrl-AZ"/>
+          </a:p>
+        </p:txBody>
+      </p:sp>
+      <p:sp>
+        <p:nvSpPr>
+          <p:cNvPr id="7" name="TextBox 6">
+            <a:extLst>
+              <a:ext uri="{FF2B5EF4-FFF2-40B4-BE49-F238E27FC236}">
+                <a16:creationId xmlns:a16="http://schemas.microsoft.com/office/drawing/2014/main" id="{18EF7A2D-C88B-49DB-8AEE-6EA8A6AABE33}"/>
               </a:ext>
             </a:extLst>
           </p:cNvPr>
@@ -8179,8 +8636,8 @@
         </p:nvSpPr>
         <p:spPr>
           <a:xfrm>
-            <a:off x="787400" y="5969000"/>
-            <a:ext cx="10617200" cy="492443"/>
+            <a:off x="901700" y="1600200"/>
+            <a:ext cx="2895600" cy="338554"/>
           </a:xfrm>
           <a:prstGeom prst="rect">
             <a:avLst/>
@@ -8194,13 +8651,61 @@
           <a:lstStyle/>
           <a:p>
             <a:r>
-              <a:rPr lang="en-US" sz="1300">
-                <a:solidFill>
-                  <a:srgbClr val="333333"/>
+              <a:rPr lang="en-US" sz="1600" b="1">
+                <a:solidFill>
+                  <a:srgbClr val="4EED0B"/>
                 </a:solidFill>
                 <a:latin typeface="Calibri" panose="020F0502020204030204" pitchFamily="34" charset="0"/>
               </a:rPr>
-              <a:t>Sequential processing is faster on 1h, 4h, and 8h because the single-VM setup makes Hadoop startup, shuffle, and disk I/O overhead dominant. The 16h stress test shows the opposite scalability risk: Hadoop completes, while the Python process is killed under memory pressure.</a:t>
+              <a:t>Dataset Size Benchmark</a:t>
+            </a:r>
+            <a:endParaRPr lang="az-Cyrl-AZ" sz="1600" b="1">
+              <a:solidFill>
+                <a:srgbClr val="4EED0B"/>
+              </a:solidFill>
+              <a:latin typeface="Calibri" panose="020F0502020204030204" pitchFamily="34" charset="0"/>
+            </a:endParaRPr>
+          </a:p>
+        </p:txBody>
+      </p:sp>
+      <p:sp>
+        <p:nvSpPr>
+          <p:cNvPr id="8" name="TextBox 7">
+            <a:extLst>
+              <a:ext uri="{FF2B5EF4-FFF2-40B4-BE49-F238E27FC236}">
+                <a16:creationId xmlns:a16="http://schemas.microsoft.com/office/drawing/2014/main" id="{2F7AEA37-80C3-41C9-AC85-C02726162298}"/>
+              </a:ext>
+            </a:extLst>
+          </p:cNvPr>
+          <p:cNvSpPr txBox="1"/>
+          <p:nvPr/>
+        </p:nvSpPr>
+        <p:spPr>
+          <a:xfrm>
+            <a:off x="901700" y="1981200"/>
+            <a:ext cx="2895600" cy="692497"/>
+          </a:xfrm>
+          <a:prstGeom prst="rect">
+            <a:avLst/>
+          </a:prstGeom>
+          <a:noFill/>
+        </p:spPr>
+        <p:txBody>
+          <a:bodyPr vert="horz" rtlCol="0">
+            <a:spAutoFit/>
+          </a:bodyPr>
+          <a:lstStyle/>
+          <a:p>
+            <a:r>
+              <a:rPr lang="pt-BR" sz="1300">
+                <a:solidFill>
+                  <a:srgbClr val="333333"/>
+                </a:solidFill>
+                <a:latin typeface="Calibri" panose="020F0502020204030204" pitchFamily="34" charset="0"/>
+              </a:rPr>
+              <a:t>1h, 4h, 8h
+Hadoop: 4 reducers
+Sequential: same data</a:t>
             </a:r>
             <a:endParaRPr lang="az-Cyrl-AZ" sz="1300">
               <a:solidFill>
@@ -8211,10 +8716,352 @@
           </a:p>
         </p:txBody>
       </p:sp>
+      <p:sp>
+        <p:nvSpPr>
+          <p:cNvPr id="9" name="Rectangle 8">
+            <a:extLst>
+              <a:ext uri="{FF2B5EF4-FFF2-40B4-BE49-F238E27FC236}">
+                <a16:creationId xmlns:a16="http://schemas.microsoft.com/office/drawing/2014/main" id="{36A9FE4F-7FB2-4D10-AE97-481879C84126}"/>
+              </a:ext>
+            </a:extLst>
+          </p:cNvPr>
+          <p:cNvSpPr/>
+          <p:nvPr/>
+        </p:nvSpPr>
+        <p:spPr>
+          <a:xfrm>
+            <a:off x="4445000" y="1422400"/>
+            <a:ext cx="3302000" cy="3111500"/>
+          </a:xfrm>
+          <a:prstGeom prst="rect">
+            <a:avLst/>
+          </a:prstGeom>
+          <a:solidFill>
+            <a:srgbClr val="F1F1F1"/>
+          </a:solidFill>
+          <a:ln w="12700">
+            <a:solidFill>
+              <a:srgbClr val="CCCCCC"/>
+            </a:solidFill>
+          </a:ln>
+        </p:spPr>
+        <p:style>
+          <a:lnRef idx="2">
+            <a:schemeClr val="accent1">
+              <a:shade val="50000"/>
+            </a:schemeClr>
+          </a:lnRef>
+          <a:fillRef idx="1">
+            <a:schemeClr val="accent1"/>
+          </a:fillRef>
+          <a:effectRef idx="0">
+            <a:schemeClr val="accent1"/>
+          </a:effectRef>
+          <a:fontRef idx="minor">
+            <a:schemeClr val="lt1"/>
+          </a:fontRef>
+        </p:style>
+        <p:txBody>
+          <a:bodyPr rtlCol="0" anchor="ctr"/>
+          <a:lstStyle/>
+          <a:p>
+            <a:pPr algn="ctr"/>
+            <a:endParaRPr lang="az-Cyrl-AZ"/>
+          </a:p>
+        </p:txBody>
+      </p:sp>
+      <p:sp>
+        <p:nvSpPr>
+          <p:cNvPr id="10" name="TextBox 9">
+            <a:extLst>
+              <a:ext uri="{FF2B5EF4-FFF2-40B4-BE49-F238E27FC236}">
+                <a16:creationId xmlns:a16="http://schemas.microsoft.com/office/drawing/2014/main" id="{22D2DDD7-D7D6-4CDC-BEE2-3AD989DC42D1}"/>
+              </a:ext>
+            </a:extLst>
+          </p:cNvPr>
+          <p:cNvSpPr txBox="1"/>
+          <p:nvPr/>
+        </p:nvSpPr>
+        <p:spPr>
+          <a:xfrm>
+            <a:off x="4648200" y="1600200"/>
+            <a:ext cx="2895600" cy="338554"/>
+          </a:xfrm>
+          <a:prstGeom prst="rect">
+            <a:avLst/>
+          </a:prstGeom>
+          <a:noFill/>
+        </p:spPr>
+        <p:txBody>
+          <a:bodyPr vert="horz" rtlCol="0">
+            <a:spAutoFit/>
+          </a:bodyPr>
+          <a:lstStyle/>
+          <a:p>
+            <a:r>
+              <a:rPr lang="en-US" sz="1600" b="1">
+                <a:solidFill>
+                  <a:srgbClr val="4EED0B"/>
+                </a:solidFill>
+                <a:latin typeface="Calibri" panose="020F0502020204030204" pitchFamily="34" charset="0"/>
+              </a:rPr>
+              <a:t>Reducer Benchmark</a:t>
+            </a:r>
+            <a:endParaRPr lang="az-Cyrl-AZ" sz="1600" b="1">
+              <a:solidFill>
+                <a:srgbClr val="4EED0B"/>
+              </a:solidFill>
+              <a:latin typeface="Calibri" panose="020F0502020204030204" pitchFamily="34" charset="0"/>
+            </a:endParaRPr>
+          </a:p>
+        </p:txBody>
+      </p:sp>
+      <p:sp>
+        <p:nvSpPr>
+          <p:cNvPr id="11" name="TextBox 10">
+            <a:extLst>
+              <a:ext uri="{FF2B5EF4-FFF2-40B4-BE49-F238E27FC236}">
+                <a16:creationId xmlns:a16="http://schemas.microsoft.com/office/drawing/2014/main" id="{ED8B99B2-A3B5-42AE-AC3F-F023212A176C}"/>
+              </a:ext>
+            </a:extLst>
+          </p:cNvPr>
+          <p:cNvSpPr txBox="1"/>
+          <p:nvPr/>
+        </p:nvSpPr>
+        <p:spPr>
+          <a:xfrm>
+            <a:off x="4648200" y="1981200"/>
+            <a:ext cx="2895600" cy="692497"/>
+          </a:xfrm>
+          <a:prstGeom prst="rect">
+            <a:avLst/>
+          </a:prstGeom>
+          <a:noFill/>
+        </p:spPr>
+        <p:txBody>
+          <a:bodyPr vert="horz" rtlCol="0">
+            <a:spAutoFit/>
+          </a:bodyPr>
+          <a:lstStyle/>
+          <a:p>
+            <a:r>
+              <a:rPr lang="en-US" sz="1300">
+                <a:solidFill>
+                  <a:srgbClr val="333333"/>
+                </a:solidFill>
+                <a:latin typeface="Calibri" panose="020F0502020204030204" pitchFamily="34" charset="0"/>
+              </a:rPr>
+              <a:t>4h dataset
+Reducers: 1, 2, 4, 8
+Hadoop only</a:t>
+            </a:r>
+            <a:endParaRPr lang="az-Cyrl-AZ" sz="1300">
+              <a:solidFill>
+                <a:srgbClr val="333333"/>
+              </a:solidFill>
+              <a:latin typeface="Calibri" panose="020F0502020204030204" pitchFamily="34" charset="0"/>
+            </a:endParaRPr>
+          </a:p>
+        </p:txBody>
+      </p:sp>
+      <p:sp>
+        <p:nvSpPr>
+          <p:cNvPr id="12" name="Rectangle 11">
+            <a:extLst>
+              <a:ext uri="{FF2B5EF4-FFF2-40B4-BE49-F238E27FC236}">
+                <a16:creationId xmlns:a16="http://schemas.microsoft.com/office/drawing/2014/main" id="{A835687E-BD0C-4B38-B412-CE11EAE7462B}"/>
+              </a:ext>
+            </a:extLst>
+          </p:cNvPr>
+          <p:cNvSpPr/>
+          <p:nvPr/>
+        </p:nvSpPr>
+        <p:spPr>
+          <a:xfrm>
+            <a:off x="8191500" y="1422400"/>
+            <a:ext cx="3302000" cy="3111500"/>
+          </a:xfrm>
+          <a:prstGeom prst="rect">
+            <a:avLst/>
+          </a:prstGeom>
+          <a:solidFill>
+            <a:srgbClr val="F1F1F1"/>
+          </a:solidFill>
+          <a:ln w="12700">
+            <a:solidFill>
+              <a:srgbClr val="CCCCCC"/>
+            </a:solidFill>
+          </a:ln>
+        </p:spPr>
+        <p:style>
+          <a:lnRef idx="2">
+            <a:schemeClr val="accent1">
+              <a:shade val="50000"/>
+            </a:schemeClr>
+          </a:lnRef>
+          <a:fillRef idx="1">
+            <a:schemeClr val="accent1"/>
+          </a:fillRef>
+          <a:effectRef idx="0">
+            <a:schemeClr val="accent1"/>
+          </a:effectRef>
+          <a:fontRef idx="minor">
+            <a:schemeClr val="lt1"/>
+          </a:fontRef>
+        </p:style>
+        <p:txBody>
+          <a:bodyPr rtlCol="0" anchor="ctr"/>
+          <a:lstStyle/>
+          <a:p>
+            <a:pPr algn="ctr"/>
+            <a:endParaRPr lang="az-Cyrl-AZ"/>
+          </a:p>
+        </p:txBody>
+      </p:sp>
+      <p:sp>
+        <p:nvSpPr>
+          <p:cNvPr id="13" name="TextBox 12">
+            <a:extLst>
+              <a:ext uri="{FF2B5EF4-FFF2-40B4-BE49-F238E27FC236}">
+                <a16:creationId xmlns:a16="http://schemas.microsoft.com/office/drawing/2014/main" id="{84010540-B7F7-444B-944B-48BBF201BC41}"/>
+              </a:ext>
+            </a:extLst>
+          </p:cNvPr>
+          <p:cNvSpPr txBox="1"/>
+          <p:nvPr/>
+        </p:nvSpPr>
+        <p:spPr>
+          <a:xfrm>
+            <a:off x="8394700" y="1600200"/>
+            <a:ext cx="2895600" cy="338554"/>
+          </a:xfrm>
+          <a:prstGeom prst="rect">
+            <a:avLst/>
+          </a:prstGeom>
+          <a:noFill/>
+        </p:spPr>
+        <p:txBody>
+          <a:bodyPr vert="horz" rtlCol="0">
+            <a:spAutoFit/>
+          </a:bodyPr>
+          <a:lstStyle/>
+          <a:p>
+            <a:r>
+              <a:rPr lang="en-US" sz="1600" b="1">
+                <a:solidFill>
+                  <a:srgbClr val="4EED0B"/>
+                </a:solidFill>
+                <a:latin typeface="Calibri" panose="020F0502020204030204" pitchFamily="34" charset="0"/>
+              </a:rPr>
+              <a:t>Memory Benchmark</a:t>
+            </a:r>
+            <a:endParaRPr lang="az-Cyrl-AZ" sz="1600" b="1">
+              <a:solidFill>
+                <a:srgbClr val="4EED0B"/>
+              </a:solidFill>
+              <a:latin typeface="Calibri" panose="020F0502020204030204" pitchFamily="34" charset="0"/>
+            </a:endParaRPr>
+          </a:p>
+        </p:txBody>
+      </p:sp>
+      <p:sp>
+        <p:nvSpPr>
+          <p:cNvPr id="14" name="TextBox 13">
+            <a:extLst>
+              <a:ext uri="{FF2B5EF4-FFF2-40B4-BE49-F238E27FC236}">
+                <a16:creationId xmlns:a16="http://schemas.microsoft.com/office/drawing/2014/main" id="{41602DD7-9ACD-4571-A224-0782DD38A987}"/>
+              </a:ext>
+            </a:extLst>
+          </p:cNvPr>
+          <p:cNvSpPr txBox="1"/>
+          <p:nvPr/>
+        </p:nvSpPr>
+        <p:spPr>
+          <a:xfrm>
+            <a:off x="8394700" y="1981200"/>
+            <a:ext cx="2895600" cy="692497"/>
+          </a:xfrm>
+          <a:prstGeom prst="rect">
+            <a:avLst/>
+          </a:prstGeom>
+          <a:noFill/>
+        </p:spPr>
+        <p:txBody>
+          <a:bodyPr vert="horz" rtlCol="0">
+            <a:spAutoFit/>
+          </a:bodyPr>
+          <a:lstStyle/>
+          <a:p>
+            <a:r>
+              <a:rPr lang="en-US" sz="1300">
+                <a:solidFill>
+                  <a:srgbClr val="333333"/>
+                </a:solidFill>
+                <a:latin typeface="Calibri" panose="020F0502020204030204" pitchFamily="34" charset="0"/>
+              </a:rPr>
+              <a:t>1h, 4h, 8h
+Hadoop: average YARN allocated MB
+Sequential: peak RSS MB</a:t>
+            </a:r>
+            <a:endParaRPr lang="az-Cyrl-AZ" sz="1300">
+              <a:solidFill>
+                <a:srgbClr val="333333"/>
+              </a:solidFill>
+              <a:latin typeface="Calibri" panose="020F0502020204030204" pitchFamily="34" charset="0"/>
+            </a:endParaRPr>
+          </a:p>
+        </p:txBody>
+      </p:sp>
+      <p:sp>
+        <p:nvSpPr>
+          <p:cNvPr id="15" name="TextBox 14">
+            <a:extLst>
+              <a:ext uri="{FF2B5EF4-FFF2-40B4-BE49-F238E27FC236}">
+                <a16:creationId xmlns:a16="http://schemas.microsoft.com/office/drawing/2014/main" id="{4D0B38ED-F9BC-4329-B895-4F2F5C8E5729}"/>
+              </a:ext>
+            </a:extLst>
+          </p:cNvPr>
+          <p:cNvSpPr txBox="1"/>
+          <p:nvPr/>
+        </p:nvSpPr>
+        <p:spPr>
+          <a:xfrm>
+            <a:off x="914400" y="4953000"/>
+            <a:ext cx="10414000" cy="338554"/>
+          </a:xfrm>
+          <a:prstGeom prst="rect">
+            <a:avLst/>
+          </a:prstGeom>
+          <a:noFill/>
+        </p:spPr>
+        <p:txBody>
+          <a:bodyPr vert="horz" rtlCol="0">
+            <a:spAutoFit/>
+          </a:bodyPr>
+          <a:lstStyle/>
+          <a:p>
+            <a:r>
+              <a:rPr lang="en-US" sz="1600">
+                <a:solidFill>
+                  <a:srgbClr val="333333"/>
+                </a:solidFill>
+                <a:latin typeface="Calibri" panose="020F0502020204030204" pitchFamily="34" charset="0"/>
+              </a:rPr>
+              <a:t>All benchmarks were designed as separate scripts so each experiment can be run and interpreted independently.</a:t>
+            </a:r>
+            <a:endParaRPr lang="az-Cyrl-AZ" sz="1600">
+              <a:solidFill>
+                <a:srgbClr val="333333"/>
+              </a:solidFill>
+              <a:latin typeface="Calibri" panose="020F0502020204030204" pitchFamily="34" charset="0"/>
+            </a:endParaRPr>
+          </a:p>
+        </p:txBody>
+      </p:sp>
     </p:spTree>
     <p:extLst>
       <p:ext uri="{BB962C8B-B14F-4D97-AF65-F5344CB8AC3E}">
-        <p14:creationId xmlns:p14="http://schemas.microsoft.com/office/powerpoint/2010/main" val="2260612066"/>
+        <p14:creationId xmlns:p14="http://schemas.microsoft.com/office/powerpoint/2010/main" val="1489195471"/>
       </p:ext>
     </p:extLst>
   </p:cSld>
@@ -8246,7 +9093,7 @@
           <p:cNvPr id="2" name="Rectangle 1">
             <a:extLst>
               <a:ext uri="{FF2B5EF4-FFF2-40B4-BE49-F238E27FC236}">
-                <a16:creationId xmlns:a16="http://schemas.microsoft.com/office/drawing/2014/main" id="{1160E2D7-C6A8-4ED4-A0B1-64FED90EDEA4}"/>
+                <a16:creationId xmlns:a16="http://schemas.microsoft.com/office/drawing/2014/main" id="{EB0A8493-E5A9-40DA-A72D-5CCC76773511}"/>
               </a:ext>
             </a:extLst>
           </p:cNvPr>
@@ -8314,7 +9161,7 @@
           <p:cNvPr id="3" name="TextBox 2">
             <a:extLst>
               <a:ext uri="{FF2B5EF4-FFF2-40B4-BE49-F238E27FC236}">
-                <a16:creationId xmlns:a16="http://schemas.microsoft.com/office/drawing/2014/main" id="{3B639C9F-9DA3-48E8-8D1F-2D250AE26A65}"/>
+                <a16:creationId xmlns:a16="http://schemas.microsoft.com/office/drawing/2014/main" id="{D4B23D93-455A-4A3C-B31C-C0A695EDF760}"/>
               </a:ext>
             </a:extLst>
           </p:cNvPr>
@@ -8344,7 +9191,7 @@
                 </a:solidFill>
                 <a:latin typeface="Georgia" panose="02040502050405020303" pitchFamily="18" charset="0"/>
               </a:rPr>
-              <a:t>Execution Time by Reducers</a:t>
+              <a:t>Execution Time by Dataset Size</a:t>
             </a:r>
             <a:endParaRPr lang="az-Cyrl-AZ" sz="2300" b="1">
               <a:solidFill>
@@ -8360,7 +9207,7 @@
           <p:cNvPr id="4" name="TextBox 3">
             <a:extLst>
               <a:ext uri="{FF2B5EF4-FFF2-40B4-BE49-F238E27FC236}">
-                <a16:creationId xmlns:a16="http://schemas.microsoft.com/office/drawing/2014/main" id="{1F7EE90C-A3D0-4F55-852E-B2C40E972385}"/>
+                <a16:creationId xmlns:a16="http://schemas.microsoft.com/office/drawing/2014/main" id="{C98DB742-405B-46D4-BC86-84DEBE4759F8}"/>
               </a:ext>
             </a:extLst>
           </p:cNvPr>
@@ -8390,7 +9237,7 @@
                 </a:solidFill>
                 <a:latin typeface="Calibri" panose="020F0502020204030204" pitchFamily="34" charset="0"/>
               </a:rPr>
-              <a:t>Effect of reducer count on the 4h dataset</a:t>
+              <a:t>Hadoop with 4 reducers vs Python sequential baseline</a:t>
             </a:r>
             <a:endParaRPr lang="az-Cyrl-AZ" sz="1600">
               <a:solidFill>
@@ -8406,7 +9253,7 @@
           <p:cNvPr id="5" name="TextBox 4">
             <a:extLst>
               <a:ext uri="{FF2B5EF4-FFF2-40B4-BE49-F238E27FC236}">
-                <a16:creationId xmlns:a16="http://schemas.microsoft.com/office/drawing/2014/main" id="{CD8B4404-6476-496E-83C6-7C3CB722D214}"/>
+                <a16:creationId xmlns:a16="http://schemas.microsoft.com/office/drawing/2014/main" id="{C56A2312-5998-40E1-B49D-8A7276F1E977}"/>
               </a:ext>
             </a:extLst>
           </p:cNvPr>
@@ -8452,7 +9299,7 @@
           <p:cNvPr id="7" name="Picture 6">
             <a:extLst>
               <a:ext uri="{FF2B5EF4-FFF2-40B4-BE49-F238E27FC236}">
-                <a16:creationId xmlns:a16="http://schemas.microsoft.com/office/drawing/2014/main" id="{96A9BEDC-3C03-4E4F-9913-80D0724C0539}"/>
+                <a16:creationId xmlns:a16="http://schemas.microsoft.com/office/drawing/2014/main" id="{1B105F7F-AE79-4709-B17C-92ED512D17EB}"/>
               </a:ext>
             </a:extLst>
           </p:cNvPr>
@@ -8475,8 +9322,8 @@
         </p:blipFill>
         <p:spPr>
           <a:xfrm>
-            <a:off x="1524000" y="1168400"/>
-            <a:ext cx="9144000" cy="4572009"/>
+            <a:off x="1270000" y="1092200"/>
+            <a:ext cx="9652000" cy="4953000"/>
           </a:xfrm>
           <a:prstGeom prst="rect">
             <a:avLst/>
@@ -8488,7 +9335,7 @@
           <p:cNvPr id="8" name="TextBox 7">
             <a:extLst>
               <a:ext uri="{FF2B5EF4-FFF2-40B4-BE49-F238E27FC236}">
-                <a16:creationId xmlns:a16="http://schemas.microsoft.com/office/drawing/2014/main" id="{1E318364-BD5F-4DAD-8977-A603CC1AFDE2}"/>
+                <a16:creationId xmlns:a16="http://schemas.microsoft.com/office/drawing/2014/main" id="{EF212B7A-47B9-4B09-BC99-674FFF30C52E}"/>
               </a:ext>
             </a:extLst>
           </p:cNvPr>
@@ -8497,8 +9344,8 @@
         </p:nvSpPr>
         <p:spPr>
           <a:xfrm>
-            <a:off x="914400" y="5969000"/>
-            <a:ext cx="10414000" cy="523220"/>
+            <a:off x="787400" y="5969000"/>
+            <a:ext cx="10617200" cy="492443"/>
           </a:xfrm>
           <a:prstGeom prst="rect">
             <a:avLst/>
@@ -8512,15 +9359,15 @@
           <a:lstStyle/>
           <a:p>
             <a:r>
-              <a:rPr lang="en-US" sz="1400">
+              <a:rPr lang="en-US" sz="1300">
                 <a:solidFill>
                   <a:srgbClr val="333333"/>
                 </a:solidFill>
                 <a:latin typeface="Calibri" panose="020F0502020204030204" pitchFamily="34" charset="0"/>
               </a:rPr>
-              <a:t>The one-reducer run is the fastest in this pseudo-distributed environment. Additional reducers introduce scheduling and shuffle overhead without enough physical parallelism to compensate.</a:t>
-            </a:r>
-            <a:endParaRPr lang="az-Cyrl-AZ" sz="1400">
+              <a:t>Sequential processing is faster on 1h, 4h, and 8h because the single-VM setup makes Hadoop startup, shuffle, and disk I/O overhead dominant. The 16h stress test shows the opposite scalability risk: Hadoop completes, while the Python process is killed under memory pressure.</a:t>
+            </a:r>
+            <a:endParaRPr lang="az-Cyrl-AZ" sz="1300">
               <a:solidFill>
                 <a:srgbClr val="333333"/>
               </a:solidFill>
@@ -8532,7 +9379,7 @@
     </p:spTree>
     <p:extLst>
       <p:ext uri="{BB962C8B-B14F-4D97-AF65-F5344CB8AC3E}">
-        <p14:creationId xmlns:p14="http://schemas.microsoft.com/office/powerpoint/2010/main" val="518487562"/>
+        <p14:creationId xmlns:p14="http://schemas.microsoft.com/office/powerpoint/2010/main" val="2260612066"/>
       </p:ext>
     </p:extLst>
   </p:cSld>

--- a/docs/Cloud_Computing_Solo_Project_Presentation.pptx
+++ b/docs/Cloud_Computing_Solo_Project_Presentation.pptx
@@ -18,6 +18,7 @@
     <p:sldId id="265" r:id="rId12"/>
     <p:sldId id="266" r:id="rId13"/>
     <p:sldId id="267" r:id="rId14"/>
+    <p:sldId id="269" r:id="rId15"/>
   </p:sldIdLst>
   <p:sldSz cx="12192000" cy="6858000"/>
   <p:notesSz cx="6858000" cy="9144000"/>
@@ -5003,6 +5004,957 @@
     <p:extLst>
       <p:ext uri="{BB962C8B-B14F-4D97-AF65-F5344CB8AC3E}">
         <p14:creationId xmlns:p14="http://schemas.microsoft.com/office/powerpoint/2010/main" val="3409942827"/>
+      </p:ext>
+    </p:extLst>
+  </p:cSld>
+  <p:clrMapOvr>
+    <a:masterClrMapping/>
+  </p:clrMapOvr>
+</p:sld>
+</file>
+
+<file path=ppt/slides/slide14.xml><?xml version="1.0" encoding="utf-8"?>
+<p:sld xmlns:a="http://schemas.openxmlformats.org/drawingml/2006/main" xmlns:r="http://schemas.openxmlformats.org/officeDocument/2006/relationships" xmlns:p="http://schemas.openxmlformats.org/presentationml/2006/main">
+  <p:cSld>
+    <p:spTree>
+      <p:nvGrpSpPr>
+        <p:cNvPr id="1" name=""/>
+        <p:cNvGrpSpPr/>
+        <p:nvPr/>
+      </p:nvGrpSpPr>
+      <p:grpSpPr>
+        <a:xfrm>
+          <a:off x="0" y="0"/>
+          <a:ext cx="0" cy="0"/>
+          <a:chOff x="0" y="0"/>
+          <a:chExt cx="0" cy="0"/>
+        </a:xfrm>
+      </p:grpSpPr>
+      <p:sp>
+        <p:nvSpPr>
+          <p:cNvPr id="2" name="Rectangle 1">
+            <a:extLst>
+              <a:ext uri="{FF2B5EF4-FFF2-40B4-BE49-F238E27FC236}">
+                <a16:creationId xmlns:a16="http://schemas.microsoft.com/office/drawing/2014/main" id="{660F6A7A-F3BB-4762-B62E-B7FF625317B8}"/>
+              </a:ext>
+            </a:extLst>
+          </p:cNvPr>
+          <p:cNvSpPr/>
+          <p:nvPr/>
+        </p:nvSpPr>
+        <p:spPr>
+          <a:xfrm>
+            <a:off x="0" y="0"/>
+            <a:ext cx="12192000" cy="685800"/>
+          </a:xfrm>
+          <a:prstGeom prst="rect">
+            <a:avLst/>
+          </a:prstGeom>
+          <a:solidFill>
+            <a:srgbClr val="4EED0B"/>
+          </a:solidFill>
+          <a:ln w="12700" cap="flat" cmpd="sng" algn="ctr">
+            <a:noFill/>
+            <a:prstDash val="solid"/>
+            <a:miter lim="800000"/>
+          </a:ln>
+          <a:effectLst/>
+          <a:extLst>
+            <a:ext uri="{91240B29-F687-4F45-9708-019B960494DF}">
+              <a14:hiddenLine xmlns:a14="http://schemas.microsoft.com/office/drawing/2010/main" w="12700" cap="flat" cmpd="sng" algn="ctr">
+                <a:solidFill>
+                  <a:schemeClr val="accent1">
+                    <a:shade val="50000"/>
+                  </a:schemeClr>
+                </a:solidFill>
+                <a:prstDash val="solid"/>
+                <a:miter lim="800000"/>
+              </a14:hiddenLine>
+            </a:ext>
+          </a:extLst>
+        </p:spPr>
+        <p:style>
+          <a:lnRef idx="2">
+            <a:schemeClr val="accent1">
+              <a:shade val="50000"/>
+            </a:schemeClr>
+          </a:lnRef>
+          <a:fillRef idx="1">
+            <a:schemeClr val="accent1"/>
+          </a:fillRef>
+          <a:effectRef idx="0">
+            <a:schemeClr val="accent1"/>
+          </a:effectRef>
+          <a:fontRef idx="minor">
+            <a:schemeClr val="lt1"/>
+          </a:fontRef>
+        </p:style>
+        <p:txBody>
+          <a:bodyPr rtlCol="0" anchor="ctr"/>
+          <a:lstStyle/>
+          <a:p>
+            <a:pPr algn="ctr"/>
+            <a:endParaRPr lang="az-Cyrl-AZ"/>
+          </a:p>
+        </p:txBody>
+      </p:sp>
+      <p:sp>
+        <p:nvSpPr>
+          <p:cNvPr id="3" name="TextBox 2">
+            <a:extLst>
+              <a:ext uri="{FF2B5EF4-FFF2-40B4-BE49-F238E27FC236}">
+                <a16:creationId xmlns:a16="http://schemas.microsoft.com/office/drawing/2014/main" id="{D7AF07CC-95D9-4C19-855C-3C14DD38A6CC}"/>
+              </a:ext>
+            </a:extLst>
+          </p:cNvPr>
+          <p:cNvSpPr txBox="1"/>
+          <p:nvPr/>
+        </p:nvSpPr>
+        <p:spPr>
+          <a:xfrm>
+            <a:off x="482600" y="177800"/>
+            <a:ext cx="9652000" cy="446276"/>
+          </a:xfrm>
+          <a:prstGeom prst="rect">
+            <a:avLst/>
+          </a:prstGeom>
+          <a:noFill/>
+        </p:spPr>
+        <p:txBody>
+          <a:bodyPr vert="horz" rtlCol="0">
+            <a:spAutoFit/>
+          </a:bodyPr>
+          <a:lstStyle/>
+          <a:p>
+            <a:r>
+              <a:rPr lang="en-US" sz="2300" b="1">
+                <a:solidFill>
+                  <a:srgbClr val="FFFFFF"/>
+                </a:solidFill>
+                <a:latin typeface="Georgia" panose="02040502050405020303" pitchFamily="18" charset="0"/>
+              </a:rPr>
+              <a:t>Live Execution Demo</a:t>
+            </a:r>
+            <a:endParaRPr lang="az-Cyrl-AZ" sz="2300" b="1">
+              <a:solidFill>
+                <a:srgbClr val="FFFFFF"/>
+              </a:solidFill>
+              <a:latin typeface="Georgia" panose="02040502050405020303" pitchFamily="18" charset="0"/>
+            </a:endParaRPr>
+          </a:p>
+        </p:txBody>
+      </p:sp>
+      <p:sp>
+        <p:nvSpPr>
+          <p:cNvPr id="4" name="TextBox 3">
+            <a:extLst>
+              <a:ext uri="{FF2B5EF4-FFF2-40B4-BE49-F238E27FC236}">
+                <a16:creationId xmlns:a16="http://schemas.microsoft.com/office/drawing/2014/main" id="{4C91F649-C6E6-417E-8B9B-755B81C5D6D3}"/>
+              </a:ext>
+            </a:extLst>
+          </p:cNvPr>
+          <p:cNvSpPr txBox="1"/>
+          <p:nvPr/>
+        </p:nvSpPr>
+        <p:spPr>
+          <a:xfrm>
+            <a:off x="482600" y="838200"/>
+            <a:ext cx="10795000" cy="323165"/>
+          </a:xfrm>
+          <a:prstGeom prst="rect">
+            <a:avLst/>
+          </a:prstGeom>
+          <a:noFill/>
+        </p:spPr>
+        <p:txBody>
+          <a:bodyPr vert="horz" rtlCol="0">
+            <a:spAutoFit/>
+          </a:bodyPr>
+          <a:lstStyle/>
+          <a:p>
+            <a:r>
+              <a:rPr lang="en-US" sz="1500">
+                <a:solidFill>
+                  <a:srgbClr val="525252"/>
+                </a:solidFill>
+                <a:latin typeface="Calibri" panose="020F0502020204030204" pitchFamily="34" charset="0"/>
+              </a:rPr>
+              <a:t>Hadoop MapReduce run on the 1h Wikimedia Pageviews dataset</a:t>
+            </a:r>
+            <a:endParaRPr lang="az-Cyrl-AZ" sz="1500">
+              <a:solidFill>
+                <a:srgbClr val="525252"/>
+              </a:solidFill>
+              <a:latin typeface="Calibri" panose="020F0502020204030204" pitchFamily="34" charset="0"/>
+            </a:endParaRPr>
+          </a:p>
+        </p:txBody>
+      </p:sp>
+      <p:sp>
+        <p:nvSpPr>
+          <p:cNvPr id="5" name="Rectangle 4">
+            <a:extLst>
+              <a:ext uri="{FF2B5EF4-FFF2-40B4-BE49-F238E27FC236}">
+                <a16:creationId xmlns:a16="http://schemas.microsoft.com/office/drawing/2014/main" id="{F5DF2056-7601-4100-93AB-6BCE3DC574BB}"/>
+              </a:ext>
+            </a:extLst>
+          </p:cNvPr>
+          <p:cNvSpPr/>
+          <p:nvPr/>
+        </p:nvSpPr>
+        <p:spPr>
+          <a:xfrm>
+            <a:off x="571500" y="1397000"/>
+            <a:ext cx="5207000" cy="2603500"/>
+          </a:xfrm>
+          <a:prstGeom prst="rect">
+            <a:avLst/>
+          </a:prstGeom>
+          <a:solidFill>
+            <a:srgbClr val="F1F1F1"/>
+          </a:solidFill>
+          <a:ln w="12700">
+            <a:solidFill>
+              <a:srgbClr val="CCCCCC"/>
+            </a:solidFill>
+          </a:ln>
+        </p:spPr>
+        <p:style>
+          <a:lnRef idx="2">
+            <a:schemeClr val="accent1">
+              <a:shade val="50000"/>
+            </a:schemeClr>
+          </a:lnRef>
+          <a:fillRef idx="1">
+            <a:schemeClr val="accent1"/>
+          </a:fillRef>
+          <a:effectRef idx="0">
+            <a:schemeClr val="accent1"/>
+          </a:effectRef>
+          <a:fontRef idx="minor">
+            <a:schemeClr val="lt1"/>
+          </a:fontRef>
+        </p:style>
+        <p:txBody>
+          <a:bodyPr rtlCol="0" anchor="ctr"/>
+          <a:lstStyle/>
+          <a:p>
+            <a:pPr algn="ctr"/>
+            <a:endParaRPr lang="az-Cyrl-AZ"/>
+          </a:p>
+        </p:txBody>
+      </p:sp>
+      <p:sp>
+        <p:nvSpPr>
+          <p:cNvPr id="6" name="TextBox 5">
+            <a:extLst>
+              <a:ext uri="{FF2B5EF4-FFF2-40B4-BE49-F238E27FC236}">
+                <a16:creationId xmlns:a16="http://schemas.microsoft.com/office/drawing/2014/main" id="{4931951E-0536-410C-9337-6633E7CEBD54}"/>
+              </a:ext>
+            </a:extLst>
+          </p:cNvPr>
+          <p:cNvSpPr txBox="1"/>
+          <p:nvPr/>
+        </p:nvSpPr>
+        <p:spPr>
+          <a:xfrm>
+            <a:off x="723900" y="1524000"/>
+            <a:ext cx="4902200" cy="292388"/>
+          </a:xfrm>
+          <a:prstGeom prst="rect">
+            <a:avLst/>
+          </a:prstGeom>
+          <a:noFill/>
+        </p:spPr>
+        <p:txBody>
+          <a:bodyPr vert="horz" rtlCol="0">
+            <a:spAutoFit/>
+          </a:bodyPr>
+          <a:lstStyle/>
+          <a:p>
+            <a:r>
+              <a:rPr lang="en-US" sz="1300" b="1">
+                <a:solidFill>
+                  <a:srgbClr val="4EED0B"/>
+                </a:solidFill>
+                <a:latin typeface="Calibri" panose="020F0502020204030204" pitchFamily="34" charset="0"/>
+              </a:rPr>
+              <a:t>Command</a:t>
+            </a:r>
+            <a:endParaRPr lang="az-Cyrl-AZ" sz="1300" b="1">
+              <a:solidFill>
+                <a:srgbClr val="4EED0B"/>
+              </a:solidFill>
+              <a:latin typeface="Calibri" panose="020F0502020204030204" pitchFamily="34" charset="0"/>
+            </a:endParaRPr>
+          </a:p>
+        </p:txBody>
+      </p:sp>
+      <p:sp>
+        <p:nvSpPr>
+          <p:cNvPr id="7" name="TextBox 6">
+            <a:extLst>
+              <a:ext uri="{FF2B5EF4-FFF2-40B4-BE49-F238E27FC236}">
+                <a16:creationId xmlns:a16="http://schemas.microsoft.com/office/drawing/2014/main" id="{7BCB5A19-944F-4CAE-8AAA-0F03284B3037}"/>
+              </a:ext>
+            </a:extLst>
+          </p:cNvPr>
+          <p:cNvSpPr txBox="1"/>
+          <p:nvPr/>
+        </p:nvSpPr>
+        <p:spPr>
+          <a:xfrm>
+            <a:off x="723900" y="1828800"/>
+            <a:ext cx="4902200" cy="1169551"/>
+          </a:xfrm>
+          <a:prstGeom prst="rect">
+            <a:avLst/>
+          </a:prstGeom>
+          <a:noFill/>
+        </p:spPr>
+        <p:txBody>
+          <a:bodyPr vert="horz" rtlCol="0">
+            <a:spAutoFit/>
+          </a:bodyPr>
+          <a:lstStyle/>
+          <a:p>
+            <a:r>
+              <a:rPr lang="en-US" sz="1000">
+                <a:solidFill>
+                  <a:srgbClr val="222222"/>
+                </a:solidFill>
+                <a:latin typeface="Consolas" panose="020B0609020204030204" pitchFamily="49" charset="0"/>
+              </a:rPr>
+              <a:t>./scripts/run_hadoop_pageviews.sh</a:t>
+            </a:r>
+          </a:p>
+          <a:p>
+            <a:r>
+              <a:rPr lang="en-US" sz="1000">
+                <a:solidFill>
+                  <a:srgbClr val="222222"/>
+                </a:solidFill>
+                <a:latin typeface="Consolas" panose="020B0609020204030204" pitchFamily="49" charset="0"/>
+              </a:rPr>
+              <a:t>  /home/hadoop/single_project/hadoop-pageviews</a:t>
+            </a:r>
+          </a:p>
+          <a:p>
+            <a:r>
+              <a:rPr lang="en-US" sz="1000">
+                <a:solidFill>
+                  <a:srgbClr val="222222"/>
+                </a:solidFill>
+                <a:latin typeface="Consolas" panose="020B0609020204030204" pitchFamily="49" charset="0"/>
+              </a:rPr>
+              <a:t>  4</a:t>
+            </a:r>
+          </a:p>
+          <a:p>
+            <a:r>
+              <a:rPr lang="en-US" sz="1000">
+                <a:solidFill>
+                  <a:srgbClr val="222222"/>
+                </a:solidFill>
+                <a:latin typeface="Consolas" panose="020B0609020204030204" pitchFamily="49" charset="0"/>
+              </a:rPr>
+              <a:t>  /user/hadoop/single_project/input/pageviews_1h</a:t>
+            </a:r>
+          </a:p>
+          <a:p>
+            <a:r>
+              <a:rPr lang="en-US" sz="1000">
+                <a:solidFill>
+                  <a:srgbClr val="222222"/>
+                </a:solidFill>
+                <a:latin typeface="Consolas" panose="020B0609020204030204" pitchFamily="49" charset="0"/>
+              </a:rPr>
+              <a:t>  /user/hadoop/single_project/intermediate/demo_1h</a:t>
+            </a:r>
+          </a:p>
+          <a:p>
+            <a:r>
+              <a:rPr lang="en-US" sz="1000">
+                <a:solidFill>
+                  <a:srgbClr val="222222"/>
+                </a:solidFill>
+                <a:latin typeface="Consolas" panose="020B0609020204030204" pitchFamily="49" charset="0"/>
+              </a:rPr>
+              <a:t>  /user/hadoop/single_project/output/demo_1h</a:t>
+            </a:r>
+          </a:p>
+          <a:p>
+            <a:r>
+              <a:rPr lang="en-US" sz="1000">
+                <a:solidFill>
+                  <a:srgbClr val="222222"/>
+                </a:solidFill>
+                <a:latin typeface="Consolas" panose="020B0609020204030204" pitchFamily="49" charset="0"/>
+              </a:rPr>
+              <a:t>  10</a:t>
+            </a:r>
+            <a:endParaRPr lang="az-Cyrl-AZ" sz="1000">
+              <a:solidFill>
+                <a:srgbClr val="222222"/>
+              </a:solidFill>
+              <a:latin typeface="Consolas" panose="020B0609020204030204" pitchFamily="49" charset="0"/>
+            </a:endParaRPr>
+          </a:p>
+        </p:txBody>
+      </p:sp>
+      <p:sp>
+        <p:nvSpPr>
+          <p:cNvPr id="8" name="Rectangle 7">
+            <a:extLst>
+              <a:ext uri="{FF2B5EF4-FFF2-40B4-BE49-F238E27FC236}">
+                <a16:creationId xmlns:a16="http://schemas.microsoft.com/office/drawing/2014/main" id="{2520FB73-F722-495C-A19C-F31D19C90792}"/>
+              </a:ext>
+            </a:extLst>
+          </p:cNvPr>
+          <p:cNvSpPr/>
+          <p:nvPr/>
+        </p:nvSpPr>
+        <p:spPr>
+          <a:xfrm>
+            <a:off x="6413500" y="1397000"/>
+            <a:ext cx="4953000" cy="2603500"/>
+          </a:xfrm>
+          <a:prstGeom prst="rect">
+            <a:avLst/>
+          </a:prstGeom>
+          <a:solidFill>
+            <a:srgbClr val="F1F1F1"/>
+          </a:solidFill>
+          <a:ln w="12700">
+            <a:solidFill>
+              <a:srgbClr val="CCCCCC"/>
+            </a:solidFill>
+          </a:ln>
+        </p:spPr>
+        <p:style>
+          <a:lnRef idx="2">
+            <a:schemeClr val="accent1">
+              <a:shade val="50000"/>
+            </a:schemeClr>
+          </a:lnRef>
+          <a:fillRef idx="1">
+            <a:schemeClr val="accent1"/>
+          </a:fillRef>
+          <a:effectRef idx="0">
+            <a:schemeClr val="accent1"/>
+          </a:effectRef>
+          <a:fontRef idx="minor">
+            <a:schemeClr val="lt1"/>
+          </a:fontRef>
+        </p:style>
+        <p:txBody>
+          <a:bodyPr rtlCol="0" anchor="ctr"/>
+          <a:lstStyle/>
+          <a:p>
+            <a:pPr algn="ctr"/>
+            <a:endParaRPr lang="az-Cyrl-AZ"/>
+          </a:p>
+        </p:txBody>
+      </p:sp>
+      <p:sp>
+        <p:nvSpPr>
+          <p:cNvPr id="9" name="TextBox 8">
+            <a:extLst>
+              <a:ext uri="{FF2B5EF4-FFF2-40B4-BE49-F238E27FC236}">
+                <a16:creationId xmlns:a16="http://schemas.microsoft.com/office/drawing/2014/main" id="{FD634D07-D678-4E6C-A350-B2DE8EF44697}"/>
+              </a:ext>
+            </a:extLst>
+          </p:cNvPr>
+          <p:cNvSpPr txBox="1"/>
+          <p:nvPr/>
+        </p:nvSpPr>
+        <p:spPr>
+          <a:xfrm>
+            <a:off x="6565900" y="1524000"/>
+            <a:ext cx="4648200" cy="292388"/>
+          </a:xfrm>
+          <a:prstGeom prst="rect">
+            <a:avLst/>
+          </a:prstGeom>
+          <a:noFill/>
+        </p:spPr>
+        <p:txBody>
+          <a:bodyPr vert="horz" rtlCol="0">
+            <a:spAutoFit/>
+          </a:bodyPr>
+          <a:lstStyle/>
+          <a:p>
+            <a:r>
+              <a:rPr lang="en-US" sz="1300" b="1">
+                <a:solidFill>
+                  <a:srgbClr val="4EED0B"/>
+                </a:solidFill>
+                <a:latin typeface="Calibri" panose="020F0502020204030204" pitchFamily="34" charset="0"/>
+              </a:rPr>
+              <a:t>Observed Run</a:t>
+            </a:r>
+            <a:endParaRPr lang="az-Cyrl-AZ" sz="1300" b="1">
+              <a:solidFill>
+                <a:srgbClr val="4EED0B"/>
+              </a:solidFill>
+              <a:latin typeface="Calibri" panose="020F0502020204030204" pitchFamily="34" charset="0"/>
+            </a:endParaRPr>
+          </a:p>
+        </p:txBody>
+      </p:sp>
+      <p:sp>
+        <p:nvSpPr>
+          <p:cNvPr id="10" name="TextBox 9">
+            <a:extLst>
+              <a:ext uri="{FF2B5EF4-FFF2-40B4-BE49-F238E27FC236}">
+                <a16:creationId xmlns:a16="http://schemas.microsoft.com/office/drawing/2014/main" id="{033034B5-60A9-4EC9-9557-2CDF806F799D}"/>
+              </a:ext>
+            </a:extLst>
+          </p:cNvPr>
+          <p:cNvSpPr txBox="1"/>
+          <p:nvPr/>
+        </p:nvSpPr>
+        <p:spPr>
+          <a:xfrm>
+            <a:off x="6565900" y="1828800"/>
+            <a:ext cx="4648200" cy="1384995"/>
+          </a:xfrm>
+          <a:prstGeom prst="rect">
+            <a:avLst/>
+          </a:prstGeom>
+          <a:noFill/>
+        </p:spPr>
+        <p:txBody>
+          <a:bodyPr vert="horz" rtlCol="0">
+            <a:spAutoFit/>
+          </a:bodyPr>
+          <a:lstStyle/>
+          <a:p>
+            <a:r>
+              <a:rPr lang="en-US" sz="1200">
+                <a:solidFill>
+                  <a:srgbClr val="222222"/>
+                </a:solidFill>
+                <a:latin typeface="Consolas" panose="020B0609020204030204" pitchFamily="49" charset="0"/>
+              </a:rPr>
+              <a:t>Input: pageviews_1h</a:t>
+            </a:r>
+          </a:p>
+          <a:p>
+            <a:r>
+              <a:rPr lang="en-US" sz="1200">
+                <a:solidFill>
+                  <a:srgbClr val="222222"/>
+                </a:solidFill>
+                <a:latin typeface="Consolas" panose="020B0609020204030204" pitchFamily="49" charset="0"/>
+              </a:rPr>
+              <a:t>Files: 1 gzip hourly dump</a:t>
+            </a:r>
+          </a:p>
+          <a:p>
+            <a:r>
+              <a:rPr lang="en-US" sz="1200">
+                <a:solidFill>
+                  <a:srgbClr val="222222"/>
+                </a:solidFill>
+                <a:latin typeface="Consolas" panose="020B0609020204030204" pitchFamily="49" charset="0"/>
+              </a:rPr>
+              <a:t>Compressed size: 51.7 MiB</a:t>
+            </a:r>
+          </a:p>
+          <a:p>
+            <a:r>
+              <a:rPr lang="en-US" sz="1200">
+                <a:solidFill>
+                  <a:srgbClr val="222222"/>
+                </a:solidFill>
+                <a:latin typeface="Consolas" panose="020B0609020204030204" pitchFamily="49" charset="0"/>
+              </a:rPr>
+              <a:t>HDFS storage: 103.5 MiB (replication 2)</a:t>
+            </a:r>
+          </a:p>
+          <a:p>
+            <a:r>
+              <a:rPr lang="en-US" sz="1200">
+                <a:solidFill>
+                  <a:srgbClr val="222222"/>
+                </a:solidFill>
+                <a:latin typeface="Consolas" panose="020B0609020204030204" pitchFamily="49" charset="0"/>
+              </a:rPr>
+              <a:t>Reducers: 4</a:t>
+            </a:r>
+          </a:p>
+          <a:p>
+            <a:r>
+              <a:rPr lang="en-US" sz="1200">
+                <a:solidFill>
+                  <a:srgbClr val="222222"/>
+                </a:solidFill>
+                <a:latin typeface="Consolas" panose="020B0609020204030204" pitchFamily="49" charset="0"/>
+              </a:rPr>
+              <a:t>Output status: _SUCCESS</a:t>
+            </a:r>
+          </a:p>
+          <a:p>
+            <a:r>
+              <a:rPr lang="en-US" sz="1200">
+                <a:solidFill>
+                  <a:srgbClr val="222222"/>
+                </a:solidFill>
+                <a:latin typeface="Consolas" panose="020B0609020204030204" pitchFamily="49" charset="0"/>
+              </a:rPr>
+              <a:t>Output files: part-r-00000 ... part-r-00003</a:t>
+            </a:r>
+            <a:endParaRPr lang="az-Cyrl-AZ" sz="1200">
+              <a:solidFill>
+                <a:srgbClr val="222222"/>
+              </a:solidFill>
+              <a:latin typeface="Consolas" panose="020B0609020204030204" pitchFamily="49" charset="0"/>
+            </a:endParaRPr>
+          </a:p>
+        </p:txBody>
+      </p:sp>
+      <p:sp>
+        <p:nvSpPr>
+          <p:cNvPr id="11" name="Rectangle 10">
+            <a:extLst>
+              <a:ext uri="{FF2B5EF4-FFF2-40B4-BE49-F238E27FC236}">
+                <a16:creationId xmlns:a16="http://schemas.microsoft.com/office/drawing/2014/main" id="{9D313659-6E60-4551-8F0A-74C4C00DCD6C}"/>
+              </a:ext>
+            </a:extLst>
+          </p:cNvPr>
+          <p:cNvSpPr/>
+          <p:nvPr/>
+        </p:nvSpPr>
+        <p:spPr>
+          <a:xfrm>
+            <a:off x="571500" y="4318000"/>
+            <a:ext cx="10795000" cy="1651000"/>
+          </a:xfrm>
+          <a:prstGeom prst="rect">
+            <a:avLst/>
+          </a:prstGeom>
+          <a:solidFill>
+            <a:srgbClr val="F1F1F1"/>
+          </a:solidFill>
+          <a:ln w="12700">
+            <a:solidFill>
+              <a:srgbClr val="CCCCCC"/>
+            </a:solidFill>
+          </a:ln>
+        </p:spPr>
+        <p:style>
+          <a:lnRef idx="2">
+            <a:schemeClr val="accent1">
+              <a:shade val="50000"/>
+            </a:schemeClr>
+          </a:lnRef>
+          <a:fillRef idx="1">
+            <a:schemeClr val="accent1"/>
+          </a:fillRef>
+          <a:effectRef idx="0">
+            <a:schemeClr val="accent1"/>
+          </a:effectRef>
+          <a:fontRef idx="minor">
+            <a:schemeClr val="lt1"/>
+          </a:fontRef>
+        </p:style>
+        <p:txBody>
+          <a:bodyPr rtlCol="0" anchor="ctr"/>
+          <a:lstStyle/>
+          <a:p>
+            <a:pPr algn="ctr"/>
+            <a:endParaRPr lang="az-Cyrl-AZ"/>
+          </a:p>
+        </p:txBody>
+      </p:sp>
+      <p:sp>
+        <p:nvSpPr>
+          <p:cNvPr id="12" name="TextBox 11">
+            <a:extLst>
+              <a:ext uri="{FF2B5EF4-FFF2-40B4-BE49-F238E27FC236}">
+                <a16:creationId xmlns:a16="http://schemas.microsoft.com/office/drawing/2014/main" id="{346C0D36-9503-48F6-9152-578293DE755C}"/>
+              </a:ext>
+            </a:extLst>
+          </p:cNvPr>
+          <p:cNvSpPr txBox="1"/>
+          <p:nvPr/>
+        </p:nvSpPr>
+        <p:spPr>
+          <a:xfrm>
+            <a:off x="723900" y="4445000"/>
+            <a:ext cx="10490200" cy="292388"/>
+          </a:xfrm>
+          <a:prstGeom prst="rect">
+            <a:avLst/>
+          </a:prstGeom>
+          <a:noFill/>
+        </p:spPr>
+        <p:txBody>
+          <a:bodyPr vert="horz" rtlCol="0">
+            <a:spAutoFit/>
+          </a:bodyPr>
+          <a:lstStyle/>
+          <a:p>
+            <a:r>
+              <a:rPr lang="en-US" sz="1300" b="1">
+                <a:solidFill>
+                  <a:srgbClr val="4EED0B"/>
+                </a:solidFill>
+                <a:latin typeface="Calibri" panose="020F0502020204030204" pitchFamily="34" charset="0"/>
+              </a:rPr>
+              <a:t>Output Excerpt</a:t>
+            </a:r>
+            <a:endParaRPr lang="az-Cyrl-AZ" sz="1300" b="1">
+              <a:solidFill>
+                <a:srgbClr val="4EED0B"/>
+              </a:solidFill>
+              <a:latin typeface="Calibri" panose="020F0502020204030204" pitchFamily="34" charset="0"/>
+            </a:endParaRPr>
+          </a:p>
+        </p:txBody>
+      </p:sp>
+      <p:sp>
+        <p:nvSpPr>
+          <p:cNvPr id="13" name="TextBox 12">
+            <a:extLst>
+              <a:ext uri="{FF2B5EF4-FFF2-40B4-BE49-F238E27FC236}">
+                <a16:creationId xmlns:a16="http://schemas.microsoft.com/office/drawing/2014/main" id="{FF8EF1F3-7DB4-4891-8907-C889534C7BBA}"/>
+              </a:ext>
+            </a:extLst>
+          </p:cNvPr>
+          <p:cNvSpPr txBox="1"/>
+          <p:nvPr/>
+        </p:nvSpPr>
+        <p:spPr>
+          <a:xfrm>
+            <a:off x="723900" y="4749800"/>
+            <a:ext cx="10490200" cy="1785104"/>
+          </a:xfrm>
+          <a:prstGeom prst="rect">
+            <a:avLst/>
+          </a:prstGeom>
+          <a:noFill/>
+        </p:spPr>
+        <p:txBody>
+          <a:bodyPr vert="horz" rtlCol="0">
+            <a:spAutoFit/>
+          </a:bodyPr>
+          <a:lstStyle/>
+          <a:p>
+            <a:r>
+              <a:rPr lang="en-US" sz="1100">
+                <a:solidFill>
+                  <a:srgbClr val="222222"/>
+                </a:solidFill>
+                <a:latin typeface="Consolas" panose="020B0609020204030204" pitchFamily="49" charset="0"/>
+              </a:rPr>
+              <a:t>total_views: 15,459,276</a:t>
+            </a:r>
+          </a:p>
+          <a:p>
+            <a:r>
+              <a:rPr lang="en-US" sz="1100">
+                <a:solidFill>
+                  <a:srgbClr val="222222"/>
+                </a:solidFill>
+                <a:latin typeface="Consolas" panose="020B0609020204030204" pitchFamily="49" charset="0"/>
+              </a:rPr>
+              <a:t>top_projects_by_views:</a:t>
+            </a:r>
+          </a:p>
+          <a:p>
+            <a:r>
+              <a:rPr lang="en-US" sz="1100">
+                <a:solidFill>
+                  <a:srgbClr val="222222"/>
+                </a:solidFill>
+                <a:latin typeface="Consolas" panose="020B0609020204030204" pitchFamily="49" charset="0"/>
+              </a:rPr>
+              <a:t>  1. en.m  5,344,906</a:t>
+            </a:r>
+          </a:p>
+          <a:p>
+            <a:r>
+              <a:rPr lang="en-US" sz="1100">
+                <a:solidFill>
+                  <a:srgbClr val="222222"/>
+                </a:solidFill>
+                <a:latin typeface="Consolas" panose="020B0609020204030204" pitchFamily="49" charset="0"/>
+              </a:rPr>
+              <a:t>  2. en    3,007,383</a:t>
+            </a:r>
+          </a:p>
+          <a:p>
+            <a:r>
+              <a:rPr lang="en-US" sz="1100">
+                <a:solidFill>
+                  <a:srgbClr val="222222"/>
+                </a:solidFill>
+                <a:latin typeface="Consolas" panose="020B0609020204030204" pitchFamily="49" charset="0"/>
+              </a:rPr>
+              <a:t>  3. zh      706,567</a:t>
+            </a:r>
+          </a:p>
+          <a:p>
+            <a:r>
+              <a:rPr lang="en-US" sz="1100">
+                <a:solidFill>
+                  <a:srgbClr val="222222"/>
+                </a:solidFill>
+                <a:latin typeface="Consolas" panose="020B0609020204030204" pitchFamily="49" charset="0"/>
+              </a:rPr>
+              <a:t>top_pages_by_views:</a:t>
+            </a:r>
+          </a:p>
+          <a:p>
+            <a:r>
+              <a:rPr lang="en-US" sz="1100">
+                <a:solidFill>
+                  <a:srgbClr val="222222"/>
+                </a:solidFill>
+                <a:latin typeface="Consolas" panose="020B0609020204030204" pitchFamily="49" charset="0"/>
+              </a:rPr>
+              <a:t>  1. en|Main_Page      132,524</a:t>
+            </a:r>
+          </a:p>
+          <a:p>
+            <a:r>
+              <a:rPr lang="en-US" sz="1100">
+                <a:solidFill>
+                  <a:srgbClr val="222222"/>
+                </a:solidFill>
+                <a:latin typeface="Consolas" panose="020B0609020204030204" pitchFamily="49" charset="0"/>
+              </a:rPr>
+              <a:t>  2. en.m|Main_Page     83,818</a:t>
+            </a:r>
+          </a:p>
+          <a:p>
+            <a:r>
+              <a:rPr lang="en-US" sz="1100">
+                <a:solidFill>
+                  <a:srgbClr val="222222"/>
+                </a:solidFill>
+                <a:latin typeface="Consolas" panose="020B0609020204030204" pitchFamily="49" charset="0"/>
+              </a:rPr>
+              <a:t>views_by_hour:</a:t>
+            </a:r>
+          </a:p>
+          <a:p>
+            <a:r>
+              <a:rPr lang="en-US" sz="1100">
+                <a:solidFill>
+                  <a:srgbClr val="222222"/>
+                </a:solidFill>
+                <a:latin typeface="Consolas" panose="020B0609020204030204" pitchFamily="49" charset="0"/>
+              </a:rPr>
+              <a:t>  20260501-00 -&gt; 15,459,276</a:t>
+            </a:r>
+            <a:endParaRPr lang="az-Cyrl-AZ" sz="1100">
+              <a:solidFill>
+                <a:srgbClr val="222222"/>
+              </a:solidFill>
+              <a:latin typeface="Consolas" panose="020B0609020204030204" pitchFamily="49" charset="0"/>
+            </a:endParaRPr>
+          </a:p>
+        </p:txBody>
+      </p:sp>
+      <p:sp>
+        <p:nvSpPr>
+          <p:cNvPr id="14" name="TextBox 13">
+            <a:extLst>
+              <a:ext uri="{FF2B5EF4-FFF2-40B4-BE49-F238E27FC236}">
+                <a16:creationId xmlns:a16="http://schemas.microsoft.com/office/drawing/2014/main" id="{644F6306-AE06-4D89-B735-824A35BC7370}"/>
+              </a:ext>
+            </a:extLst>
+          </p:cNvPr>
+          <p:cNvSpPr txBox="1"/>
+          <p:nvPr/>
+        </p:nvSpPr>
+        <p:spPr>
+          <a:xfrm>
+            <a:off x="698500" y="6159500"/>
+            <a:ext cx="10541000" cy="276999"/>
+          </a:xfrm>
+          <a:prstGeom prst="rect">
+            <a:avLst/>
+          </a:prstGeom>
+          <a:noFill/>
+        </p:spPr>
+        <p:txBody>
+          <a:bodyPr vert="horz" rtlCol="0">
+            <a:spAutoFit/>
+          </a:bodyPr>
+          <a:lstStyle/>
+          <a:p>
+            <a:r>
+              <a:rPr lang="en-US" sz="1200">
+                <a:solidFill>
+                  <a:srgbClr val="525252"/>
+                </a:solidFill>
+                <a:latin typeface="Calibri" panose="020F0502020204030204" pitchFamily="34" charset="0"/>
+              </a:rPr>
+              <a:t>Because the demo uses 4 reducers, Hadoop writes multiple part-r files; each part contains the metric category assigned to that reducer.</a:t>
+            </a:r>
+            <a:endParaRPr lang="az-Cyrl-AZ" sz="1200">
+              <a:solidFill>
+                <a:srgbClr val="525252"/>
+              </a:solidFill>
+              <a:latin typeface="Calibri" panose="020F0502020204030204" pitchFamily="34" charset="0"/>
+            </a:endParaRPr>
+          </a:p>
+        </p:txBody>
+      </p:sp>
+      <p:sp>
+        <p:nvSpPr>
+          <p:cNvPr id="15" name="TextBox 14">
+            <a:extLst>
+              <a:ext uri="{FF2B5EF4-FFF2-40B4-BE49-F238E27FC236}">
+                <a16:creationId xmlns:a16="http://schemas.microsoft.com/office/drawing/2014/main" id="{4CA6C35E-DF70-4571-A7F4-69E8B999D909}"/>
+              </a:ext>
+            </a:extLst>
+          </p:cNvPr>
+          <p:cNvSpPr txBox="1"/>
+          <p:nvPr/>
+        </p:nvSpPr>
+        <p:spPr>
+          <a:xfrm>
+            <a:off x="482600" y="6477000"/>
+            <a:ext cx="10922000" cy="230832"/>
+          </a:xfrm>
+          <a:prstGeom prst="rect">
+            <a:avLst/>
+          </a:prstGeom>
+          <a:noFill/>
+        </p:spPr>
+        <p:txBody>
+          <a:bodyPr vert="horz" rtlCol="0">
+            <a:spAutoFit/>
+          </a:bodyPr>
+          <a:lstStyle/>
+          <a:p>
+            <a:r>
+              <a:rPr lang="en-US" sz="900">
+                <a:solidFill>
+                  <a:srgbClr val="808080"/>
+                </a:solidFill>
+                <a:latin typeface="Calibri" panose="020F0502020204030204" pitchFamily="34" charset="0"/>
+              </a:rPr>
+              <a:t>Cloud Computing - Wikimedia Pageview Analytics</a:t>
+            </a:r>
+            <a:endParaRPr lang="az-Cyrl-AZ" sz="900">
+              <a:solidFill>
+                <a:srgbClr val="808080"/>
+              </a:solidFill>
+              <a:latin typeface="Calibri" panose="020F0502020204030204" pitchFamily="34" charset="0"/>
+            </a:endParaRPr>
+          </a:p>
+        </p:txBody>
+      </p:sp>
+    </p:spTree>
+    <p:extLst>
+      <p:ext uri="{BB962C8B-B14F-4D97-AF65-F5344CB8AC3E}">
+        <p14:creationId xmlns:p14="http://schemas.microsoft.com/office/powerpoint/2010/main" val="3646746565"/>
       </p:ext>
     </p:extLst>
   </p:cSld>

--- a/docs/Cloud_Computing_Solo_Project_Presentation.pptx
+++ b/docs/Cloud_Computing_Solo_Project_Presentation.pptx
@@ -17,8 +17,8 @@
     <p:sldId id="264" r:id="rId11"/>
     <p:sldId id="265" r:id="rId12"/>
     <p:sldId id="266" r:id="rId13"/>
-    <p:sldId id="267" r:id="rId14"/>
-    <p:sldId id="269" r:id="rId15"/>
+    <p:sldId id="269" r:id="rId14"/>
+    <p:sldId id="267" r:id="rId15"/>
   </p:sldIdLst>
   <p:sldSz cx="12192000" cy="6858000"/>
   <p:notesSz cx="6858000" cy="9144000"/>
@@ -4297,7 +4297,7 @@
           <a:lstStyle/>
           <a:p>
             <a:r>
-              <a:rPr lang="en-US" sz="1300">
+              <a:rPr lang="en-US" sz="1300" dirty="0">
                 <a:solidFill>
                   <a:srgbClr val="333333"/>
                 </a:solidFill>
@@ -4305,7 +4305,7 @@
               </a:rPr>
               <a:t>The two memory metrics are not identical: Hadoop reports average allocated YARN memory, while the sequential baseline reports peak process memory. The trend still shows that the Python baseline grows strongly with dataset size.</a:t>
             </a:r>
-            <a:endParaRPr lang="az-Cyrl-AZ" sz="1300">
+            <a:endParaRPr lang="az-Cyrl-AZ" sz="1300" dirty="0">
               <a:solidFill>
                 <a:srgbClr val="333333"/>
               </a:solidFill>
@@ -4586,7 +4586,7 @@
               <a:buChar char="•"/>
             </a:pPr>
             <a:r>
-              <a:rPr lang="en-US">
+              <a:rPr lang="en-US" dirty="0">
                 <a:solidFill>
                   <a:srgbClr val="222222"/>
                 </a:solidFill>
@@ -4604,7 +4604,7 @@
               <a:buChar char="•"/>
             </a:pPr>
             <a:r>
-              <a:rPr lang="en-US">
+              <a:rPr lang="en-US" dirty="0">
                 <a:solidFill>
                   <a:srgbClr val="222222"/>
                 </a:solidFill>
@@ -4622,7 +4622,7 @@
               <a:buChar char="•"/>
             </a:pPr>
             <a:r>
-              <a:rPr lang="en-US">
+              <a:rPr lang="en-US" dirty="0">
                 <a:solidFill>
                   <a:srgbClr val="222222"/>
                 </a:solidFill>
@@ -4640,7 +4640,7 @@
               <a:buChar char="•"/>
             </a:pPr>
             <a:r>
-              <a:rPr lang="en-US">
+              <a:rPr lang="en-US" dirty="0">
                 <a:solidFill>
                   <a:srgbClr val="222222"/>
                 </a:solidFill>
@@ -4648,7 +4648,7 @@
               </a:rPr>
               <a:t>Increasing reducers does not automatically improve performance on a single VM; the environment limits real parallelism.</a:t>
             </a:r>
-            <a:endParaRPr lang="az-Cyrl-AZ">
+            <a:endParaRPr lang="az-Cyrl-AZ" dirty="0">
               <a:solidFill>
                 <a:srgbClr val="222222"/>
               </a:solidFill>
@@ -4692,7 +4692,7 @@
           <p:cNvPr id="2" name="Rectangle 1">
             <a:extLst>
               <a:ext uri="{FF2B5EF4-FFF2-40B4-BE49-F238E27FC236}">
-                <a16:creationId xmlns:a16="http://schemas.microsoft.com/office/drawing/2014/main" id="{DA35AA88-DD00-49DA-9E49-4EA7AA23EA64}"/>
+                <a16:creationId xmlns:a16="http://schemas.microsoft.com/office/drawing/2014/main" id="{660F6A7A-F3BB-4762-B62E-B7FF625317B8}"/>
               </a:ext>
             </a:extLst>
           </p:cNvPr>
@@ -4760,7 +4760,7 @@
           <p:cNvPr id="3" name="TextBox 2">
             <a:extLst>
               <a:ext uri="{FF2B5EF4-FFF2-40B4-BE49-F238E27FC236}">
-                <a16:creationId xmlns:a16="http://schemas.microsoft.com/office/drawing/2014/main" id="{1D54C83F-AA11-4651-8849-ED56F7CA76C6}"/>
+                <a16:creationId xmlns:a16="http://schemas.microsoft.com/office/drawing/2014/main" id="{D7AF07CC-95D9-4C19-855C-3C14DD38A6CC}"/>
               </a:ext>
             </a:extLst>
           </p:cNvPr>
@@ -4790,7 +4790,7 @@
                 </a:solidFill>
                 <a:latin typeface="Georgia" panose="02040502050405020303" pitchFamily="18" charset="0"/>
               </a:rPr>
-              <a:t>Conclusion</a:t>
+              <a:t>Live Execution Demo</a:t>
             </a:r>
             <a:endParaRPr lang="az-Cyrl-AZ" sz="2300" b="1">
               <a:solidFill>
@@ -4806,7 +4806,7 @@
           <p:cNvPr id="4" name="TextBox 3">
             <a:extLst>
               <a:ext uri="{FF2B5EF4-FFF2-40B4-BE49-F238E27FC236}">
-                <a16:creationId xmlns:a16="http://schemas.microsoft.com/office/drawing/2014/main" id="{AB0C7D4F-6878-49D2-9EBF-A07340A0E3E7}"/>
+                <a16:creationId xmlns:a16="http://schemas.microsoft.com/office/drawing/2014/main" id="{4C91F649-C6E6-417E-8B9B-755B81C5D6D3}"/>
               </a:ext>
             </a:extLst>
           </p:cNvPr>
@@ -4815,8 +4815,8 @@
         </p:nvSpPr>
         <p:spPr>
           <a:xfrm>
-            <a:off x="482600" y="838200"/>
-            <a:ext cx="10668000" cy="338554"/>
+            <a:off x="482600" y="761608"/>
+            <a:ext cx="10795000" cy="323165"/>
           </a:xfrm>
           <a:prstGeom prst="rect">
             <a:avLst/>
@@ -4830,15 +4830,15 @@
           <a:lstStyle/>
           <a:p>
             <a:r>
-              <a:rPr lang="en-US" sz="1600">
+              <a:rPr lang="en-US" sz="1500" dirty="0">
                 <a:solidFill>
                   <a:srgbClr val="525252"/>
                 </a:solidFill>
                 <a:latin typeface="Calibri" panose="020F0502020204030204" pitchFamily="34" charset="0"/>
               </a:rPr>
-              <a:t>Final interpretation</a:t>
-            </a:r>
-            <a:endParaRPr lang="az-Cyrl-AZ" sz="1600">
+              <a:t>Hadoop MapReduce run on the 1h Wikimedia Pageviews dataset</a:t>
+            </a:r>
+            <a:endParaRPr lang="az-Cyrl-AZ" sz="1500" dirty="0">
               <a:solidFill>
                 <a:srgbClr val="525252"/>
               </a:solidFill>
@@ -4849,10 +4849,994 @@
       </p:sp>
       <p:sp>
         <p:nvSpPr>
-          <p:cNvPr id="5" name="TextBox 4">
-            <a:extLst>
-              <a:ext uri="{FF2B5EF4-FFF2-40B4-BE49-F238E27FC236}">
-                <a16:creationId xmlns:a16="http://schemas.microsoft.com/office/drawing/2014/main" id="{780FA22D-9A0A-457E-BA3A-DA61A2D88E2A}"/>
+          <p:cNvPr id="5" name="Rectangle 4">
+            <a:extLst>
+              <a:ext uri="{FF2B5EF4-FFF2-40B4-BE49-F238E27FC236}">
+                <a16:creationId xmlns:a16="http://schemas.microsoft.com/office/drawing/2014/main" id="{F5DF2056-7601-4100-93AB-6BCE3DC574BB}"/>
+              </a:ext>
+            </a:extLst>
+          </p:cNvPr>
+          <p:cNvSpPr/>
+          <p:nvPr/>
+        </p:nvSpPr>
+        <p:spPr>
+          <a:xfrm>
+            <a:off x="571500" y="1141526"/>
+            <a:ext cx="4953000" cy="1785104"/>
+          </a:xfrm>
+          <a:prstGeom prst="rect">
+            <a:avLst/>
+          </a:prstGeom>
+          <a:solidFill>
+            <a:srgbClr val="F1F1F1"/>
+          </a:solidFill>
+          <a:ln w="12700">
+            <a:solidFill>
+              <a:srgbClr val="CCCCCC"/>
+            </a:solidFill>
+          </a:ln>
+        </p:spPr>
+        <p:style>
+          <a:lnRef idx="2">
+            <a:schemeClr val="accent1">
+              <a:shade val="50000"/>
+            </a:schemeClr>
+          </a:lnRef>
+          <a:fillRef idx="1">
+            <a:schemeClr val="accent1"/>
+          </a:fillRef>
+          <a:effectRef idx="0">
+            <a:schemeClr val="accent1"/>
+          </a:effectRef>
+          <a:fontRef idx="minor">
+            <a:schemeClr val="lt1"/>
+          </a:fontRef>
+        </p:style>
+        <p:txBody>
+          <a:bodyPr rtlCol="0" anchor="ctr"/>
+          <a:lstStyle/>
+          <a:p>
+            <a:pPr algn="ctr"/>
+            <a:endParaRPr lang="az-Cyrl-AZ"/>
+          </a:p>
+        </p:txBody>
+      </p:sp>
+      <p:sp>
+        <p:nvSpPr>
+          <p:cNvPr id="6" name="TextBox 5">
+            <a:extLst>
+              <a:ext uri="{FF2B5EF4-FFF2-40B4-BE49-F238E27FC236}">
+                <a16:creationId xmlns:a16="http://schemas.microsoft.com/office/drawing/2014/main" id="{4931951E-0536-410C-9337-6633E7CEBD54}"/>
+              </a:ext>
+            </a:extLst>
+          </p:cNvPr>
+          <p:cNvSpPr txBox="1"/>
+          <p:nvPr/>
+        </p:nvSpPr>
+        <p:spPr>
+          <a:xfrm>
+            <a:off x="723900" y="1268526"/>
+            <a:ext cx="4663068" cy="292388"/>
+          </a:xfrm>
+          <a:prstGeom prst="rect">
+            <a:avLst/>
+          </a:prstGeom>
+          <a:noFill/>
+        </p:spPr>
+        <p:txBody>
+          <a:bodyPr vert="horz" wrap="square" rtlCol="0">
+            <a:spAutoFit/>
+          </a:bodyPr>
+          <a:lstStyle/>
+          <a:p>
+            <a:r>
+              <a:rPr lang="en-US" sz="1300" b="1">
+                <a:solidFill>
+                  <a:srgbClr val="4EED0B"/>
+                </a:solidFill>
+                <a:latin typeface="Calibri" panose="020F0502020204030204" pitchFamily="34" charset="0"/>
+              </a:rPr>
+              <a:t>Command</a:t>
+            </a:r>
+            <a:endParaRPr lang="az-Cyrl-AZ" sz="1300" b="1">
+              <a:solidFill>
+                <a:srgbClr val="4EED0B"/>
+              </a:solidFill>
+              <a:latin typeface="Calibri" panose="020F0502020204030204" pitchFamily="34" charset="0"/>
+            </a:endParaRPr>
+          </a:p>
+        </p:txBody>
+      </p:sp>
+      <p:sp>
+        <p:nvSpPr>
+          <p:cNvPr id="7" name="TextBox 6">
+            <a:extLst>
+              <a:ext uri="{FF2B5EF4-FFF2-40B4-BE49-F238E27FC236}">
+                <a16:creationId xmlns:a16="http://schemas.microsoft.com/office/drawing/2014/main" id="{7BCB5A19-944F-4CAE-8AAA-0F03284B3037}"/>
+              </a:ext>
+            </a:extLst>
+          </p:cNvPr>
+          <p:cNvSpPr txBox="1"/>
+          <p:nvPr/>
+        </p:nvSpPr>
+        <p:spPr>
+          <a:xfrm>
+            <a:off x="723900" y="1573326"/>
+            <a:ext cx="4663068" cy="1169551"/>
+          </a:xfrm>
+          <a:prstGeom prst="rect">
+            <a:avLst/>
+          </a:prstGeom>
+          <a:noFill/>
+        </p:spPr>
+        <p:txBody>
+          <a:bodyPr vert="horz" wrap="square" rtlCol="0">
+            <a:spAutoFit/>
+          </a:bodyPr>
+          <a:lstStyle/>
+          <a:p>
+            <a:r>
+              <a:rPr lang="en-US" sz="1000" dirty="0">
+                <a:solidFill>
+                  <a:srgbClr val="222222"/>
+                </a:solidFill>
+                <a:latin typeface="Consolas" panose="020B0609020204030204" pitchFamily="49" charset="0"/>
+              </a:rPr>
+              <a:t>./scripts/run_hadoop_pageviews.sh</a:t>
+            </a:r>
+          </a:p>
+          <a:p>
+            <a:r>
+              <a:rPr lang="en-US" sz="1000" dirty="0">
+                <a:solidFill>
+                  <a:srgbClr val="222222"/>
+                </a:solidFill>
+                <a:latin typeface="Consolas" panose="020B0609020204030204" pitchFamily="49" charset="0"/>
+              </a:rPr>
+              <a:t>  /home/hadoop/single_project/hadoop-pageviews</a:t>
+            </a:r>
+          </a:p>
+          <a:p>
+            <a:r>
+              <a:rPr lang="en-US" sz="1000" dirty="0">
+                <a:solidFill>
+                  <a:srgbClr val="222222"/>
+                </a:solidFill>
+                <a:latin typeface="Consolas" panose="020B0609020204030204" pitchFamily="49" charset="0"/>
+              </a:rPr>
+              <a:t>  4</a:t>
+            </a:r>
+          </a:p>
+          <a:p>
+            <a:r>
+              <a:rPr lang="en-US" sz="1000" dirty="0">
+                <a:solidFill>
+                  <a:srgbClr val="222222"/>
+                </a:solidFill>
+                <a:latin typeface="Consolas" panose="020B0609020204030204" pitchFamily="49" charset="0"/>
+              </a:rPr>
+              <a:t>  /user/hadoop/single_project/input/pageviews_1h</a:t>
+            </a:r>
+          </a:p>
+          <a:p>
+            <a:r>
+              <a:rPr lang="en-US" sz="1000" dirty="0">
+                <a:solidFill>
+                  <a:srgbClr val="222222"/>
+                </a:solidFill>
+                <a:latin typeface="Consolas" panose="020B0609020204030204" pitchFamily="49" charset="0"/>
+              </a:rPr>
+              <a:t>  /user/hadoop/single_project/intermediate/demo_1h</a:t>
+            </a:r>
+          </a:p>
+          <a:p>
+            <a:r>
+              <a:rPr lang="en-US" sz="1000" dirty="0">
+                <a:solidFill>
+                  <a:srgbClr val="222222"/>
+                </a:solidFill>
+                <a:latin typeface="Consolas" panose="020B0609020204030204" pitchFamily="49" charset="0"/>
+              </a:rPr>
+              <a:t>  /user/hadoop/single_project/output/demo_1h</a:t>
+            </a:r>
+          </a:p>
+          <a:p>
+            <a:r>
+              <a:rPr lang="en-US" sz="1000" dirty="0">
+                <a:solidFill>
+                  <a:srgbClr val="222222"/>
+                </a:solidFill>
+                <a:latin typeface="Consolas" panose="020B0609020204030204" pitchFamily="49" charset="0"/>
+              </a:rPr>
+              <a:t>  10</a:t>
+            </a:r>
+            <a:endParaRPr lang="az-Cyrl-AZ" sz="1000" dirty="0">
+              <a:solidFill>
+                <a:srgbClr val="222222"/>
+              </a:solidFill>
+              <a:latin typeface="Consolas" panose="020B0609020204030204" pitchFamily="49" charset="0"/>
+            </a:endParaRPr>
+          </a:p>
+        </p:txBody>
+      </p:sp>
+      <p:sp>
+        <p:nvSpPr>
+          <p:cNvPr id="8" name="Rectangle 7">
+            <a:extLst>
+              <a:ext uri="{FF2B5EF4-FFF2-40B4-BE49-F238E27FC236}">
+                <a16:creationId xmlns:a16="http://schemas.microsoft.com/office/drawing/2014/main" id="{2520FB73-F722-495C-A19C-F31D19C90792}"/>
+              </a:ext>
+            </a:extLst>
+          </p:cNvPr>
+          <p:cNvSpPr/>
+          <p:nvPr/>
+        </p:nvSpPr>
+        <p:spPr>
+          <a:xfrm>
+            <a:off x="571500" y="3102686"/>
+            <a:ext cx="4953000" cy="2603500"/>
+          </a:xfrm>
+          <a:prstGeom prst="rect">
+            <a:avLst/>
+          </a:prstGeom>
+          <a:solidFill>
+            <a:srgbClr val="F1F1F1"/>
+          </a:solidFill>
+          <a:ln w="12700">
+            <a:solidFill>
+              <a:srgbClr val="CCCCCC"/>
+            </a:solidFill>
+          </a:ln>
+        </p:spPr>
+        <p:style>
+          <a:lnRef idx="2">
+            <a:schemeClr val="accent1">
+              <a:shade val="50000"/>
+            </a:schemeClr>
+          </a:lnRef>
+          <a:fillRef idx="1">
+            <a:schemeClr val="accent1"/>
+          </a:fillRef>
+          <a:effectRef idx="0">
+            <a:schemeClr val="accent1"/>
+          </a:effectRef>
+          <a:fontRef idx="minor">
+            <a:schemeClr val="lt1"/>
+          </a:fontRef>
+        </p:style>
+        <p:txBody>
+          <a:bodyPr rtlCol="0" anchor="ctr"/>
+          <a:lstStyle/>
+          <a:p>
+            <a:pPr algn="ctr"/>
+            <a:endParaRPr lang="az-Cyrl-AZ"/>
+          </a:p>
+        </p:txBody>
+      </p:sp>
+      <p:sp>
+        <p:nvSpPr>
+          <p:cNvPr id="9" name="TextBox 8">
+            <a:extLst>
+              <a:ext uri="{FF2B5EF4-FFF2-40B4-BE49-F238E27FC236}">
+                <a16:creationId xmlns:a16="http://schemas.microsoft.com/office/drawing/2014/main" id="{FD634D07-D678-4E6C-A350-B2DE8EF44697}"/>
+              </a:ext>
+            </a:extLst>
+          </p:cNvPr>
+          <p:cNvSpPr txBox="1"/>
+          <p:nvPr/>
+        </p:nvSpPr>
+        <p:spPr>
+          <a:xfrm>
+            <a:off x="723900" y="3229686"/>
+            <a:ext cx="4648200" cy="292388"/>
+          </a:xfrm>
+          <a:prstGeom prst="rect">
+            <a:avLst/>
+          </a:prstGeom>
+          <a:noFill/>
+        </p:spPr>
+        <p:txBody>
+          <a:bodyPr vert="horz" rtlCol="0">
+            <a:spAutoFit/>
+          </a:bodyPr>
+          <a:lstStyle/>
+          <a:p>
+            <a:r>
+              <a:rPr lang="en-US" sz="1300" b="1">
+                <a:solidFill>
+                  <a:srgbClr val="4EED0B"/>
+                </a:solidFill>
+                <a:latin typeface="Calibri" panose="020F0502020204030204" pitchFamily="34" charset="0"/>
+              </a:rPr>
+              <a:t>Observed Run</a:t>
+            </a:r>
+            <a:endParaRPr lang="az-Cyrl-AZ" sz="1300" b="1">
+              <a:solidFill>
+                <a:srgbClr val="4EED0B"/>
+              </a:solidFill>
+              <a:latin typeface="Calibri" panose="020F0502020204030204" pitchFamily="34" charset="0"/>
+            </a:endParaRPr>
+          </a:p>
+        </p:txBody>
+      </p:sp>
+      <p:sp>
+        <p:nvSpPr>
+          <p:cNvPr id="10" name="TextBox 9">
+            <a:extLst>
+              <a:ext uri="{FF2B5EF4-FFF2-40B4-BE49-F238E27FC236}">
+                <a16:creationId xmlns:a16="http://schemas.microsoft.com/office/drawing/2014/main" id="{033034B5-60A9-4EC9-9557-2CDF806F799D}"/>
+              </a:ext>
+            </a:extLst>
+          </p:cNvPr>
+          <p:cNvSpPr txBox="1"/>
+          <p:nvPr/>
+        </p:nvSpPr>
+        <p:spPr>
+          <a:xfrm>
+            <a:off x="723900" y="3534486"/>
+            <a:ext cx="4648200" cy="1384995"/>
+          </a:xfrm>
+          <a:prstGeom prst="rect">
+            <a:avLst/>
+          </a:prstGeom>
+          <a:noFill/>
+        </p:spPr>
+        <p:txBody>
+          <a:bodyPr vert="horz" rtlCol="0">
+            <a:spAutoFit/>
+          </a:bodyPr>
+          <a:lstStyle/>
+          <a:p>
+            <a:r>
+              <a:rPr lang="en-US" sz="1200" dirty="0">
+                <a:solidFill>
+                  <a:srgbClr val="222222"/>
+                </a:solidFill>
+                <a:latin typeface="Consolas" panose="020B0609020204030204" pitchFamily="49" charset="0"/>
+              </a:rPr>
+              <a:t>Input: pageviews_1h</a:t>
+            </a:r>
+          </a:p>
+          <a:p>
+            <a:r>
+              <a:rPr lang="en-US" sz="1200" dirty="0">
+                <a:solidFill>
+                  <a:srgbClr val="222222"/>
+                </a:solidFill>
+                <a:latin typeface="Consolas" panose="020B0609020204030204" pitchFamily="49" charset="0"/>
+              </a:rPr>
+              <a:t>Files: 1 gzip hourly dump</a:t>
+            </a:r>
+          </a:p>
+          <a:p>
+            <a:r>
+              <a:rPr lang="en-US" sz="1200" dirty="0">
+                <a:solidFill>
+                  <a:srgbClr val="222222"/>
+                </a:solidFill>
+                <a:latin typeface="Consolas" panose="020B0609020204030204" pitchFamily="49" charset="0"/>
+              </a:rPr>
+              <a:t>Compressed size: 51.7 MiB</a:t>
+            </a:r>
+          </a:p>
+          <a:p>
+            <a:r>
+              <a:rPr lang="en-US" sz="1200" dirty="0">
+                <a:solidFill>
+                  <a:srgbClr val="222222"/>
+                </a:solidFill>
+                <a:latin typeface="Consolas" panose="020B0609020204030204" pitchFamily="49" charset="0"/>
+              </a:rPr>
+              <a:t>HDFS storage: 103.5 MiB (replication 2)</a:t>
+            </a:r>
+          </a:p>
+          <a:p>
+            <a:r>
+              <a:rPr lang="en-US" sz="1200" dirty="0">
+                <a:solidFill>
+                  <a:srgbClr val="222222"/>
+                </a:solidFill>
+                <a:latin typeface="Consolas" panose="020B0609020204030204" pitchFamily="49" charset="0"/>
+              </a:rPr>
+              <a:t>Reducers: 4</a:t>
+            </a:r>
+          </a:p>
+          <a:p>
+            <a:r>
+              <a:rPr lang="en-US" sz="1200" dirty="0">
+                <a:solidFill>
+                  <a:srgbClr val="222222"/>
+                </a:solidFill>
+                <a:latin typeface="Consolas" panose="020B0609020204030204" pitchFamily="49" charset="0"/>
+              </a:rPr>
+              <a:t>Output status: _SUCCESS</a:t>
+            </a:r>
+          </a:p>
+          <a:p>
+            <a:r>
+              <a:rPr lang="en-US" sz="1200" dirty="0">
+                <a:solidFill>
+                  <a:srgbClr val="222222"/>
+                </a:solidFill>
+                <a:latin typeface="Consolas" panose="020B0609020204030204" pitchFamily="49" charset="0"/>
+              </a:rPr>
+              <a:t>Output files: part-r-00000 ... part-r-00003</a:t>
+            </a:r>
+            <a:endParaRPr lang="az-Cyrl-AZ" sz="1200" dirty="0">
+              <a:solidFill>
+                <a:srgbClr val="222222"/>
+              </a:solidFill>
+              <a:latin typeface="Consolas" panose="020B0609020204030204" pitchFamily="49" charset="0"/>
+            </a:endParaRPr>
+          </a:p>
+        </p:txBody>
+      </p:sp>
+      <p:sp>
+        <p:nvSpPr>
+          <p:cNvPr id="11" name="Rectangle 10">
+            <a:extLst>
+              <a:ext uri="{FF2B5EF4-FFF2-40B4-BE49-F238E27FC236}">
+                <a16:creationId xmlns:a16="http://schemas.microsoft.com/office/drawing/2014/main" id="{9D313659-6E60-4551-8F0A-74C4C00DCD6C}"/>
+              </a:ext>
+            </a:extLst>
+          </p:cNvPr>
+          <p:cNvSpPr/>
+          <p:nvPr/>
+        </p:nvSpPr>
+        <p:spPr>
+          <a:xfrm>
+            <a:off x="5880100" y="685800"/>
+            <a:ext cx="5397500" cy="5791200"/>
+          </a:xfrm>
+          <a:prstGeom prst="rect">
+            <a:avLst/>
+          </a:prstGeom>
+          <a:solidFill>
+            <a:srgbClr val="F1F1F1"/>
+          </a:solidFill>
+          <a:ln w="12700">
+            <a:solidFill>
+              <a:srgbClr val="CCCCCC"/>
+            </a:solidFill>
+          </a:ln>
+        </p:spPr>
+        <p:style>
+          <a:lnRef idx="2">
+            <a:schemeClr val="accent1">
+              <a:shade val="50000"/>
+            </a:schemeClr>
+          </a:lnRef>
+          <a:fillRef idx="1">
+            <a:schemeClr val="accent1"/>
+          </a:fillRef>
+          <a:effectRef idx="0">
+            <a:schemeClr val="accent1"/>
+          </a:effectRef>
+          <a:fontRef idx="minor">
+            <a:schemeClr val="lt1"/>
+          </a:fontRef>
+        </p:style>
+        <p:txBody>
+          <a:bodyPr rtlCol="0" anchor="ctr"/>
+          <a:lstStyle/>
+          <a:p>
+            <a:pPr algn="ctr"/>
+            <a:endParaRPr lang="az-Cyrl-AZ"/>
+          </a:p>
+        </p:txBody>
+      </p:sp>
+      <p:sp>
+        <p:nvSpPr>
+          <p:cNvPr id="12" name="TextBox 11">
+            <a:extLst>
+              <a:ext uri="{FF2B5EF4-FFF2-40B4-BE49-F238E27FC236}">
+                <a16:creationId xmlns:a16="http://schemas.microsoft.com/office/drawing/2014/main" id="{346C0D36-9503-48F6-9152-578293DE755C}"/>
+              </a:ext>
+            </a:extLst>
+          </p:cNvPr>
+          <p:cNvSpPr txBox="1"/>
+          <p:nvPr/>
+        </p:nvSpPr>
+        <p:spPr>
+          <a:xfrm>
+            <a:off x="6032500" y="692006"/>
+            <a:ext cx="5245100" cy="292388"/>
+          </a:xfrm>
+          <a:prstGeom prst="rect">
+            <a:avLst/>
+          </a:prstGeom>
+          <a:noFill/>
+        </p:spPr>
+        <p:txBody>
+          <a:bodyPr vert="horz" wrap="square" rtlCol="0">
+            <a:spAutoFit/>
+          </a:bodyPr>
+          <a:lstStyle/>
+          <a:p>
+            <a:r>
+              <a:rPr lang="en-US" sz="1300" b="1">
+                <a:solidFill>
+                  <a:srgbClr val="4EED0B"/>
+                </a:solidFill>
+                <a:latin typeface="Calibri" panose="020F0502020204030204" pitchFamily="34" charset="0"/>
+              </a:rPr>
+              <a:t>Output Excerpt</a:t>
+            </a:r>
+            <a:endParaRPr lang="az-Cyrl-AZ" sz="1300" b="1">
+              <a:solidFill>
+                <a:srgbClr val="4EED0B"/>
+              </a:solidFill>
+              <a:latin typeface="Calibri" panose="020F0502020204030204" pitchFamily="34" charset="0"/>
+            </a:endParaRPr>
+          </a:p>
+        </p:txBody>
+      </p:sp>
+      <p:sp>
+        <p:nvSpPr>
+          <p:cNvPr id="13" name="TextBox 12">
+            <a:extLst>
+              <a:ext uri="{FF2B5EF4-FFF2-40B4-BE49-F238E27FC236}">
+                <a16:creationId xmlns:a16="http://schemas.microsoft.com/office/drawing/2014/main" id="{FF8EF1F3-7DB4-4891-8907-C889534C7BBA}"/>
+              </a:ext>
+            </a:extLst>
+          </p:cNvPr>
+          <p:cNvSpPr txBox="1"/>
+          <p:nvPr/>
+        </p:nvSpPr>
+        <p:spPr>
+          <a:xfrm>
+            <a:off x="6096000" y="967800"/>
+            <a:ext cx="5118100" cy="5509200"/>
+          </a:xfrm>
+          <a:prstGeom prst="rect">
+            <a:avLst/>
+          </a:prstGeom>
+          <a:noFill/>
+        </p:spPr>
+        <p:txBody>
+          <a:bodyPr vert="horz" wrap="square" rtlCol="0">
+            <a:spAutoFit/>
+          </a:bodyPr>
+          <a:lstStyle/>
+          <a:p>
+            <a:r>
+              <a:rPr lang="en-US" sz="1100" dirty="0">
+                <a:solidFill>
+                  <a:srgbClr val="222222"/>
+                </a:solidFill>
+                <a:latin typeface="Consolas" panose="020B0609020204030204" pitchFamily="49" charset="0"/>
+              </a:rPr>
+              <a:t>{</a:t>
+            </a:r>
+          </a:p>
+          <a:p>
+            <a:r>
+              <a:rPr lang="en-US" sz="1100" dirty="0">
+                <a:solidFill>
+                  <a:srgbClr val="222222"/>
+                </a:solidFill>
+                <a:latin typeface="Consolas" panose="020B0609020204030204" pitchFamily="49" charset="0"/>
+              </a:rPr>
+              <a:t>  "summary": {</a:t>
+            </a:r>
+          </a:p>
+          <a:p>
+            <a:r>
+              <a:rPr lang="en-US" sz="1100" dirty="0">
+                <a:solidFill>
+                  <a:srgbClr val="222222"/>
+                </a:solidFill>
+                <a:latin typeface="Consolas" panose="020B0609020204030204" pitchFamily="49" charset="0"/>
+              </a:rPr>
+              <a:t>    "total_views": 15459276</a:t>
+            </a:r>
+          </a:p>
+          <a:p>
+            <a:r>
+              <a:rPr lang="en-US" sz="1100" dirty="0">
+                <a:solidFill>
+                  <a:srgbClr val="222222"/>
+                </a:solidFill>
+                <a:latin typeface="Consolas" panose="020B0609020204030204" pitchFamily="49" charset="0"/>
+              </a:rPr>
+              <a:t>  },</a:t>
+            </a:r>
+          </a:p>
+          <a:p>
+            <a:r>
+              <a:rPr lang="en-US" sz="1100" dirty="0">
+                <a:solidFill>
+                  <a:srgbClr val="222222"/>
+                </a:solidFill>
+                <a:latin typeface="Consolas" panose="020B0609020204030204" pitchFamily="49" charset="0"/>
+              </a:rPr>
+              <a:t>  "top_projects_by_views": [</a:t>
+            </a:r>
+          </a:p>
+          <a:p>
+            <a:r>
+              <a:rPr lang="en-US" sz="1100" dirty="0">
+                <a:solidFill>
+                  <a:srgbClr val="222222"/>
+                </a:solidFill>
+                <a:latin typeface="Consolas" panose="020B0609020204030204" pitchFamily="49" charset="0"/>
+              </a:rPr>
+              <a:t>    {"project": "en.m", "views": 5344906},</a:t>
+            </a:r>
+          </a:p>
+          <a:p>
+            <a:r>
+              <a:rPr lang="en-US" sz="1100" dirty="0">
+                <a:solidFill>
+                  <a:srgbClr val="222222"/>
+                </a:solidFill>
+                <a:latin typeface="Consolas" panose="020B0609020204030204" pitchFamily="49" charset="0"/>
+              </a:rPr>
+              <a:t>    {"project": "en", "views": 3007383},</a:t>
+            </a:r>
+          </a:p>
+          <a:p>
+            <a:r>
+              <a:rPr lang="en-US" sz="1100" dirty="0">
+                <a:solidFill>
+                  <a:srgbClr val="222222"/>
+                </a:solidFill>
+                <a:latin typeface="Consolas" panose="020B0609020204030204" pitchFamily="49" charset="0"/>
+              </a:rPr>
+              <a:t>    {"project": "zh", "views": 706567},</a:t>
+            </a:r>
+          </a:p>
+          <a:p>
+            <a:r>
+              <a:rPr lang="en-US" sz="1100" dirty="0">
+                <a:solidFill>
+                  <a:srgbClr val="222222"/>
+                </a:solidFill>
+                <a:latin typeface="Consolas" panose="020B0609020204030204" pitchFamily="49" charset="0"/>
+              </a:rPr>
+              <a:t>    {"project": "ja.m", "views": 698698},</a:t>
+            </a:r>
+          </a:p>
+          <a:p>
+            <a:r>
+              <a:rPr lang="en-US" sz="1100" dirty="0">
+                <a:solidFill>
+                  <a:srgbClr val="222222"/>
+                </a:solidFill>
+                <a:latin typeface="Consolas" panose="020B0609020204030204" pitchFamily="49" charset="0"/>
+              </a:rPr>
+              <a:t>    {"project": "es.m", "views": 504150},</a:t>
+            </a:r>
+          </a:p>
+          <a:p>
+            <a:r>
+              <a:rPr lang="en-US" sz="1100" dirty="0">
+                <a:solidFill>
+                  <a:srgbClr val="222222"/>
+                </a:solidFill>
+                <a:latin typeface="Consolas" panose="020B0609020204030204" pitchFamily="49" charset="0"/>
+              </a:rPr>
+              <a:t>    {"project": "ja", "views": 345676},</a:t>
+            </a:r>
+          </a:p>
+          <a:p>
+            <a:r>
+              <a:rPr lang="en-US" sz="1100" dirty="0">
+                <a:solidFill>
+                  <a:srgbClr val="222222"/>
+                </a:solidFill>
+                <a:latin typeface="Consolas" panose="020B0609020204030204" pitchFamily="49" charset="0"/>
+              </a:rPr>
+              <a:t>    {"project": "fr.m", "views": 311375},</a:t>
+            </a:r>
+          </a:p>
+          <a:p>
+            <a:r>
+              <a:rPr lang="en-US" sz="1100" dirty="0">
+                <a:solidFill>
+                  <a:srgbClr val="222222"/>
+                </a:solidFill>
+                <a:latin typeface="Consolas" panose="020B0609020204030204" pitchFamily="49" charset="0"/>
+              </a:rPr>
+              <a:t>    {"project": "ru.m", "views": 271529},</a:t>
+            </a:r>
+          </a:p>
+          <a:p>
+            <a:r>
+              <a:rPr lang="en-US" sz="1100" dirty="0">
+                <a:solidFill>
+                  <a:srgbClr val="222222"/>
+                </a:solidFill>
+                <a:latin typeface="Consolas" panose="020B0609020204030204" pitchFamily="49" charset="0"/>
+              </a:rPr>
+              <a:t>    {"project": "de.m", "views": 232317},</a:t>
+            </a:r>
+          </a:p>
+          <a:p>
+            <a:r>
+              <a:rPr lang="en-US" sz="1100" dirty="0">
+                <a:solidFill>
+                  <a:srgbClr val="222222"/>
+                </a:solidFill>
+                <a:latin typeface="Consolas" panose="020B0609020204030204" pitchFamily="49" charset="0"/>
+              </a:rPr>
+              <a:t>    {"project": "it.m", "views": 228126}</a:t>
+            </a:r>
+          </a:p>
+          <a:p>
+            <a:r>
+              <a:rPr lang="en-US" sz="1100" dirty="0">
+                <a:solidFill>
+                  <a:srgbClr val="222222"/>
+                </a:solidFill>
+                <a:latin typeface="Consolas" panose="020B0609020204030204" pitchFamily="49" charset="0"/>
+              </a:rPr>
+              <a:t>  ],</a:t>
+            </a:r>
+          </a:p>
+          <a:p>
+            <a:r>
+              <a:rPr lang="en-US" sz="1100" dirty="0">
+                <a:solidFill>
+                  <a:srgbClr val="222222"/>
+                </a:solidFill>
+                <a:latin typeface="Consolas" panose="020B0609020204030204" pitchFamily="49" charset="0"/>
+              </a:rPr>
+              <a:t>  "top_pages_by_views": [</a:t>
+            </a:r>
+          </a:p>
+          <a:p>
+            <a:r>
+              <a:rPr lang="en-US" sz="1100" dirty="0">
+                <a:solidFill>
+                  <a:srgbClr val="222222"/>
+                </a:solidFill>
+                <a:latin typeface="Consolas" panose="020B0609020204030204" pitchFamily="49" charset="0"/>
+              </a:rPr>
+              <a:t>    {"page": "en|Main_Page", "views": 132524},</a:t>
+            </a:r>
+          </a:p>
+          <a:p>
+            <a:r>
+              <a:rPr lang="en-US" sz="1100" dirty="0">
+                <a:solidFill>
+                  <a:srgbClr val="222222"/>
+                </a:solidFill>
+                <a:latin typeface="Consolas" panose="020B0609020204030204" pitchFamily="49" charset="0"/>
+              </a:rPr>
+              <a:t>    {"page": "en.m|Main_Page", "views": 83818},</a:t>
+            </a:r>
+          </a:p>
+          <a:p>
+            <a:r>
+              <a:rPr lang="en-US" sz="1100" dirty="0">
+                <a:solidFill>
+                  <a:srgbClr val="222222"/>
+                </a:solidFill>
+                <a:latin typeface="Consolas" panose="020B0609020204030204" pitchFamily="49" charset="0"/>
+              </a:rPr>
+              <a:t>    {"page": "commons.m|-", "views": 40934},</a:t>
+            </a:r>
+          </a:p>
+          <a:p>
+            <a:r>
+              <a:rPr lang="en-US" sz="1100" dirty="0">
+                <a:solidFill>
+                  <a:srgbClr val="222222"/>
+                </a:solidFill>
+                <a:latin typeface="Consolas" panose="020B0609020204030204" pitchFamily="49" charset="0"/>
+              </a:rPr>
+              <a:t>    {"page": "en|Nahui_Ollin", "views": 38512},</a:t>
+            </a:r>
+          </a:p>
+          <a:p>
+            <a:r>
+              <a:rPr lang="en-US" sz="1100" dirty="0">
+                <a:solidFill>
+                  <a:srgbClr val="222222"/>
+                </a:solidFill>
+                <a:latin typeface="Consolas" panose="020B0609020204030204" pitchFamily="49" charset="0"/>
+              </a:rPr>
+              <a:t>    {"page": "en|Special:Search", "views": 19453},</a:t>
+            </a:r>
+          </a:p>
+          <a:p>
+            <a:r>
+              <a:rPr lang="en-US" sz="1100" dirty="0">
+                <a:solidFill>
+                  <a:srgbClr val="222222"/>
+                </a:solidFill>
+                <a:latin typeface="Consolas" panose="020B0609020204030204" pitchFamily="49" charset="0"/>
+              </a:rPr>
+              <a:t>    {"page": "\"\"|-", "views": 15992},</a:t>
+            </a:r>
+          </a:p>
+          <a:p>
+            <a:r>
+              <a:rPr lang="en-US" sz="1100" dirty="0">
+                <a:solidFill>
+                  <a:srgbClr val="222222"/>
+                </a:solidFill>
+                <a:latin typeface="Consolas" panose="020B0609020204030204" pitchFamily="49" charset="0"/>
+              </a:rPr>
+              <a:t>    {"page": "ja|</a:t>
+            </a:r>
+            <a:r>
+              <a:rPr lang="ja-JP" altLang="en-US" sz="1100" dirty="0">
+                <a:solidFill>
+                  <a:srgbClr val="222222"/>
+                </a:solidFill>
+                <a:latin typeface="Consolas" panose="020B0609020204030204" pitchFamily="49" charset="0"/>
+              </a:rPr>
+              <a:t>メインページ</a:t>
+            </a:r>
+            <a:r>
+              <a:rPr lang="en-US" altLang="ja-JP" sz="1100" dirty="0">
+                <a:solidFill>
+                  <a:srgbClr val="222222"/>
+                </a:solidFill>
+                <a:latin typeface="Consolas" panose="020B0609020204030204" pitchFamily="49" charset="0"/>
+              </a:rPr>
+              <a:t>", "</a:t>
+            </a:r>
+            <a:r>
+              <a:rPr lang="en-US" sz="1100" dirty="0">
+                <a:solidFill>
+                  <a:srgbClr val="222222"/>
+                </a:solidFill>
+                <a:latin typeface="Consolas" panose="020B0609020204030204" pitchFamily="49" charset="0"/>
+              </a:rPr>
+              <a:t>views": 15715},</a:t>
+            </a:r>
+          </a:p>
+          <a:p>
+            <a:r>
+              <a:rPr lang="en-US" sz="1100" dirty="0">
+                <a:solidFill>
+                  <a:srgbClr val="222222"/>
+                </a:solidFill>
+                <a:latin typeface="Consolas" panose="020B0609020204030204" pitchFamily="49" charset="0"/>
+              </a:rPr>
+              <a:t>    {"page": "hif|khaas:RecentChanges", "views": 14920},</a:t>
+            </a:r>
+          </a:p>
+          <a:p>
+            <a:r>
+              <a:rPr lang="en-US" sz="1100" dirty="0">
+                <a:solidFill>
+                  <a:srgbClr val="222222"/>
+                </a:solidFill>
+                <a:latin typeface="Consolas" panose="020B0609020204030204" pitchFamily="49" charset="0"/>
+              </a:rPr>
+              <a:t>    {"page": "en.m|David_Allan_Coe", "views": 14697},</a:t>
+            </a:r>
+          </a:p>
+          <a:p>
+            <a:r>
+              <a:rPr lang="en-US" sz="1100" dirty="0">
+                <a:solidFill>
+                  <a:srgbClr val="222222"/>
+                </a:solidFill>
+                <a:latin typeface="Consolas" panose="020B0609020204030204" pitchFamily="49" charset="0"/>
+              </a:rPr>
+              <a:t>    {"page": "zh|-", "views": 13428}</a:t>
+            </a:r>
+          </a:p>
+          <a:p>
+            <a:r>
+              <a:rPr lang="en-US" sz="1100" dirty="0">
+                <a:solidFill>
+                  <a:srgbClr val="222222"/>
+                </a:solidFill>
+                <a:latin typeface="Consolas" panose="020B0609020204030204" pitchFamily="49" charset="0"/>
+              </a:rPr>
+              <a:t>  ],</a:t>
+            </a:r>
+          </a:p>
+          <a:p>
+            <a:r>
+              <a:rPr lang="en-US" sz="1100" dirty="0">
+                <a:solidFill>
+                  <a:srgbClr val="222222"/>
+                </a:solidFill>
+                <a:latin typeface="Consolas" panose="020B0609020204030204" pitchFamily="49" charset="0"/>
+              </a:rPr>
+              <a:t>  "views_by_hour": [</a:t>
+            </a:r>
+          </a:p>
+          <a:p>
+            <a:r>
+              <a:rPr lang="en-US" sz="1100" dirty="0">
+                <a:solidFill>
+                  <a:srgbClr val="222222"/>
+                </a:solidFill>
+                <a:latin typeface="Consolas" panose="020B0609020204030204" pitchFamily="49" charset="0"/>
+              </a:rPr>
+              <a:t>    {"hour": "20260501-00", "views": 15459276}</a:t>
+            </a:r>
+          </a:p>
+          <a:p>
+            <a:r>
+              <a:rPr lang="en-US" sz="1100" dirty="0">
+                <a:solidFill>
+                  <a:srgbClr val="222222"/>
+                </a:solidFill>
+                <a:latin typeface="Consolas" panose="020B0609020204030204" pitchFamily="49" charset="0"/>
+              </a:rPr>
+              <a:t>  ]</a:t>
+            </a:r>
+          </a:p>
+          <a:p>
+            <a:r>
+              <a:rPr lang="en-US" sz="1100" dirty="0">
+                <a:solidFill>
+                  <a:srgbClr val="222222"/>
+                </a:solidFill>
+                <a:latin typeface="Consolas" panose="020B0609020204030204" pitchFamily="49" charset="0"/>
+              </a:rPr>
+              <a:t>}</a:t>
+            </a:r>
+            <a:endParaRPr lang="az-Cyrl-AZ" sz="1100" dirty="0">
+              <a:solidFill>
+                <a:srgbClr val="222222"/>
+              </a:solidFill>
+              <a:latin typeface="Consolas" panose="020B0609020204030204" pitchFamily="49" charset="0"/>
+            </a:endParaRPr>
+          </a:p>
+        </p:txBody>
+      </p:sp>
+      <p:sp>
+        <p:nvSpPr>
+          <p:cNvPr id="14" name="TextBox 13">
+            <a:extLst>
+              <a:ext uri="{FF2B5EF4-FFF2-40B4-BE49-F238E27FC236}">
+                <a16:creationId xmlns:a16="http://schemas.microsoft.com/office/drawing/2014/main" id="{644F6306-AE06-4D89-B735-824A35BC7370}"/>
+              </a:ext>
+            </a:extLst>
+          </p:cNvPr>
+          <p:cNvSpPr txBox="1"/>
+          <p:nvPr/>
+        </p:nvSpPr>
+        <p:spPr>
+          <a:xfrm>
+            <a:off x="346075" y="5909600"/>
+            <a:ext cx="5040893" cy="461665"/>
+          </a:xfrm>
+          <a:prstGeom prst="rect">
+            <a:avLst/>
+          </a:prstGeom>
+          <a:noFill/>
+        </p:spPr>
+        <p:txBody>
+          <a:bodyPr vert="horz" wrap="square" rtlCol="0">
+            <a:spAutoFit/>
+          </a:bodyPr>
+          <a:lstStyle/>
+          <a:p>
+            <a:r>
+              <a:rPr lang="en-US" sz="1200" dirty="0">
+                <a:solidFill>
+                  <a:srgbClr val="525252"/>
+                </a:solidFill>
+                <a:latin typeface="Calibri" panose="020F0502020204030204" pitchFamily="34" charset="0"/>
+              </a:rPr>
+              <a:t>Because the demo uses 4 reducers, Hadoop writes multiple part-r files; each part contains the metric category assigned to that reducer.</a:t>
+            </a:r>
+            <a:endParaRPr lang="az-Cyrl-AZ" sz="1200" dirty="0">
+              <a:solidFill>
+                <a:srgbClr val="525252"/>
+              </a:solidFill>
+              <a:latin typeface="Calibri" panose="020F0502020204030204" pitchFamily="34" charset="0"/>
+            </a:endParaRPr>
+          </a:p>
+        </p:txBody>
+      </p:sp>
+      <p:sp>
+        <p:nvSpPr>
+          <p:cNvPr id="15" name="TextBox 14">
+            <a:extLst>
+              <a:ext uri="{FF2B5EF4-FFF2-40B4-BE49-F238E27FC236}">
+                <a16:creationId xmlns:a16="http://schemas.microsoft.com/office/drawing/2014/main" id="{4CA6C35E-DF70-4571-A7F4-69E8B999D909}"/>
               </a:ext>
             </a:extLst>
           </p:cNvPr>
@@ -4893,117 +5877,10 @@
           </a:p>
         </p:txBody>
       </p:sp>
-      <p:sp>
-        <p:nvSpPr>
-          <p:cNvPr id="6" name="TextBox 5">
-            <a:extLst>
-              <a:ext uri="{FF2B5EF4-FFF2-40B4-BE49-F238E27FC236}">
-                <a16:creationId xmlns:a16="http://schemas.microsoft.com/office/drawing/2014/main" id="{2EA9E1C5-EE35-40E5-B807-44063029A355}"/>
-              </a:ext>
-            </a:extLst>
-          </p:cNvPr>
-          <p:cNvSpPr txBox="1"/>
-          <p:nvPr/>
-        </p:nvSpPr>
-        <p:spPr>
-          <a:xfrm>
-            <a:off x="736600" y="1600200"/>
-            <a:ext cx="10541000" cy="2616101"/>
-          </a:xfrm>
-          <a:prstGeom prst="rect">
-            <a:avLst/>
-          </a:prstGeom>
-          <a:noFill/>
-        </p:spPr>
-        <p:txBody>
-          <a:bodyPr vert="horz" rtlCol="0">
-            <a:spAutoFit/>
-          </a:bodyPr>
-          <a:lstStyle/>
-          <a:p>
-            <a:pPr marL="342900" indent="-342900">
-              <a:spcAft>
-                <a:spcPts val="800"/>
-              </a:spcAft>
-              <a:buFont typeface="+mj-lt"/>
-              <a:buChar char="•"/>
-            </a:pPr>
-            <a:r>
-              <a:rPr lang="en-US">
-                <a:solidFill>
-                  <a:srgbClr val="222222"/>
-                </a:solidFill>
-                <a:latin typeface="Calibri" panose="020F0502020204030204" pitchFamily="34" charset="0"/>
-              </a:rPr>
-              <a:t>The project satisfies the Hadoop implementation requirements with two cascaded non-iterative MapReduce jobs in Java.</a:t>
-            </a:r>
-          </a:p>
-          <a:p>
-            <a:pPr marL="342900" indent="-342900">
-              <a:spcAft>
-                <a:spcPts val="800"/>
-              </a:spcAft>
-              <a:buFont typeface="+mj-lt"/>
-              <a:buChar char="•"/>
-            </a:pPr>
-            <a:r>
-              <a:rPr lang="en-US">
-                <a:solidFill>
-                  <a:srgbClr val="222222"/>
-                </a:solidFill>
-                <a:latin typeface="Calibri" panose="020F0502020204030204" pitchFamily="34" charset="0"/>
-              </a:rPr>
-              <a:t>The implementation includes custom Writable data, setup/cleanup methods, in-mapper combining, custom partitioning, and multi-reducer execution.</a:t>
-            </a:r>
-          </a:p>
-          <a:p>
-            <a:pPr marL="342900" indent="-342900">
-              <a:spcAft>
-                <a:spcPts val="800"/>
-              </a:spcAft>
-              <a:buFont typeface="+mj-lt"/>
-              <a:buChar char="•"/>
-            </a:pPr>
-            <a:r>
-              <a:rPr lang="en-US">
-                <a:solidFill>
-                  <a:srgbClr val="222222"/>
-                </a:solidFill>
-                <a:latin typeface="Calibri" panose="020F0502020204030204" pitchFamily="34" charset="0"/>
-              </a:rPr>
-              <a:t>The sequential baseline is useful for comparison, but its memory behavior becomes a bottleneck at larger scale.</a:t>
-            </a:r>
-          </a:p>
-          <a:p>
-            <a:pPr marL="342900" indent="-342900">
-              <a:spcAft>
-                <a:spcPts val="800"/>
-              </a:spcAft>
-              <a:buFont typeface="+mj-lt"/>
-              <a:buChar char="•"/>
-            </a:pPr>
-            <a:r>
-              <a:rPr lang="en-US">
-                <a:solidFill>
-                  <a:srgbClr val="222222"/>
-                </a:solidFill>
-                <a:latin typeface="Calibri" panose="020F0502020204030204" pitchFamily="34" charset="0"/>
-              </a:rPr>
-              <a:t>The final result demonstrates the trade-off between simple local execution and scalable batch processing on HDFS/YARN.</a:t>
-            </a:r>
-            <a:endParaRPr lang="az-Cyrl-AZ">
-              <a:solidFill>
-                <a:srgbClr val="222222"/>
-              </a:solidFill>
-              <a:latin typeface="Calibri" panose="020F0502020204030204" pitchFamily="34" charset="0"/>
-            </a:endParaRPr>
-          </a:p>
-        </p:txBody>
-      </p:sp>
     </p:spTree>
     <p:extLst>
       <p:ext uri="{BB962C8B-B14F-4D97-AF65-F5344CB8AC3E}">
-        <p14:creationId xmlns:p14="http://schemas.microsoft.com/office/powerpoint/2010/main" val="3409942827"/>
+        <p14:creationId xmlns:p14="http://schemas.microsoft.com/office/powerpoint/2010/main" val="3646746565"/>
       </p:ext>
     </p:extLst>
   </p:cSld>
@@ -5035,7 +5912,7 @@
           <p:cNvPr id="2" name="Rectangle 1">
             <a:extLst>
               <a:ext uri="{FF2B5EF4-FFF2-40B4-BE49-F238E27FC236}">
-                <a16:creationId xmlns:a16="http://schemas.microsoft.com/office/drawing/2014/main" id="{660F6A7A-F3BB-4762-B62E-B7FF625317B8}"/>
+                <a16:creationId xmlns:a16="http://schemas.microsoft.com/office/drawing/2014/main" id="{DA35AA88-DD00-49DA-9E49-4EA7AA23EA64}"/>
               </a:ext>
             </a:extLst>
           </p:cNvPr>
@@ -5103,7 +5980,7 @@
           <p:cNvPr id="3" name="TextBox 2">
             <a:extLst>
               <a:ext uri="{FF2B5EF4-FFF2-40B4-BE49-F238E27FC236}">
-                <a16:creationId xmlns:a16="http://schemas.microsoft.com/office/drawing/2014/main" id="{D7AF07CC-95D9-4C19-855C-3C14DD38A6CC}"/>
+                <a16:creationId xmlns:a16="http://schemas.microsoft.com/office/drawing/2014/main" id="{1D54C83F-AA11-4651-8849-ED56F7CA76C6}"/>
               </a:ext>
             </a:extLst>
           </p:cNvPr>
@@ -5133,7 +6010,7 @@
                 </a:solidFill>
                 <a:latin typeface="Georgia" panose="02040502050405020303" pitchFamily="18" charset="0"/>
               </a:rPr>
-              <a:t>Live Execution Demo</a:t>
+              <a:t>Conclusion</a:t>
             </a:r>
             <a:endParaRPr lang="az-Cyrl-AZ" sz="2300" b="1">
               <a:solidFill>
@@ -5149,7 +6026,7 @@
           <p:cNvPr id="4" name="TextBox 3">
             <a:extLst>
               <a:ext uri="{FF2B5EF4-FFF2-40B4-BE49-F238E27FC236}">
-                <a16:creationId xmlns:a16="http://schemas.microsoft.com/office/drawing/2014/main" id="{4C91F649-C6E6-417E-8B9B-755B81C5D6D3}"/>
+                <a16:creationId xmlns:a16="http://schemas.microsoft.com/office/drawing/2014/main" id="{AB0C7D4F-6878-49D2-9EBF-A07340A0E3E7}"/>
               </a:ext>
             </a:extLst>
           </p:cNvPr>
@@ -5159,7 +6036,7 @@
         <p:spPr>
           <a:xfrm>
             <a:off x="482600" y="838200"/>
-            <a:ext cx="10795000" cy="323165"/>
+            <a:ext cx="10668000" cy="338554"/>
           </a:xfrm>
           <a:prstGeom prst="rect">
             <a:avLst/>
@@ -5173,15 +6050,15 @@
           <a:lstStyle/>
           <a:p>
             <a:r>
-              <a:rPr lang="en-US" sz="1500">
+              <a:rPr lang="en-US" sz="1600">
                 <a:solidFill>
                   <a:srgbClr val="525252"/>
                 </a:solidFill>
                 <a:latin typeface="Calibri" panose="020F0502020204030204" pitchFamily="34" charset="0"/>
               </a:rPr>
-              <a:t>Hadoop MapReduce run on the 1h Wikimedia Pageviews dataset</a:t>
-            </a:r>
-            <a:endParaRPr lang="az-Cyrl-AZ" sz="1500">
+              <a:t>Final interpretation</a:t>
+            </a:r>
+            <a:endParaRPr lang="az-Cyrl-AZ" sz="1600">
               <a:solidFill>
                 <a:srgbClr val="525252"/>
               </a:solidFill>
@@ -5192,725 +6069,10 @@
       </p:sp>
       <p:sp>
         <p:nvSpPr>
-          <p:cNvPr id="5" name="Rectangle 4">
-            <a:extLst>
-              <a:ext uri="{FF2B5EF4-FFF2-40B4-BE49-F238E27FC236}">
-                <a16:creationId xmlns:a16="http://schemas.microsoft.com/office/drawing/2014/main" id="{F5DF2056-7601-4100-93AB-6BCE3DC574BB}"/>
-              </a:ext>
-            </a:extLst>
-          </p:cNvPr>
-          <p:cNvSpPr/>
-          <p:nvPr/>
-        </p:nvSpPr>
-        <p:spPr>
-          <a:xfrm>
-            <a:off x="571500" y="1397000"/>
-            <a:ext cx="5207000" cy="2603500"/>
-          </a:xfrm>
-          <a:prstGeom prst="rect">
-            <a:avLst/>
-          </a:prstGeom>
-          <a:solidFill>
-            <a:srgbClr val="F1F1F1"/>
-          </a:solidFill>
-          <a:ln w="12700">
-            <a:solidFill>
-              <a:srgbClr val="CCCCCC"/>
-            </a:solidFill>
-          </a:ln>
-        </p:spPr>
-        <p:style>
-          <a:lnRef idx="2">
-            <a:schemeClr val="accent1">
-              <a:shade val="50000"/>
-            </a:schemeClr>
-          </a:lnRef>
-          <a:fillRef idx="1">
-            <a:schemeClr val="accent1"/>
-          </a:fillRef>
-          <a:effectRef idx="0">
-            <a:schemeClr val="accent1"/>
-          </a:effectRef>
-          <a:fontRef idx="minor">
-            <a:schemeClr val="lt1"/>
-          </a:fontRef>
-        </p:style>
-        <p:txBody>
-          <a:bodyPr rtlCol="0" anchor="ctr"/>
-          <a:lstStyle/>
-          <a:p>
-            <a:pPr algn="ctr"/>
-            <a:endParaRPr lang="az-Cyrl-AZ"/>
-          </a:p>
-        </p:txBody>
-      </p:sp>
-      <p:sp>
-        <p:nvSpPr>
-          <p:cNvPr id="6" name="TextBox 5">
-            <a:extLst>
-              <a:ext uri="{FF2B5EF4-FFF2-40B4-BE49-F238E27FC236}">
-                <a16:creationId xmlns:a16="http://schemas.microsoft.com/office/drawing/2014/main" id="{4931951E-0536-410C-9337-6633E7CEBD54}"/>
-              </a:ext>
-            </a:extLst>
-          </p:cNvPr>
-          <p:cNvSpPr txBox="1"/>
-          <p:nvPr/>
-        </p:nvSpPr>
-        <p:spPr>
-          <a:xfrm>
-            <a:off x="723900" y="1524000"/>
-            <a:ext cx="4902200" cy="292388"/>
-          </a:xfrm>
-          <a:prstGeom prst="rect">
-            <a:avLst/>
-          </a:prstGeom>
-          <a:noFill/>
-        </p:spPr>
-        <p:txBody>
-          <a:bodyPr vert="horz" rtlCol="0">
-            <a:spAutoFit/>
-          </a:bodyPr>
-          <a:lstStyle/>
-          <a:p>
-            <a:r>
-              <a:rPr lang="en-US" sz="1300" b="1">
-                <a:solidFill>
-                  <a:srgbClr val="4EED0B"/>
-                </a:solidFill>
-                <a:latin typeface="Calibri" panose="020F0502020204030204" pitchFamily="34" charset="0"/>
-              </a:rPr>
-              <a:t>Command</a:t>
-            </a:r>
-            <a:endParaRPr lang="az-Cyrl-AZ" sz="1300" b="1">
-              <a:solidFill>
-                <a:srgbClr val="4EED0B"/>
-              </a:solidFill>
-              <a:latin typeface="Calibri" panose="020F0502020204030204" pitchFamily="34" charset="0"/>
-            </a:endParaRPr>
-          </a:p>
-        </p:txBody>
-      </p:sp>
-      <p:sp>
-        <p:nvSpPr>
-          <p:cNvPr id="7" name="TextBox 6">
-            <a:extLst>
-              <a:ext uri="{FF2B5EF4-FFF2-40B4-BE49-F238E27FC236}">
-                <a16:creationId xmlns:a16="http://schemas.microsoft.com/office/drawing/2014/main" id="{7BCB5A19-944F-4CAE-8AAA-0F03284B3037}"/>
-              </a:ext>
-            </a:extLst>
-          </p:cNvPr>
-          <p:cNvSpPr txBox="1"/>
-          <p:nvPr/>
-        </p:nvSpPr>
-        <p:spPr>
-          <a:xfrm>
-            <a:off x="723900" y="1828800"/>
-            <a:ext cx="4902200" cy="1169551"/>
-          </a:xfrm>
-          <a:prstGeom prst="rect">
-            <a:avLst/>
-          </a:prstGeom>
-          <a:noFill/>
-        </p:spPr>
-        <p:txBody>
-          <a:bodyPr vert="horz" rtlCol="0">
-            <a:spAutoFit/>
-          </a:bodyPr>
-          <a:lstStyle/>
-          <a:p>
-            <a:r>
-              <a:rPr lang="en-US" sz="1000">
-                <a:solidFill>
-                  <a:srgbClr val="222222"/>
-                </a:solidFill>
-                <a:latin typeface="Consolas" panose="020B0609020204030204" pitchFamily="49" charset="0"/>
-              </a:rPr>
-              <a:t>./scripts/run_hadoop_pageviews.sh</a:t>
-            </a:r>
-          </a:p>
-          <a:p>
-            <a:r>
-              <a:rPr lang="en-US" sz="1000">
-                <a:solidFill>
-                  <a:srgbClr val="222222"/>
-                </a:solidFill>
-                <a:latin typeface="Consolas" panose="020B0609020204030204" pitchFamily="49" charset="0"/>
-              </a:rPr>
-              <a:t>  /home/hadoop/single_project/hadoop-pageviews</a:t>
-            </a:r>
-          </a:p>
-          <a:p>
-            <a:r>
-              <a:rPr lang="en-US" sz="1000">
-                <a:solidFill>
-                  <a:srgbClr val="222222"/>
-                </a:solidFill>
-                <a:latin typeface="Consolas" panose="020B0609020204030204" pitchFamily="49" charset="0"/>
-              </a:rPr>
-              <a:t>  4</a:t>
-            </a:r>
-          </a:p>
-          <a:p>
-            <a:r>
-              <a:rPr lang="en-US" sz="1000">
-                <a:solidFill>
-                  <a:srgbClr val="222222"/>
-                </a:solidFill>
-                <a:latin typeface="Consolas" panose="020B0609020204030204" pitchFamily="49" charset="0"/>
-              </a:rPr>
-              <a:t>  /user/hadoop/single_project/input/pageviews_1h</a:t>
-            </a:r>
-          </a:p>
-          <a:p>
-            <a:r>
-              <a:rPr lang="en-US" sz="1000">
-                <a:solidFill>
-                  <a:srgbClr val="222222"/>
-                </a:solidFill>
-                <a:latin typeface="Consolas" panose="020B0609020204030204" pitchFamily="49" charset="0"/>
-              </a:rPr>
-              <a:t>  /user/hadoop/single_project/intermediate/demo_1h</a:t>
-            </a:r>
-          </a:p>
-          <a:p>
-            <a:r>
-              <a:rPr lang="en-US" sz="1000">
-                <a:solidFill>
-                  <a:srgbClr val="222222"/>
-                </a:solidFill>
-                <a:latin typeface="Consolas" panose="020B0609020204030204" pitchFamily="49" charset="0"/>
-              </a:rPr>
-              <a:t>  /user/hadoop/single_project/output/demo_1h</a:t>
-            </a:r>
-          </a:p>
-          <a:p>
-            <a:r>
-              <a:rPr lang="en-US" sz="1000">
-                <a:solidFill>
-                  <a:srgbClr val="222222"/>
-                </a:solidFill>
-                <a:latin typeface="Consolas" panose="020B0609020204030204" pitchFamily="49" charset="0"/>
-              </a:rPr>
-              <a:t>  10</a:t>
-            </a:r>
-            <a:endParaRPr lang="az-Cyrl-AZ" sz="1000">
-              <a:solidFill>
-                <a:srgbClr val="222222"/>
-              </a:solidFill>
-              <a:latin typeface="Consolas" panose="020B0609020204030204" pitchFamily="49" charset="0"/>
-            </a:endParaRPr>
-          </a:p>
-        </p:txBody>
-      </p:sp>
-      <p:sp>
-        <p:nvSpPr>
-          <p:cNvPr id="8" name="Rectangle 7">
-            <a:extLst>
-              <a:ext uri="{FF2B5EF4-FFF2-40B4-BE49-F238E27FC236}">
-                <a16:creationId xmlns:a16="http://schemas.microsoft.com/office/drawing/2014/main" id="{2520FB73-F722-495C-A19C-F31D19C90792}"/>
-              </a:ext>
-            </a:extLst>
-          </p:cNvPr>
-          <p:cNvSpPr/>
-          <p:nvPr/>
-        </p:nvSpPr>
-        <p:spPr>
-          <a:xfrm>
-            <a:off x="6413500" y="1397000"/>
-            <a:ext cx="4953000" cy="2603500"/>
-          </a:xfrm>
-          <a:prstGeom prst="rect">
-            <a:avLst/>
-          </a:prstGeom>
-          <a:solidFill>
-            <a:srgbClr val="F1F1F1"/>
-          </a:solidFill>
-          <a:ln w="12700">
-            <a:solidFill>
-              <a:srgbClr val="CCCCCC"/>
-            </a:solidFill>
-          </a:ln>
-        </p:spPr>
-        <p:style>
-          <a:lnRef idx="2">
-            <a:schemeClr val="accent1">
-              <a:shade val="50000"/>
-            </a:schemeClr>
-          </a:lnRef>
-          <a:fillRef idx="1">
-            <a:schemeClr val="accent1"/>
-          </a:fillRef>
-          <a:effectRef idx="0">
-            <a:schemeClr val="accent1"/>
-          </a:effectRef>
-          <a:fontRef idx="minor">
-            <a:schemeClr val="lt1"/>
-          </a:fontRef>
-        </p:style>
-        <p:txBody>
-          <a:bodyPr rtlCol="0" anchor="ctr"/>
-          <a:lstStyle/>
-          <a:p>
-            <a:pPr algn="ctr"/>
-            <a:endParaRPr lang="az-Cyrl-AZ"/>
-          </a:p>
-        </p:txBody>
-      </p:sp>
-      <p:sp>
-        <p:nvSpPr>
-          <p:cNvPr id="9" name="TextBox 8">
-            <a:extLst>
-              <a:ext uri="{FF2B5EF4-FFF2-40B4-BE49-F238E27FC236}">
-                <a16:creationId xmlns:a16="http://schemas.microsoft.com/office/drawing/2014/main" id="{FD634D07-D678-4E6C-A350-B2DE8EF44697}"/>
-              </a:ext>
-            </a:extLst>
-          </p:cNvPr>
-          <p:cNvSpPr txBox="1"/>
-          <p:nvPr/>
-        </p:nvSpPr>
-        <p:spPr>
-          <a:xfrm>
-            <a:off x="6565900" y="1524000"/>
-            <a:ext cx="4648200" cy="292388"/>
-          </a:xfrm>
-          <a:prstGeom prst="rect">
-            <a:avLst/>
-          </a:prstGeom>
-          <a:noFill/>
-        </p:spPr>
-        <p:txBody>
-          <a:bodyPr vert="horz" rtlCol="0">
-            <a:spAutoFit/>
-          </a:bodyPr>
-          <a:lstStyle/>
-          <a:p>
-            <a:r>
-              <a:rPr lang="en-US" sz="1300" b="1">
-                <a:solidFill>
-                  <a:srgbClr val="4EED0B"/>
-                </a:solidFill>
-                <a:latin typeface="Calibri" panose="020F0502020204030204" pitchFamily="34" charset="0"/>
-              </a:rPr>
-              <a:t>Observed Run</a:t>
-            </a:r>
-            <a:endParaRPr lang="az-Cyrl-AZ" sz="1300" b="1">
-              <a:solidFill>
-                <a:srgbClr val="4EED0B"/>
-              </a:solidFill>
-              <a:latin typeface="Calibri" panose="020F0502020204030204" pitchFamily="34" charset="0"/>
-            </a:endParaRPr>
-          </a:p>
-        </p:txBody>
-      </p:sp>
-      <p:sp>
-        <p:nvSpPr>
-          <p:cNvPr id="10" name="TextBox 9">
-            <a:extLst>
-              <a:ext uri="{FF2B5EF4-FFF2-40B4-BE49-F238E27FC236}">
-                <a16:creationId xmlns:a16="http://schemas.microsoft.com/office/drawing/2014/main" id="{033034B5-60A9-4EC9-9557-2CDF806F799D}"/>
-              </a:ext>
-            </a:extLst>
-          </p:cNvPr>
-          <p:cNvSpPr txBox="1"/>
-          <p:nvPr/>
-        </p:nvSpPr>
-        <p:spPr>
-          <a:xfrm>
-            <a:off x="6565900" y="1828800"/>
-            <a:ext cx="4648200" cy="1384995"/>
-          </a:xfrm>
-          <a:prstGeom prst="rect">
-            <a:avLst/>
-          </a:prstGeom>
-          <a:noFill/>
-        </p:spPr>
-        <p:txBody>
-          <a:bodyPr vert="horz" rtlCol="0">
-            <a:spAutoFit/>
-          </a:bodyPr>
-          <a:lstStyle/>
-          <a:p>
-            <a:r>
-              <a:rPr lang="en-US" sz="1200">
-                <a:solidFill>
-                  <a:srgbClr val="222222"/>
-                </a:solidFill>
-                <a:latin typeface="Consolas" panose="020B0609020204030204" pitchFamily="49" charset="0"/>
-              </a:rPr>
-              <a:t>Input: pageviews_1h</a:t>
-            </a:r>
-          </a:p>
-          <a:p>
-            <a:r>
-              <a:rPr lang="en-US" sz="1200">
-                <a:solidFill>
-                  <a:srgbClr val="222222"/>
-                </a:solidFill>
-                <a:latin typeface="Consolas" panose="020B0609020204030204" pitchFamily="49" charset="0"/>
-              </a:rPr>
-              <a:t>Files: 1 gzip hourly dump</a:t>
-            </a:r>
-          </a:p>
-          <a:p>
-            <a:r>
-              <a:rPr lang="en-US" sz="1200">
-                <a:solidFill>
-                  <a:srgbClr val="222222"/>
-                </a:solidFill>
-                <a:latin typeface="Consolas" panose="020B0609020204030204" pitchFamily="49" charset="0"/>
-              </a:rPr>
-              <a:t>Compressed size: 51.7 MiB</a:t>
-            </a:r>
-          </a:p>
-          <a:p>
-            <a:r>
-              <a:rPr lang="en-US" sz="1200">
-                <a:solidFill>
-                  <a:srgbClr val="222222"/>
-                </a:solidFill>
-                <a:latin typeface="Consolas" panose="020B0609020204030204" pitchFamily="49" charset="0"/>
-              </a:rPr>
-              <a:t>HDFS storage: 103.5 MiB (replication 2)</a:t>
-            </a:r>
-          </a:p>
-          <a:p>
-            <a:r>
-              <a:rPr lang="en-US" sz="1200">
-                <a:solidFill>
-                  <a:srgbClr val="222222"/>
-                </a:solidFill>
-                <a:latin typeface="Consolas" panose="020B0609020204030204" pitchFamily="49" charset="0"/>
-              </a:rPr>
-              <a:t>Reducers: 4</a:t>
-            </a:r>
-          </a:p>
-          <a:p>
-            <a:r>
-              <a:rPr lang="en-US" sz="1200">
-                <a:solidFill>
-                  <a:srgbClr val="222222"/>
-                </a:solidFill>
-                <a:latin typeface="Consolas" panose="020B0609020204030204" pitchFamily="49" charset="0"/>
-              </a:rPr>
-              <a:t>Output status: _SUCCESS</a:t>
-            </a:r>
-          </a:p>
-          <a:p>
-            <a:r>
-              <a:rPr lang="en-US" sz="1200">
-                <a:solidFill>
-                  <a:srgbClr val="222222"/>
-                </a:solidFill>
-                <a:latin typeface="Consolas" panose="020B0609020204030204" pitchFamily="49" charset="0"/>
-              </a:rPr>
-              <a:t>Output files: part-r-00000 ... part-r-00003</a:t>
-            </a:r>
-            <a:endParaRPr lang="az-Cyrl-AZ" sz="1200">
-              <a:solidFill>
-                <a:srgbClr val="222222"/>
-              </a:solidFill>
-              <a:latin typeface="Consolas" panose="020B0609020204030204" pitchFamily="49" charset="0"/>
-            </a:endParaRPr>
-          </a:p>
-        </p:txBody>
-      </p:sp>
-      <p:sp>
-        <p:nvSpPr>
-          <p:cNvPr id="11" name="Rectangle 10">
-            <a:extLst>
-              <a:ext uri="{FF2B5EF4-FFF2-40B4-BE49-F238E27FC236}">
-                <a16:creationId xmlns:a16="http://schemas.microsoft.com/office/drawing/2014/main" id="{9D313659-6E60-4551-8F0A-74C4C00DCD6C}"/>
-              </a:ext>
-            </a:extLst>
-          </p:cNvPr>
-          <p:cNvSpPr/>
-          <p:nvPr/>
-        </p:nvSpPr>
-        <p:spPr>
-          <a:xfrm>
-            <a:off x="571500" y="4318000"/>
-            <a:ext cx="10795000" cy="1651000"/>
-          </a:xfrm>
-          <a:prstGeom prst="rect">
-            <a:avLst/>
-          </a:prstGeom>
-          <a:solidFill>
-            <a:srgbClr val="F1F1F1"/>
-          </a:solidFill>
-          <a:ln w="12700">
-            <a:solidFill>
-              <a:srgbClr val="CCCCCC"/>
-            </a:solidFill>
-          </a:ln>
-        </p:spPr>
-        <p:style>
-          <a:lnRef idx="2">
-            <a:schemeClr val="accent1">
-              <a:shade val="50000"/>
-            </a:schemeClr>
-          </a:lnRef>
-          <a:fillRef idx="1">
-            <a:schemeClr val="accent1"/>
-          </a:fillRef>
-          <a:effectRef idx="0">
-            <a:schemeClr val="accent1"/>
-          </a:effectRef>
-          <a:fontRef idx="minor">
-            <a:schemeClr val="lt1"/>
-          </a:fontRef>
-        </p:style>
-        <p:txBody>
-          <a:bodyPr rtlCol="0" anchor="ctr"/>
-          <a:lstStyle/>
-          <a:p>
-            <a:pPr algn="ctr"/>
-            <a:endParaRPr lang="az-Cyrl-AZ"/>
-          </a:p>
-        </p:txBody>
-      </p:sp>
-      <p:sp>
-        <p:nvSpPr>
-          <p:cNvPr id="12" name="TextBox 11">
-            <a:extLst>
-              <a:ext uri="{FF2B5EF4-FFF2-40B4-BE49-F238E27FC236}">
-                <a16:creationId xmlns:a16="http://schemas.microsoft.com/office/drawing/2014/main" id="{346C0D36-9503-48F6-9152-578293DE755C}"/>
-              </a:ext>
-            </a:extLst>
-          </p:cNvPr>
-          <p:cNvSpPr txBox="1"/>
-          <p:nvPr/>
-        </p:nvSpPr>
-        <p:spPr>
-          <a:xfrm>
-            <a:off x="723900" y="4445000"/>
-            <a:ext cx="10490200" cy="292388"/>
-          </a:xfrm>
-          <a:prstGeom prst="rect">
-            <a:avLst/>
-          </a:prstGeom>
-          <a:noFill/>
-        </p:spPr>
-        <p:txBody>
-          <a:bodyPr vert="horz" rtlCol="0">
-            <a:spAutoFit/>
-          </a:bodyPr>
-          <a:lstStyle/>
-          <a:p>
-            <a:r>
-              <a:rPr lang="en-US" sz="1300" b="1">
-                <a:solidFill>
-                  <a:srgbClr val="4EED0B"/>
-                </a:solidFill>
-                <a:latin typeface="Calibri" panose="020F0502020204030204" pitchFamily="34" charset="0"/>
-              </a:rPr>
-              <a:t>Output Excerpt</a:t>
-            </a:r>
-            <a:endParaRPr lang="az-Cyrl-AZ" sz="1300" b="1">
-              <a:solidFill>
-                <a:srgbClr val="4EED0B"/>
-              </a:solidFill>
-              <a:latin typeface="Calibri" panose="020F0502020204030204" pitchFamily="34" charset="0"/>
-            </a:endParaRPr>
-          </a:p>
-        </p:txBody>
-      </p:sp>
-      <p:sp>
-        <p:nvSpPr>
-          <p:cNvPr id="13" name="TextBox 12">
-            <a:extLst>
-              <a:ext uri="{FF2B5EF4-FFF2-40B4-BE49-F238E27FC236}">
-                <a16:creationId xmlns:a16="http://schemas.microsoft.com/office/drawing/2014/main" id="{FF8EF1F3-7DB4-4891-8907-C889534C7BBA}"/>
-              </a:ext>
-            </a:extLst>
-          </p:cNvPr>
-          <p:cNvSpPr txBox="1"/>
-          <p:nvPr/>
-        </p:nvSpPr>
-        <p:spPr>
-          <a:xfrm>
-            <a:off x="723900" y="4749800"/>
-            <a:ext cx="10490200" cy="1785104"/>
-          </a:xfrm>
-          <a:prstGeom prst="rect">
-            <a:avLst/>
-          </a:prstGeom>
-          <a:noFill/>
-        </p:spPr>
-        <p:txBody>
-          <a:bodyPr vert="horz" rtlCol="0">
-            <a:spAutoFit/>
-          </a:bodyPr>
-          <a:lstStyle/>
-          <a:p>
-            <a:r>
-              <a:rPr lang="en-US" sz="1100">
-                <a:solidFill>
-                  <a:srgbClr val="222222"/>
-                </a:solidFill>
-                <a:latin typeface="Consolas" panose="020B0609020204030204" pitchFamily="49" charset="0"/>
-              </a:rPr>
-              <a:t>total_views: 15,459,276</a:t>
-            </a:r>
-          </a:p>
-          <a:p>
-            <a:r>
-              <a:rPr lang="en-US" sz="1100">
-                <a:solidFill>
-                  <a:srgbClr val="222222"/>
-                </a:solidFill>
-                <a:latin typeface="Consolas" panose="020B0609020204030204" pitchFamily="49" charset="0"/>
-              </a:rPr>
-              <a:t>top_projects_by_views:</a:t>
-            </a:r>
-          </a:p>
-          <a:p>
-            <a:r>
-              <a:rPr lang="en-US" sz="1100">
-                <a:solidFill>
-                  <a:srgbClr val="222222"/>
-                </a:solidFill>
-                <a:latin typeface="Consolas" panose="020B0609020204030204" pitchFamily="49" charset="0"/>
-              </a:rPr>
-              <a:t>  1. en.m  5,344,906</a:t>
-            </a:r>
-          </a:p>
-          <a:p>
-            <a:r>
-              <a:rPr lang="en-US" sz="1100">
-                <a:solidFill>
-                  <a:srgbClr val="222222"/>
-                </a:solidFill>
-                <a:latin typeface="Consolas" panose="020B0609020204030204" pitchFamily="49" charset="0"/>
-              </a:rPr>
-              <a:t>  2. en    3,007,383</a:t>
-            </a:r>
-          </a:p>
-          <a:p>
-            <a:r>
-              <a:rPr lang="en-US" sz="1100">
-                <a:solidFill>
-                  <a:srgbClr val="222222"/>
-                </a:solidFill>
-                <a:latin typeface="Consolas" panose="020B0609020204030204" pitchFamily="49" charset="0"/>
-              </a:rPr>
-              <a:t>  3. zh      706,567</a:t>
-            </a:r>
-          </a:p>
-          <a:p>
-            <a:r>
-              <a:rPr lang="en-US" sz="1100">
-                <a:solidFill>
-                  <a:srgbClr val="222222"/>
-                </a:solidFill>
-                <a:latin typeface="Consolas" panose="020B0609020204030204" pitchFamily="49" charset="0"/>
-              </a:rPr>
-              <a:t>top_pages_by_views:</a:t>
-            </a:r>
-          </a:p>
-          <a:p>
-            <a:r>
-              <a:rPr lang="en-US" sz="1100">
-                <a:solidFill>
-                  <a:srgbClr val="222222"/>
-                </a:solidFill>
-                <a:latin typeface="Consolas" panose="020B0609020204030204" pitchFamily="49" charset="0"/>
-              </a:rPr>
-              <a:t>  1. en|Main_Page      132,524</a:t>
-            </a:r>
-          </a:p>
-          <a:p>
-            <a:r>
-              <a:rPr lang="en-US" sz="1100">
-                <a:solidFill>
-                  <a:srgbClr val="222222"/>
-                </a:solidFill>
-                <a:latin typeface="Consolas" panose="020B0609020204030204" pitchFamily="49" charset="0"/>
-              </a:rPr>
-              <a:t>  2. en.m|Main_Page     83,818</a:t>
-            </a:r>
-          </a:p>
-          <a:p>
-            <a:r>
-              <a:rPr lang="en-US" sz="1100">
-                <a:solidFill>
-                  <a:srgbClr val="222222"/>
-                </a:solidFill>
-                <a:latin typeface="Consolas" panose="020B0609020204030204" pitchFamily="49" charset="0"/>
-              </a:rPr>
-              <a:t>views_by_hour:</a:t>
-            </a:r>
-          </a:p>
-          <a:p>
-            <a:r>
-              <a:rPr lang="en-US" sz="1100">
-                <a:solidFill>
-                  <a:srgbClr val="222222"/>
-                </a:solidFill>
-                <a:latin typeface="Consolas" panose="020B0609020204030204" pitchFamily="49" charset="0"/>
-              </a:rPr>
-              <a:t>  20260501-00 -&gt; 15,459,276</a:t>
-            </a:r>
-            <a:endParaRPr lang="az-Cyrl-AZ" sz="1100">
-              <a:solidFill>
-                <a:srgbClr val="222222"/>
-              </a:solidFill>
-              <a:latin typeface="Consolas" panose="020B0609020204030204" pitchFamily="49" charset="0"/>
-            </a:endParaRPr>
-          </a:p>
-        </p:txBody>
-      </p:sp>
-      <p:sp>
-        <p:nvSpPr>
-          <p:cNvPr id="14" name="TextBox 13">
-            <a:extLst>
-              <a:ext uri="{FF2B5EF4-FFF2-40B4-BE49-F238E27FC236}">
-                <a16:creationId xmlns:a16="http://schemas.microsoft.com/office/drawing/2014/main" id="{644F6306-AE06-4D89-B735-824A35BC7370}"/>
-              </a:ext>
-            </a:extLst>
-          </p:cNvPr>
-          <p:cNvSpPr txBox="1"/>
-          <p:nvPr/>
-        </p:nvSpPr>
-        <p:spPr>
-          <a:xfrm>
-            <a:off x="698500" y="6159500"/>
-            <a:ext cx="10541000" cy="276999"/>
-          </a:xfrm>
-          <a:prstGeom prst="rect">
-            <a:avLst/>
-          </a:prstGeom>
-          <a:noFill/>
-        </p:spPr>
-        <p:txBody>
-          <a:bodyPr vert="horz" rtlCol="0">
-            <a:spAutoFit/>
-          </a:bodyPr>
-          <a:lstStyle/>
-          <a:p>
-            <a:r>
-              <a:rPr lang="en-US" sz="1200">
-                <a:solidFill>
-                  <a:srgbClr val="525252"/>
-                </a:solidFill>
-                <a:latin typeface="Calibri" panose="020F0502020204030204" pitchFamily="34" charset="0"/>
-              </a:rPr>
-              <a:t>Because the demo uses 4 reducers, Hadoop writes multiple part-r files; each part contains the metric category assigned to that reducer.</a:t>
-            </a:r>
-            <a:endParaRPr lang="az-Cyrl-AZ" sz="1200">
-              <a:solidFill>
-                <a:srgbClr val="525252"/>
-              </a:solidFill>
-              <a:latin typeface="Calibri" panose="020F0502020204030204" pitchFamily="34" charset="0"/>
-            </a:endParaRPr>
-          </a:p>
-        </p:txBody>
-      </p:sp>
-      <p:sp>
-        <p:nvSpPr>
-          <p:cNvPr id="15" name="TextBox 14">
-            <a:extLst>
-              <a:ext uri="{FF2B5EF4-FFF2-40B4-BE49-F238E27FC236}">
-                <a16:creationId xmlns:a16="http://schemas.microsoft.com/office/drawing/2014/main" id="{4CA6C35E-DF70-4571-A7F4-69E8B999D909}"/>
+          <p:cNvPr id="5" name="TextBox 4">
+            <a:extLst>
+              <a:ext uri="{FF2B5EF4-FFF2-40B4-BE49-F238E27FC236}">
+                <a16:creationId xmlns:a16="http://schemas.microsoft.com/office/drawing/2014/main" id="{780FA22D-9A0A-457E-BA3A-DA61A2D88E2A}"/>
               </a:ext>
             </a:extLst>
           </p:cNvPr>
@@ -5951,10 +6113,117 @@
           </a:p>
         </p:txBody>
       </p:sp>
+      <p:sp>
+        <p:nvSpPr>
+          <p:cNvPr id="6" name="TextBox 5">
+            <a:extLst>
+              <a:ext uri="{FF2B5EF4-FFF2-40B4-BE49-F238E27FC236}">
+                <a16:creationId xmlns:a16="http://schemas.microsoft.com/office/drawing/2014/main" id="{2EA9E1C5-EE35-40E5-B807-44063029A355}"/>
+              </a:ext>
+            </a:extLst>
+          </p:cNvPr>
+          <p:cNvSpPr txBox="1"/>
+          <p:nvPr/>
+        </p:nvSpPr>
+        <p:spPr>
+          <a:xfrm>
+            <a:off x="736600" y="1600200"/>
+            <a:ext cx="10541000" cy="2616101"/>
+          </a:xfrm>
+          <a:prstGeom prst="rect">
+            <a:avLst/>
+          </a:prstGeom>
+          <a:noFill/>
+        </p:spPr>
+        <p:txBody>
+          <a:bodyPr vert="horz" rtlCol="0">
+            <a:spAutoFit/>
+          </a:bodyPr>
+          <a:lstStyle/>
+          <a:p>
+            <a:pPr marL="342900" indent="-342900">
+              <a:spcAft>
+                <a:spcPts val="800"/>
+              </a:spcAft>
+              <a:buFont typeface="+mj-lt"/>
+              <a:buChar char="•"/>
+            </a:pPr>
+            <a:r>
+              <a:rPr lang="en-US" dirty="0">
+                <a:solidFill>
+                  <a:srgbClr val="222222"/>
+                </a:solidFill>
+                <a:latin typeface="Calibri" panose="020F0502020204030204" pitchFamily="34" charset="0"/>
+              </a:rPr>
+              <a:t>The project satisfies the Hadoop implementation requirements with two cascaded non-iterative MapReduce jobs in Java.</a:t>
+            </a:r>
+          </a:p>
+          <a:p>
+            <a:pPr marL="342900" indent="-342900">
+              <a:spcAft>
+                <a:spcPts val="800"/>
+              </a:spcAft>
+              <a:buFont typeface="+mj-lt"/>
+              <a:buChar char="•"/>
+            </a:pPr>
+            <a:r>
+              <a:rPr lang="en-US" dirty="0">
+                <a:solidFill>
+                  <a:srgbClr val="222222"/>
+                </a:solidFill>
+                <a:latin typeface="Calibri" panose="020F0502020204030204" pitchFamily="34" charset="0"/>
+              </a:rPr>
+              <a:t>The implementation includes custom Writable data, setup/cleanup methods, in-mapper combining, custom partitioning, and multi-reducer execution.</a:t>
+            </a:r>
+          </a:p>
+          <a:p>
+            <a:pPr marL="342900" indent="-342900">
+              <a:spcAft>
+                <a:spcPts val="800"/>
+              </a:spcAft>
+              <a:buFont typeface="+mj-lt"/>
+              <a:buChar char="•"/>
+            </a:pPr>
+            <a:r>
+              <a:rPr lang="en-US" dirty="0">
+                <a:solidFill>
+                  <a:srgbClr val="222222"/>
+                </a:solidFill>
+                <a:latin typeface="Calibri" panose="020F0502020204030204" pitchFamily="34" charset="0"/>
+              </a:rPr>
+              <a:t>The sequential baseline is useful for comparison, but its memory behavior becomes a bottleneck at larger scale.</a:t>
+            </a:r>
+          </a:p>
+          <a:p>
+            <a:pPr marL="342900" indent="-342900">
+              <a:spcAft>
+                <a:spcPts val="800"/>
+              </a:spcAft>
+              <a:buFont typeface="+mj-lt"/>
+              <a:buChar char="•"/>
+            </a:pPr>
+            <a:r>
+              <a:rPr lang="en-US" dirty="0">
+                <a:solidFill>
+                  <a:srgbClr val="222222"/>
+                </a:solidFill>
+                <a:latin typeface="Calibri" panose="020F0502020204030204" pitchFamily="34" charset="0"/>
+              </a:rPr>
+              <a:t>The final result demonstrates the trade-off between simple local execution and scalable batch processing on HDFS/YARN.</a:t>
+            </a:r>
+            <a:endParaRPr lang="az-Cyrl-AZ" dirty="0">
+              <a:solidFill>
+                <a:srgbClr val="222222"/>
+              </a:solidFill>
+              <a:latin typeface="Calibri" panose="020F0502020204030204" pitchFamily="34" charset="0"/>
+            </a:endParaRPr>
+          </a:p>
+        </p:txBody>
+      </p:sp>
     </p:spTree>
     <p:extLst>
       <p:ext uri="{BB962C8B-B14F-4D97-AF65-F5344CB8AC3E}">
-        <p14:creationId xmlns:p14="http://schemas.microsoft.com/office/powerpoint/2010/main" val="3646746565"/>
+        <p14:creationId xmlns:p14="http://schemas.microsoft.com/office/powerpoint/2010/main" val="3409942827"/>
       </p:ext>
     </p:extLst>
   </p:cSld>
@@ -6223,7 +6492,7 @@
               <a:buChar char="•"/>
             </a:pPr>
             <a:r>
-              <a:rPr lang="en-US" sz="1900">
+              <a:rPr lang="en-US" sz="1900" dirty="0">
                 <a:solidFill>
                   <a:srgbClr val="222222"/>
                 </a:solidFill>
@@ -6241,7 +6510,7 @@
               <a:buChar char="•"/>
             </a:pPr>
             <a:r>
-              <a:rPr lang="en-US" sz="1900">
+              <a:rPr lang="en-US" sz="1900" dirty="0">
                 <a:solidFill>
                   <a:srgbClr val="222222"/>
                 </a:solidFill>
@@ -6259,7 +6528,7 @@
               <a:buChar char="•"/>
             </a:pPr>
             <a:r>
-              <a:rPr lang="en-US" sz="1900">
+              <a:rPr lang="en-US" sz="1900" dirty="0">
                 <a:solidFill>
                   <a:srgbClr val="222222"/>
                 </a:solidFill>
@@ -6277,7 +6546,7 @@
               <a:buChar char="•"/>
             </a:pPr>
             <a:r>
-              <a:rPr lang="en-US" sz="1900">
+              <a:rPr lang="en-US" sz="1900" dirty="0">
                 <a:solidFill>
                   <a:srgbClr val="222222"/>
                 </a:solidFill>
@@ -6285,7 +6554,7 @@
               </a:rPr>
               <a:t>The experiments focus on execution time, reducer scalability, and memory behavior.</a:t>
             </a:r>
-            <a:endParaRPr lang="az-Cyrl-AZ" sz="1900">
+            <a:endParaRPr lang="az-Cyrl-AZ" sz="1900" dirty="0">
               <a:solidFill>
                 <a:srgbClr val="222222"/>
               </a:solidFill>
@@ -7187,7 +7456,7 @@
           <a:lstStyle/>
           <a:p>
             <a:r>
-              <a:rPr lang="en-US" sz="1600">
+              <a:rPr lang="en-US" sz="1600" dirty="0">
                 <a:solidFill>
                   <a:srgbClr val="525252"/>
                 </a:solidFill>
@@ -7195,7 +7464,7 @@
               </a:rPr>
               <a:t>Compressed storage size vs logical text processed by Hadoop</a:t>
             </a:r>
-            <a:endParaRPr lang="az-Cyrl-AZ" sz="1600">
+            <a:endParaRPr lang="az-Cyrl-AZ" sz="1600" dirty="0">
               <a:solidFill>
                 <a:srgbClr val="525252"/>
               </a:solidFill>
@@ -7428,12 +7697,12 @@
                     <a:lstStyle/>
                     <a:p>
                       <a:r>
-                        <a:rPr lang="en-US" sz="1200">
+                        <a:rPr lang="en-US" sz="1200" dirty="0">
                           <a:latin typeface="Calibri" panose="020F0502020204030204" pitchFamily="34" charset="0"/>
                         </a:rPr>
                         <a:t>51.7 MiB</a:t>
                       </a:r>
-                      <a:endParaRPr lang="az-Cyrl-AZ" sz="1200">
+                      <a:endParaRPr lang="az-Cyrl-AZ" sz="1200" dirty="0">
                         <a:latin typeface="Calibri" panose="020F0502020204030204" pitchFamily="34" charset="0"/>
                       </a:endParaRPr>
                     </a:p>
@@ -7446,12 +7715,12 @@
                     <a:lstStyle/>
                     <a:p>
                       <a:r>
-                        <a:rPr lang="en-US" sz="1200">
+                        <a:rPr lang="en-US" sz="1200" dirty="0">
                           <a:latin typeface="Calibri" panose="020F0502020204030204" pitchFamily="34" charset="0"/>
                         </a:rPr>
                         <a:t>185.6 MiB</a:t>
                       </a:r>
-                      <a:endParaRPr lang="az-Cyrl-AZ" sz="1200">
+                      <a:endParaRPr lang="az-Cyrl-AZ" sz="1200" dirty="0">
                         <a:latin typeface="Calibri" panose="020F0502020204030204" pitchFamily="34" charset="0"/>
                       </a:endParaRPr>
                     </a:p>
@@ -7464,12 +7733,12 @@
                     <a:lstStyle/>
                     <a:p>
                       <a:r>
-                        <a:rPr lang="en-US" sz="1200">
+                        <a:rPr lang="en-US" sz="1200" dirty="0">
                           <a:latin typeface="Calibri" panose="020F0502020204030204" pitchFamily="34" charset="0"/>
                         </a:rPr>
                         <a:t>103.5 MiB</a:t>
                       </a:r>
-                      <a:endParaRPr lang="az-Cyrl-AZ" sz="1200">
+                      <a:endParaRPr lang="az-Cyrl-AZ" sz="1200" dirty="0">
                         <a:latin typeface="Calibri" panose="020F0502020204030204" pitchFamily="34" charset="0"/>
                       </a:endParaRPr>
                     </a:p>
@@ -7522,12 +7791,12 @@
                     <a:lstStyle/>
                     <a:p>
                       <a:r>
-                        <a:rPr lang="en-US" sz="1200">
+                        <a:rPr lang="en-US" sz="1200" dirty="0">
                           <a:latin typeface="Calibri" panose="020F0502020204030204" pitchFamily="34" charset="0"/>
                         </a:rPr>
                         <a:t>199.9 MiB</a:t>
                       </a:r>
-                      <a:endParaRPr lang="az-Cyrl-AZ" sz="1200">
+                      <a:endParaRPr lang="az-Cyrl-AZ" sz="1200" dirty="0">
                         <a:latin typeface="Calibri" panose="020F0502020204030204" pitchFamily="34" charset="0"/>
                       </a:endParaRPr>
                     </a:p>
@@ -7540,12 +7809,12 @@
                     <a:lstStyle/>
                     <a:p>
                       <a:r>
-                        <a:rPr lang="en-US" sz="1200">
+                        <a:rPr lang="en-US" sz="1200" dirty="0">
                           <a:latin typeface="Calibri" panose="020F0502020204030204" pitchFamily="34" charset="0"/>
                         </a:rPr>
                         <a:t>723.2 MiB</a:t>
                       </a:r>
-                      <a:endParaRPr lang="az-Cyrl-AZ" sz="1200">
+                      <a:endParaRPr lang="az-Cyrl-AZ" sz="1200" dirty="0">
                         <a:latin typeface="Calibri" panose="020F0502020204030204" pitchFamily="34" charset="0"/>
                       </a:endParaRPr>
                     </a:p>
@@ -7558,12 +7827,12 @@
                     <a:lstStyle/>
                     <a:p>
                       <a:r>
-                        <a:rPr lang="en-US" sz="1200">
+                        <a:rPr lang="en-US" sz="1200" dirty="0">
                           <a:latin typeface="Calibri" panose="020F0502020204030204" pitchFamily="34" charset="0"/>
                         </a:rPr>
                         <a:t>399.8 MiB</a:t>
                       </a:r>
-                      <a:endParaRPr lang="az-Cyrl-AZ" sz="1200">
+                      <a:endParaRPr lang="az-Cyrl-AZ" sz="1200" dirty="0">
                         <a:latin typeface="Calibri" panose="020F0502020204030204" pitchFamily="34" charset="0"/>
                       </a:endParaRPr>
                     </a:p>
@@ -7616,12 +7885,12 @@
                     <a:lstStyle/>
                     <a:p>
                       <a:r>
-                        <a:rPr lang="en-US" sz="1200">
+                        <a:rPr lang="en-US" sz="1200" dirty="0">
                           <a:latin typeface="Calibri" panose="020F0502020204030204" pitchFamily="34" charset="0"/>
                         </a:rPr>
                         <a:t>400.6 MiB</a:t>
                       </a:r>
-                      <a:endParaRPr lang="az-Cyrl-AZ" sz="1200">
+                      <a:endParaRPr lang="az-Cyrl-AZ" sz="1200" dirty="0">
                         <a:latin typeface="Calibri" panose="020F0502020204030204" pitchFamily="34" charset="0"/>
                       </a:endParaRPr>
                     </a:p>
@@ -7652,12 +7921,12 @@
                     <a:lstStyle/>
                     <a:p>
                       <a:r>
-                        <a:rPr lang="en-US" sz="1200">
+                        <a:rPr lang="en-US" sz="1200" dirty="0">
                           <a:latin typeface="Calibri" panose="020F0502020204030204" pitchFamily="34" charset="0"/>
                         </a:rPr>
                         <a:t>801.3 MiB</a:t>
                       </a:r>
-                      <a:endParaRPr lang="az-Cyrl-AZ" sz="1200">
+                      <a:endParaRPr lang="az-Cyrl-AZ" sz="1200" dirty="0">
                         <a:latin typeface="Calibri" panose="020F0502020204030204" pitchFamily="34" charset="0"/>
                       </a:endParaRPr>
                     </a:p>
@@ -7710,12 +7979,12 @@
                     <a:lstStyle/>
                     <a:p>
                       <a:r>
-                        <a:rPr lang="en-US" sz="1200">
+                        <a:rPr lang="en-US" sz="1200" dirty="0">
                           <a:latin typeface="Calibri" panose="020F0502020204030204" pitchFamily="34" charset="0"/>
                         </a:rPr>
                         <a:t>845.4 MiB</a:t>
                       </a:r>
-                      <a:endParaRPr lang="az-Cyrl-AZ" sz="1200">
+                      <a:endParaRPr lang="az-Cyrl-AZ" sz="1200" dirty="0">
                         <a:latin typeface="Calibri" panose="020F0502020204030204" pitchFamily="34" charset="0"/>
                       </a:endParaRPr>
                     </a:p>
@@ -7797,15 +8066,33 @@
           <a:lstStyle/>
           <a:p>
             <a:r>
-              <a:rPr lang="en-US" sz="1500">
+              <a:rPr lang="en-US" sz="1500" dirty="0">
                 <a:solidFill>
                   <a:srgbClr val="333333"/>
                 </a:solidFill>
                 <a:latin typeface="Calibri" panose="020F0502020204030204" pitchFamily="34" charset="0"/>
               </a:rPr>
-              <a:t>The input files are stored as gzip-compressed Wikimedia hourly dumps. Hadoop stores the compressed files in HDFS, but during MapReduce execution it reads the decompressed text records. The HDFS physical usage is higher because the cluster uses replication factor 2.</a:t>
-            </a:r>
-            <a:endParaRPr lang="az-Cyrl-AZ" sz="1500">
+              <a:t>The input files are stored as </a:t>
+            </a:r>
+            <a:r>
+              <a:rPr lang="en-US" sz="1500" dirty="0" err="1">
+                <a:solidFill>
+                  <a:srgbClr val="333333"/>
+                </a:solidFill>
+                <a:latin typeface="Calibri" panose="020F0502020204030204" pitchFamily="34" charset="0"/>
+              </a:rPr>
+              <a:t>gzip</a:t>
+            </a:r>
+            <a:r>
+              <a:rPr lang="en-US" sz="1500" dirty="0">
+                <a:solidFill>
+                  <a:srgbClr val="333333"/>
+                </a:solidFill>
+                <a:latin typeface="Calibri" panose="020F0502020204030204" pitchFamily="34" charset="0"/>
+              </a:rPr>
+              <a:t>-compressed Wikimedia hourly dumps. Hadoop stores the compressed files in HDFS, but during MapReduce execution it reads the decompressed text records. The HDFS physical usage is higher because the cluster uses replication factor 2.</a:t>
+            </a:r>
+            <a:endParaRPr lang="az-Cyrl-AZ" sz="1500" dirty="0">
               <a:solidFill>
                 <a:srgbClr val="333333"/>
               </a:solidFill>
@@ -8033,7 +8320,7 @@
           <a:lstStyle/>
           <a:p>
             <a:r>
-              <a:rPr lang="en-US" sz="1600">
+              <a:rPr lang="en-US" sz="1600" dirty="0">
                 <a:solidFill>
                   <a:srgbClr val="525252"/>
                 </a:solidFill>
@@ -8041,7 +8328,7 @@
               </a:rPr>
               <a:t>Single-student pseudo-distributed Hadoop environment</a:t>
             </a:r>
-            <a:endParaRPr lang="az-Cyrl-AZ" sz="1600">
+            <a:endParaRPr lang="az-Cyrl-AZ" sz="1600" dirty="0">
               <a:solidFill>
                 <a:srgbClr val="525252"/>
               </a:solidFill>
@@ -8225,15 +8512,33 @@
           <a:lstStyle/>
           <a:p>
             <a:r>
-              <a:rPr lang="en-US" sz="1300">
+              <a:rPr lang="en-US" sz="1300" dirty="0">
                 <a:solidFill>
                   <a:srgbClr val="333333"/>
                 </a:solidFill>
                 <a:latin typeface="Calibri" panose="020F0502020204030204" pitchFamily="34" charset="0"/>
               </a:rPr>
-              <a:t>Input files are stored in HDFS under /user/hadoop/single_project/input. Intermediate and final outputs are also written to HDFS.</a:t>
-            </a:r>
-            <a:endParaRPr lang="az-Cyrl-AZ" sz="1300">
+              <a:t>Input files are stored in HDFS under /user/hadoop/</a:t>
+            </a:r>
+            <a:r>
+              <a:rPr lang="en-US" sz="1300" dirty="0" err="1">
+                <a:solidFill>
+                  <a:srgbClr val="333333"/>
+                </a:solidFill>
+                <a:latin typeface="Calibri" panose="020F0502020204030204" pitchFamily="34" charset="0"/>
+              </a:rPr>
+              <a:t>single_project</a:t>
+            </a:r>
+            <a:r>
+              <a:rPr lang="en-US" sz="1300" dirty="0">
+                <a:solidFill>
+                  <a:srgbClr val="333333"/>
+                </a:solidFill>
+                <a:latin typeface="Calibri" panose="020F0502020204030204" pitchFamily="34" charset="0"/>
+              </a:rPr>
+              <a:t>/input. Intermediate and final outputs are also written to HDFS.</a:t>
+            </a:r>
+            <a:endParaRPr lang="az-Cyrl-AZ" sz="1300" dirty="0">
               <a:solidFill>
                 <a:srgbClr val="333333"/>
               </a:solidFill>
@@ -8371,7 +8676,7 @@
           <a:lstStyle/>
           <a:p>
             <a:r>
-              <a:rPr lang="en-US" sz="1300">
+              <a:rPr lang="en-US" sz="1300" dirty="0">
                 <a:solidFill>
                   <a:srgbClr val="333333"/>
                 </a:solidFill>
@@ -8379,7 +8684,7 @@
               </a:rPr>
               <a:t>YARN runs the Hadoop MapReduce jobs. The Java application is executed as a packaged JAR.</a:t>
             </a:r>
-            <a:endParaRPr lang="az-Cyrl-AZ" sz="1300">
+            <a:endParaRPr lang="az-Cyrl-AZ" sz="1300" dirty="0">
               <a:solidFill>
                 <a:srgbClr val="333333"/>
               </a:solidFill>
@@ -9050,7 +9355,7 @@
           <a:lstStyle/>
           <a:p>
             <a:r>
-              <a:rPr lang="en-US" sz="2300" b="1">
+              <a:rPr lang="en-US" sz="2300" b="1" dirty="0">
                 <a:solidFill>
                   <a:srgbClr val="FFFFFF"/>
                 </a:solidFill>
@@ -9058,7 +9363,7 @@
               </a:rPr>
               <a:t>Hadoop Implementation</a:t>
             </a:r>
-            <a:endParaRPr lang="az-Cyrl-AZ" sz="2300" b="1">
+            <a:endParaRPr lang="az-Cyrl-AZ" sz="2300" b="1" dirty="0">
               <a:solidFill>
                 <a:srgbClr val="FFFFFF"/>
               </a:solidFill>
@@ -9797,7 +10102,7 @@
           <a:lstStyle/>
           <a:p>
             <a:r>
-              <a:rPr lang="en-US" sz="1300">
+              <a:rPr lang="en-US" sz="1300" dirty="0">
                 <a:solidFill>
                   <a:srgbClr val="333333"/>
                 </a:solidFill>
@@ -9807,7 +10112,7 @@
 Reducers: 1, 2, 4, 8
 Hadoop only</a:t>
             </a:r>
-            <a:endParaRPr lang="az-Cyrl-AZ" sz="1300">
+            <a:endParaRPr lang="az-Cyrl-AZ" sz="1300" dirty="0">
               <a:solidFill>
                 <a:srgbClr val="333333"/>
               </a:solidFill>
@@ -9945,7 +10250,7 @@
           <a:lstStyle/>
           <a:p>
             <a:r>
-              <a:rPr lang="en-US" sz="1300">
+              <a:rPr lang="en-US" sz="1300" dirty="0">
                 <a:solidFill>
                   <a:srgbClr val="333333"/>
                 </a:solidFill>
@@ -9955,7 +10260,7 @@
 Hadoop: average YARN allocated MB
 Sequential: peak RSS MB</a:t>
             </a:r>
-            <a:endParaRPr lang="az-Cyrl-AZ" sz="1300">
+            <a:endParaRPr lang="az-Cyrl-AZ" sz="1300" dirty="0">
               <a:solidFill>
                 <a:srgbClr val="333333"/>
               </a:solidFill>
@@ -10183,7 +10488,7 @@
           <a:lstStyle/>
           <a:p>
             <a:r>
-              <a:rPr lang="en-US" sz="1600">
+              <a:rPr lang="en-US" sz="1600" dirty="0">
                 <a:solidFill>
                   <a:srgbClr val="525252"/>
                 </a:solidFill>
@@ -10191,7 +10496,7 @@
               </a:rPr>
               <a:t>Hadoop with 4 reducers vs Python sequential baseline</a:t>
             </a:r>
-            <a:endParaRPr lang="az-Cyrl-AZ" sz="1600">
+            <a:endParaRPr lang="az-Cyrl-AZ" sz="1600" dirty="0">
               <a:solidFill>
                 <a:srgbClr val="525252"/>
               </a:solidFill>
@@ -10311,7 +10616,7 @@
           <a:lstStyle/>
           <a:p>
             <a:r>
-              <a:rPr lang="en-US" sz="1300">
+              <a:rPr lang="en-US" sz="1300" dirty="0">
                 <a:solidFill>
                   <a:srgbClr val="333333"/>
                 </a:solidFill>
@@ -10319,7 +10624,7 @@
               </a:rPr>
               <a:t>Sequential processing is faster on 1h, 4h, and 8h because the single-VM setup makes Hadoop startup, shuffle, and disk I/O overhead dominant. The 16h stress test shows the opposite scalability risk: Hadoop completes, while the Python process is killed under memory pressure.</a:t>
             </a:r>
-            <a:endParaRPr lang="az-Cyrl-AZ" sz="1300">
+            <a:endParaRPr lang="az-Cyrl-AZ" sz="1300" dirty="0">
               <a:solidFill>
                 <a:srgbClr val="333333"/>
               </a:solidFill>
